--- a/愛打_MVP_v1_執行文件.pptx
+++ b/愛打_MVP_v1_執行文件.pptx
@@ -11,9 +11,6 @@
     <p:sldId id="259" r:id="rId10"/>
     <p:sldId id="260" r:id="rId11"/>
     <p:sldId id="261" r:id="rId12"/>
-    <p:sldId id="262" r:id="rId13"/>
-    <p:sldId id="263" r:id="rId14"/>
-    <p:sldId id="264" r:id="rId15"/>
   </p:sldIdLst>
   <p:sldSz cx="12191695" cy="6858000" type="screen4x3"/>
   <p:notesSz cx="6858000" cy="9144000"/>
@@ -3121,6 +3118,9 @@
           <a:solidFill>
             <a:srgbClr val="00D4FF"/>
           </a:solidFill>
+          <a:ln>
+            <a:noFill/>
+          </a:ln>
         </p:spPr>
         <p:style>
           <a:lnRef idx="1">
@@ -3247,7 +3247,7 @@
               </a:defRPr>
             </a:pPr>
             <a:r>
-              <a:t>執行流程文件  v2</a:t>
+              <a:t>執行流程文件  v3 最終版</a:t>
             </a:r>
           </a:p>
         </p:txBody>
@@ -3269,6 +3269,9 @@
           <a:solidFill>
             <a:srgbClr val="FFD700"/>
           </a:solidFill>
+          <a:ln>
+            <a:noFill/>
+          </a:ln>
         </p:spPr>
         <p:style>
           <a:lnRef idx="1">
@@ -3359,7 +3362,7 @@
               </a:defRPr>
             </a:pPr>
             <a:r>
-              <a:t>MVP v1 更新版 (含口訣+音樂+抱抱)</a:t>
+              <a:t>MVP v3 最終版（含口訣·音樂·命名）</a:t>
             </a:r>
           </a:p>
         </p:txBody>
@@ -3395,7 +3398,7 @@
               </a:defRPr>
             </a:pPr>
             <a:r>
-              <a:t>2026-04-29 · v2</a:t>
+              <a:t>2026-04-29 · v3</a:t>
             </a:r>
           </a:p>
         </p:txBody>
@@ -3443,6 +3446,9 @@
           <a:solidFill>
             <a:srgbClr val="00D4FF"/>
           </a:solidFill>
+          <a:ln>
+            <a:noFill/>
+          </a:ln>
         </p:spPr>
         <p:style>
           <a:lnRef idx="1">
@@ -3497,7 +3503,7 @@
               </a:defRPr>
             </a:pPr>
             <a:r>
-              <a:t> v2 更新內容</a:t>
+              <a:t> v3 所有變更一覽</a:t>
             </a:r>
           </a:p>
         </p:txBody>
@@ -3519,6 +3525,9 @@
           <a:solidFill>
             <a:srgbClr val="00D4FF"/>
           </a:solidFill>
+          <a:ln>
+            <a:noFill/>
+          </a:ln>
         </p:spPr>
         <p:style>
           <a:lnRef idx="1">
@@ -3559,6 +3568,9 @@
           <a:solidFill>
             <a:srgbClr val="22223E"/>
           </a:solidFill>
+          <a:ln>
+            <a:noFill/>
+          </a:ln>
         </p:spPr>
         <p:style>
           <a:lnRef idx="1">
@@ -3613,7 +3625,7 @@
               </a:defRPr>
             </a:pPr>
             <a:r>
-              <a:t>第二輪討論後嘅 7 項變更</a:t>
+              <a:t>8 項核心設計，全部納入 MVP v1</a:t>
             </a:r>
           </a:p>
         </p:txBody>
@@ -3626,8 +3638,8 @@
         </p:nvSpPr>
         <p:spPr>
           <a:xfrm>
-            <a:off x="1097280" y="2560320"/>
-            <a:ext cx="457200" cy="457200"/>
+            <a:off x="1097280" y="2468880"/>
+            <a:ext cx="457200" cy="411480"/>
           </a:xfrm>
           <a:prstGeom prst="rect">
             <a:avLst/>
@@ -3635,6 +3647,9 @@
           <a:solidFill>
             <a:srgbClr val="00D4FF"/>
           </a:solidFill>
+          <a:ln>
+            <a:noFill/>
+          </a:ln>
         </p:spPr>
         <p:style>
           <a:lnRef idx="1">
@@ -3666,7 +3681,7 @@
         </p:nvSpPr>
         <p:spPr>
           <a:xfrm>
-            <a:off x="1188720" y="2606040"/>
+            <a:off x="1188720" y="2496312"/>
             <a:ext cx="365760" cy="365760"/>
           </a:xfrm>
           <a:prstGeom prst="rect">
@@ -3681,7 +3696,7 @@
           <a:lstStyle/>
           <a:p>
             <a:pPr algn="ctr">
-              <a:defRPr sz="1600" b="1">
+              <a:defRPr sz="1400" b="1">
                 <a:solidFill>
                   <a:srgbClr val="1A1A2E"/>
                 </a:solidFill>
@@ -3702,8 +3717,8 @@
         </p:nvSpPr>
         <p:spPr>
           <a:xfrm>
-            <a:off x="1828800" y="2606040"/>
-            <a:ext cx="8686800" cy="365760"/>
+            <a:off x="1828800" y="2496312"/>
+            <a:ext cx="5029200" cy="365760"/>
           </a:xfrm>
           <a:prstGeom prst="rect">
             <a:avLst/>
@@ -3717,36 +3732,75 @@
           <a:lstStyle/>
           <a:p>
             <a:pPr algn="l">
-              <a:defRPr sz="1400" b="0">
-                <a:solidFill>
-                  <a:srgbClr val="E8E8E8"/>
-                </a:solidFill>
-                <a:latin typeface="Arial"/>
-              </a:defRPr>
-            </a:pPr>
-            <a:r>
-              <a:t>口訣系統 — 打小人用傳統口訣，抱抱用自創祝福口訣</a:t>
-            </a:r>
-          </a:p>
-        </p:txBody>
-      </p:sp>
-      <p:sp>
-        <p:nvSpPr>
-          <p:cNvPr id="10" name="Rectangle 9"/>
+              <a:defRPr sz="1300" b="1">
+                <a:solidFill>
+                  <a:srgbClr val="FFFFFF"/>
+                </a:solidFill>
+                <a:latin typeface="Arial"/>
+              </a:defRPr>
+            </a:pPr>
+            <a:r>
+              <a:t>打小人 + 愛的抱抱 雙遊戲引擎</a:t>
+            </a:r>
+          </a:p>
+        </p:txBody>
+      </p:sp>
+      <p:sp>
+        <p:nvSpPr>
+          <p:cNvPr id="10" name="TextBox 9"/>
+          <p:cNvSpPr txBox="1"/>
+          <p:nvPr/>
+        </p:nvSpPr>
+        <p:spPr>
+          <a:xfrm>
+            <a:off x="7132320" y="2496312"/>
+            <a:ext cx="3657600" cy="365760"/>
+          </a:xfrm>
+          <a:prstGeom prst="rect">
+            <a:avLst/>
+          </a:prstGeom>
+          <a:noFill/>
+        </p:spPr>
+        <p:txBody>
+          <a:bodyPr wrap="square">
+            <a:spAutoFit/>
+          </a:bodyPr>
+          <a:lstStyle/>
+          <a:p>
+            <a:pPr algn="l">
+              <a:defRPr sz="1200" b="0">
+                <a:solidFill>
+                  <a:srgbClr val="999999"/>
+                </a:solidFill>
+                <a:latin typeface="Arial"/>
+              </a:defRPr>
+            </a:pPr>
+            <a:r>
+              <a:t>同一 Canvas，換 theme</a:t>
+            </a:r>
+          </a:p>
+        </p:txBody>
+      </p:sp>
+      <p:sp>
+        <p:nvSpPr>
+          <p:cNvPr id="11" name="Rectangle 10"/>
           <p:cNvSpPr/>
           <p:nvPr/>
         </p:nvSpPr>
         <p:spPr>
           <a:xfrm>
-            <a:off x="1097280" y="3154679"/>
-            <a:ext cx="457200" cy="457200"/>
+            <a:off x="1097280" y="3017520"/>
+            <a:ext cx="457200" cy="411480"/>
           </a:xfrm>
           <a:prstGeom prst="rect">
             <a:avLst/>
           </a:prstGeom>
           <a:solidFill>
-            <a:srgbClr val="00D4FF"/>
+            <a:srgbClr val="FFD700"/>
           </a:solidFill>
+          <a:ln>
+            <a:noFill/>
+          </a:ln>
         </p:spPr>
         <p:style>
           <a:lnRef idx="1">
@@ -3772,13 +3826,13 @@
       </p:sp>
       <p:sp>
         <p:nvSpPr>
-          <p:cNvPr id="11" name="TextBox 10"/>
-          <p:cNvSpPr txBox="1"/>
-          <p:nvPr/>
-        </p:nvSpPr>
-        <p:spPr>
-          <a:xfrm>
-            <a:off x="1188720" y="3200399"/>
+          <p:cNvPr id="12" name="TextBox 11"/>
+          <p:cNvSpPr txBox="1"/>
+          <p:nvPr/>
+        </p:nvSpPr>
+        <p:spPr>
+          <a:xfrm>
+            <a:off x="1188720" y="3044952"/>
             <a:ext cx="365760" cy="365760"/>
           </a:xfrm>
           <a:prstGeom prst="rect">
@@ -3793,7 +3847,7 @@
           <a:lstStyle/>
           <a:p>
             <a:pPr algn="ctr">
-              <a:defRPr sz="1600" b="1">
+              <a:defRPr sz="1400" b="1">
                 <a:solidFill>
                   <a:srgbClr val="1A1A2E"/>
                 </a:solidFill>
@@ -3808,14 +3862,14 @@
       </p:sp>
       <p:sp>
         <p:nvSpPr>
-          <p:cNvPr id="12" name="TextBox 11"/>
-          <p:cNvSpPr txBox="1"/>
-          <p:nvPr/>
-        </p:nvSpPr>
-        <p:spPr>
-          <a:xfrm>
-            <a:off x="1828800" y="3200399"/>
-            <a:ext cx="8686800" cy="365760"/>
+          <p:cNvPr id="13" name="TextBox 12"/>
+          <p:cNvSpPr txBox="1"/>
+          <p:nvPr/>
+        </p:nvSpPr>
+        <p:spPr>
+          <a:xfrm>
+            <a:off x="1828800" y="3044952"/>
+            <a:ext cx="5029200" cy="365760"/>
           </a:xfrm>
           <a:prstGeom prst="rect">
             <a:avLst/>
@@ -3829,29 +3883,65 @@
           <a:lstStyle/>
           <a:p>
             <a:pPr algn="l">
-              <a:defRPr sz="1400" b="0">
-                <a:solidFill>
-                  <a:srgbClr val="E8E8E8"/>
-                </a:solidFill>
-                <a:latin typeface="Arial"/>
-              </a:defRPr>
-            </a:pPr>
-            <a:r>
-              <a:t>Splash 動畫延長至 ~12 秒，配合口訣節奏</a:t>
-            </a:r>
-          </a:p>
-        </p:txBody>
-      </p:sp>
-      <p:sp>
-        <p:nvSpPr>
-          <p:cNvPr id="13" name="Rectangle 12"/>
+              <a:defRPr sz="1300" b="1">
+                <a:solidFill>
+                  <a:srgbClr val="FFFFFF"/>
+                </a:solidFill>
+                <a:latin typeface="Arial"/>
+              </a:defRPr>
+            </a:pPr>
+            <a:r>
+              <a:t>口訣系統：打用傳統，抱用自創</a:t>
+            </a:r>
+          </a:p>
+        </p:txBody>
+      </p:sp>
+      <p:sp>
+        <p:nvSpPr>
+          <p:cNvPr id="14" name="TextBox 13"/>
+          <p:cNvSpPr txBox="1"/>
+          <p:nvPr/>
+        </p:nvSpPr>
+        <p:spPr>
+          <a:xfrm>
+            <a:off x="7132320" y="3044952"/>
+            <a:ext cx="3657600" cy="365760"/>
+          </a:xfrm>
+          <a:prstGeom prst="rect">
+            <a:avLst/>
+          </a:prstGeom>
+          <a:noFill/>
+        </p:spPr>
+        <p:txBody>
+          <a:bodyPr wrap="square">
+            <a:spAutoFit/>
+          </a:bodyPr>
+          <a:lstStyle/>
+          <a:p>
+            <a:pPr algn="l">
+              <a:defRPr sz="1200" b="0">
+                <a:solidFill>
+                  <a:srgbClr val="999999"/>
+                </a:solidFill>
+                <a:latin typeface="Arial"/>
+              </a:defRPr>
+            </a:pPr>
+            <a:r>
+              <a:t>每句對應一拍</a:t>
+            </a:r>
+          </a:p>
+        </p:txBody>
+      </p:sp>
+      <p:sp>
+        <p:nvSpPr>
+          <p:cNvPr id="15" name="Rectangle 14"/>
           <p:cNvSpPr/>
           <p:nvPr/>
         </p:nvSpPr>
         <p:spPr>
           <a:xfrm>
-            <a:off x="1097280" y="3749039"/>
-            <a:ext cx="457200" cy="457200"/>
+            <a:off x="1097280" y="3566160"/>
+            <a:ext cx="457200" cy="411480"/>
           </a:xfrm>
           <a:prstGeom prst="rect">
             <a:avLst/>
@@ -3859,6 +3949,9 @@
           <a:solidFill>
             <a:srgbClr val="00D4FF"/>
           </a:solidFill>
+          <a:ln>
+            <a:noFill/>
+          </a:ln>
         </p:spPr>
         <p:style>
           <a:lnRef idx="1">
@@ -3884,13 +3977,13 @@
       </p:sp>
       <p:sp>
         <p:nvSpPr>
-          <p:cNvPr id="14" name="TextBox 13"/>
-          <p:cNvSpPr txBox="1"/>
-          <p:nvPr/>
-        </p:nvSpPr>
-        <p:spPr>
-          <a:xfrm>
-            <a:off x="1188720" y="3794759"/>
+          <p:cNvPr id="16" name="TextBox 15"/>
+          <p:cNvSpPr txBox="1"/>
+          <p:nvPr/>
+        </p:nvSpPr>
+        <p:spPr>
+          <a:xfrm>
+            <a:off x="1188720" y="3593592"/>
             <a:ext cx="365760" cy="365760"/>
           </a:xfrm>
           <a:prstGeom prst="rect">
@@ -3905,7 +3998,7 @@
           <a:lstStyle/>
           <a:p>
             <a:pPr algn="ctr">
-              <a:defRPr sz="1600" b="1">
+              <a:defRPr sz="1400" b="1">
                 <a:solidFill>
                   <a:srgbClr val="1A1A2E"/>
                 </a:solidFill>
@@ -3920,14 +4013,14 @@
       </p:sp>
       <p:sp>
         <p:nvSpPr>
-          <p:cNvPr id="15" name="TextBox 14"/>
-          <p:cNvSpPr txBox="1"/>
-          <p:nvPr/>
-        </p:nvSpPr>
-        <p:spPr>
-          <a:xfrm>
-            <a:off x="1828800" y="3794759"/>
-            <a:ext cx="8686800" cy="365760"/>
+          <p:cNvPr id="17" name="TextBox 16"/>
+          <p:cNvSpPr txBox="1"/>
+          <p:nvPr/>
+        </p:nvSpPr>
+        <p:spPr>
+          <a:xfrm>
+            <a:off x="1828800" y="3593592"/>
+            <a:ext cx="5029200" cy="365760"/>
           </a:xfrm>
           <a:prstGeom prst="rect">
             <a:avLst/>
@@ -3941,36 +4034,75 @@
           <a:lstStyle/>
           <a:p>
             <a:pPr algn="l">
-              <a:defRPr sz="1400" b="0">
-                <a:solidFill>
-                  <a:srgbClr val="E8E8E8"/>
-                </a:solidFill>
-                <a:latin typeface="Arial"/>
-              </a:defRPr>
-            </a:pPr>
-            <a:r>
-              <a:t>日後支援用戶自創口訣 + 多語言（英文、泰文）</a:t>
-            </a:r>
-          </a:p>
-        </p:txBody>
-      </p:sp>
-      <p:sp>
-        <p:nvSpPr>
-          <p:cNvPr id="16" name="Rectangle 15"/>
+              <a:defRPr sz="1300" b="1">
+                <a:solidFill>
+                  <a:srgbClr val="FFFFFF"/>
+                </a:solidFill>
+                <a:latin typeface="Arial"/>
+              </a:defRPr>
+            </a:pPr>
+            <a:r>
+              <a:t>Splash ~12 秒配合口訣顯示</a:t>
+            </a:r>
+          </a:p>
+        </p:txBody>
+      </p:sp>
+      <p:sp>
+        <p:nvSpPr>
+          <p:cNvPr id="18" name="TextBox 17"/>
+          <p:cNvSpPr txBox="1"/>
+          <p:nvPr/>
+        </p:nvSpPr>
+        <p:spPr>
+          <a:xfrm>
+            <a:off x="7132320" y="3593592"/>
+            <a:ext cx="3657600" cy="365760"/>
+          </a:xfrm>
+          <a:prstGeom prst="rect">
+            <a:avLst/>
+          </a:prstGeom>
+          <a:noFill/>
+        </p:spPr>
+        <p:txBody>
+          <a:bodyPr wrap="square">
+            <a:spAutoFit/>
+          </a:bodyPr>
+          <a:lstStyle/>
+          <a:p>
+            <a:pPr algn="l">
+              <a:defRPr sz="1200" b="0">
+                <a:solidFill>
+                  <a:srgbClr val="999999"/>
+                </a:solidFill>
+                <a:latin typeface="Arial"/>
+              </a:defRPr>
+            </a:pPr>
+            <a:r>
+              <a:t>⚡→Logo→口訣→主頁</a:t>
+            </a:r>
+          </a:p>
+        </p:txBody>
+      </p:sp>
+      <p:sp>
+        <p:nvSpPr>
+          <p:cNvPr id="19" name="Rectangle 18"/>
           <p:cNvSpPr/>
           <p:nvPr/>
         </p:nvSpPr>
         <p:spPr>
           <a:xfrm>
-            <a:off x="1097280" y="4343400"/>
-            <a:ext cx="457200" cy="457200"/>
+            <a:off x="1097280" y="4114800"/>
+            <a:ext cx="457200" cy="411480"/>
           </a:xfrm>
           <a:prstGeom prst="rect">
             <a:avLst/>
           </a:prstGeom>
           <a:solidFill>
-            <a:srgbClr val="00D4FF"/>
+            <a:srgbClr val="FFD700"/>
           </a:solidFill>
+          <a:ln>
+            <a:noFill/>
+          </a:ln>
         </p:spPr>
         <p:style>
           <a:lnRef idx="1">
@@ -3996,13 +4128,13 @@
       </p:sp>
       <p:sp>
         <p:nvSpPr>
-          <p:cNvPr id="17" name="TextBox 16"/>
-          <p:cNvSpPr txBox="1"/>
-          <p:nvPr/>
-        </p:nvSpPr>
-        <p:spPr>
-          <a:xfrm>
-            <a:off x="1188720" y="4389120"/>
+          <p:cNvPr id="20" name="TextBox 19"/>
+          <p:cNvSpPr txBox="1"/>
+          <p:nvPr/>
+        </p:nvSpPr>
+        <p:spPr>
+          <a:xfrm>
+            <a:off x="1188720" y="4142232"/>
             <a:ext cx="365760" cy="365760"/>
           </a:xfrm>
           <a:prstGeom prst="rect">
@@ -4017,7 +4149,7 @@
           <a:lstStyle/>
           <a:p>
             <a:pPr algn="ctr">
-              <a:defRPr sz="1600" b="1">
+              <a:defRPr sz="1400" b="1">
                 <a:solidFill>
                   <a:srgbClr val="1A1A2E"/>
                 </a:solidFill>
@@ -4032,14 +4164,14 @@
       </p:sp>
       <p:sp>
         <p:nvSpPr>
-          <p:cNvPr id="18" name="TextBox 17"/>
-          <p:cNvSpPr txBox="1"/>
-          <p:nvPr/>
-        </p:nvSpPr>
-        <p:spPr>
-          <a:xfrm>
-            <a:off x="1828800" y="4389120"/>
-            <a:ext cx="8686800" cy="365760"/>
+          <p:cNvPr id="21" name="TextBox 20"/>
+          <p:cNvSpPr txBox="1"/>
+          <p:nvPr/>
+        </p:nvSpPr>
+        <p:spPr>
+          <a:xfrm>
+            <a:off x="1828800" y="4142232"/>
+            <a:ext cx="5029200" cy="365760"/>
           </a:xfrm>
           <a:prstGeom prst="rect">
             <a:avLst/>
@@ -4053,29 +4185,65 @@
           <a:lstStyle/>
           <a:p>
             <a:pPr algn="l">
-              <a:defRPr sz="1400" b="0">
-                <a:solidFill>
-                  <a:srgbClr val="E8E8E8"/>
-                </a:solidFill>
-                <a:latin typeface="Arial"/>
-              </a:defRPr>
-            </a:pPr>
-            <a:r>
-              <a:t>愛的祝福 → 愛的抱抱，改為遊戲模式，善意道具</a:t>
-            </a:r>
-          </a:p>
-        </p:txBody>
-      </p:sp>
-      <p:sp>
-        <p:nvSpPr>
-          <p:cNvPr id="19" name="Rectangle 18"/>
+              <a:defRPr sz="1300" b="1">
+                <a:solidFill>
+                  <a:srgbClr val="FFFFFF"/>
+                </a:solidFill>
+                <a:latin typeface="Arial"/>
+              </a:defRPr>
+            </a:pPr>
+            <a:r>
+              <a:t>紙人命名系統（新）</a:t>
+            </a:r>
+          </a:p>
+        </p:txBody>
+      </p:sp>
+      <p:sp>
+        <p:nvSpPr>
+          <p:cNvPr id="22" name="TextBox 21"/>
+          <p:cNvSpPr txBox="1"/>
+          <p:nvPr/>
+        </p:nvSpPr>
+        <p:spPr>
+          <a:xfrm>
+            <a:off x="7132320" y="4142232"/>
+            <a:ext cx="3657600" cy="365760"/>
+          </a:xfrm>
+          <a:prstGeom prst="rect">
+            <a:avLst/>
+          </a:prstGeom>
+          <a:noFill/>
+        </p:spPr>
+        <p:txBody>
+          <a:bodyPr wrap="square">
+            <a:spAutoFit/>
+          </a:bodyPr>
+          <a:lstStyle/>
+          <a:p>
+            <a:pPr algn="l">
+              <a:defRPr sz="1200" b="0">
+                <a:solidFill>
+                  <a:srgbClr val="999999"/>
+                </a:solidFill>
+                <a:latin typeface="Arial"/>
+              </a:defRPr>
+            </a:pPr>
+            <a:r>
+              <a:t>打/抱前輸入稱呼，記存 DB</a:t>
+            </a:r>
+          </a:p>
+        </p:txBody>
+      </p:sp>
+      <p:sp>
+        <p:nvSpPr>
+          <p:cNvPr id="23" name="Rectangle 22"/>
           <p:cNvSpPr/>
           <p:nvPr/>
         </p:nvSpPr>
         <p:spPr>
           <a:xfrm>
-            <a:off x="1097280" y="4937760"/>
-            <a:ext cx="457200" cy="457200"/>
+            <a:off x="1097280" y="4663440"/>
+            <a:ext cx="457200" cy="411480"/>
           </a:xfrm>
           <a:prstGeom prst="rect">
             <a:avLst/>
@@ -4083,6 +4251,9 @@
           <a:solidFill>
             <a:srgbClr val="00D4FF"/>
           </a:solidFill>
+          <a:ln>
+            <a:noFill/>
+          </a:ln>
         </p:spPr>
         <p:style>
           <a:lnRef idx="1">
@@ -4108,13 +4279,13 @@
       </p:sp>
       <p:sp>
         <p:nvSpPr>
-          <p:cNvPr id="20" name="TextBox 19"/>
-          <p:cNvSpPr txBox="1"/>
-          <p:nvPr/>
-        </p:nvSpPr>
-        <p:spPr>
-          <a:xfrm>
-            <a:off x="1188720" y="4983480"/>
+          <p:cNvPr id="24" name="TextBox 23"/>
+          <p:cNvSpPr txBox="1"/>
+          <p:nvPr/>
+        </p:nvSpPr>
+        <p:spPr>
+          <a:xfrm>
+            <a:off x="1188720" y="4690872"/>
             <a:ext cx="365760" cy="365760"/>
           </a:xfrm>
           <a:prstGeom prst="rect">
@@ -4129,7 +4300,7 @@
           <a:lstStyle/>
           <a:p>
             <a:pPr algn="ctr">
-              <a:defRPr sz="1600" b="1">
+              <a:defRPr sz="1400" b="1">
                 <a:solidFill>
                   <a:srgbClr val="1A1A2E"/>
                 </a:solidFill>
@@ -4144,14 +4315,14 @@
       </p:sp>
       <p:sp>
         <p:nvSpPr>
-          <p:cNvPr id="21" name="TextBox 20"/>
-          <p:cNvSpPr txBox="1"/>
-          <p:nvPr/>
-        </p:nvSpPr>
-        <p:spPr>
-          <a:xfrm>
-            <a:off x="1828800" y="4983480"/>
-            <a:ext cx="8686800" cy="365760"/>
+          <p:cNvPr id="25" name="TextBox 24"/>
+          <p:cNvSpPr txBox="1"/>
+          <p:nvPr/>
+        </p:nvSpPr>
+        <p:spPr>
+          <a:xfrm>
+            <a:off x="1828800" y="4690872"/>
+            <a:ext cx="5029200" cy="365760"/>
           </a:xfrm>
           <a:prstGeom prst="rect">
             <a:avLst/>
@@ -4165,36 +4336,75 @@
           <a:lstStyle/>
           <a:p>
             <a:pPr algn="l">
-              <a:defRPr sz="1400" b="0">
-                <a:solidFill>
-                  <a:srgbClr val="E8E8E8"/>
-                </a:solidFill>
-                <a:latin typeface="Arial"/>
-              </a:defRPr>
-            </a:pPr>
-            <a:r>
-              <a:t>抱抱也需口訣 + 時限 + 計分 + 成功/失敗結果</a:t>
-            </a:r>
-          </a:p>
-        </p:txBody>
-      </p:sp>
-      <p:sp>
-        <p:nvSpPr>
-          <p:cNvPr id="22" name="Rectangle 21"/>
+              <a:defRPr sz="1300" b="1">
+                <a:solidFill>
+                  <a:srgbClr val="FFFFFF"/>
+                </a:solidFill>
+                <a:latin typeface="Arial"/>
+              </a:defRPr>
+            </a:pPr>
+            <a:r>
+              <a:t>Web Audio API 音樂即時生成</a:t>
+            </a:r>
+          </a:p>
+        </p:txBody>
+      </p:sp>
+      <p:sp>
+        <p:nvSpPr>
+          <p:cNvPr id="26" name="TextBox 25"/>
+          <p:cNvSpPr txBox="1"/>
+          <p:nvPr/>
+        </p:nvSpPr>
+        <p:spPr>
+          <a:xfrm>
+            <a:off x="7132320" y="4690872"/>
+            <a:ext cx="3657600" cy="365760"/>
+          </a:xfrm>
+          <a:prstGeom prst="rect">
+            <a:avLst/>
+          </a:prstGeom>
+          <a:noFill/>
+        </p:spPr>
+        <p:txBody>
+          <a:bodyPr wrap="square">
+            <a:spAutoFit/>
+          </a:bodyPr>
+          <a:lstStyle/>
+          <a:p>
+            <a:pPr algn="l">
+              <a:defRPr sz="1200" b="0">
+                <a:solidFill>
+                  <a:srgbClr val="999999"/>
+                </a:solidFill>
+                <a:latin typeface="Arial"/>
+              </a:defRPr>
+            </a:pPr>
+            <a:r>
+              <a:t>打重音·抱柔和·可開關</a:t>
+            </a:r>
+          </a:p>
+        </p:txBody>
+      </p:sp>
+      <p:sp>
+        <p:nvSpPr>
+          <p:cNvPr id="27" name="Rectangle 26"/>
           <p:cNvSpPr/>
           <p:nvPr/>
         </p:nvSpPr>
         <p:spPr>
           <a:xfrm>
-            <a:off x="1097280" y="5532120"/>
-            <a:ext cx="457200" cy="457200"/>
+            <a:off x="1097280" y="5212080"/>
+            <a:ext cx="457200" cy="411480"/>
           </a:xfrm>
           <a:prstGeom prst="rect">
             <a:avLst/>
           </a:prstGeom>
           <a:solidFill>
-            <a:srgbClr val="00D4FF"/>
+            <a:srgbClr val="FFD700"/>
           </a:solidFill>
+          <a:ln>
+            <a:noFill/>
+          </a:ln>
         </p:spPr>
         <p:style>
           <a:lnRef idx="1">
@@ -4220,13 +4430,13 @@
       </p:sp>
       <p:sp>
         <p:nvSpPr>
-          <p:cNvPr id="23" name="TextBox 22"/>
-          <p:cNvSpPr txBox="1"/>
-          <p:nvPr/>
-        </p:nvSpPr>
-        <p:spPr>
-          <a:xfrm>
-            <a:off x="1188720" y="5577840"/>
+          <p:cNvPr id="28" name="TextBox 27"/>
+          <p:cNvSpPr txBox="1"/>
+          <p:nvPr/>
+        </p:nvSpPr>
+        <p:spPr>
+          <a:xfrm>
+            <a:off x="1188720" y="5239512"/>
             <a:ext cx="365760" cy="365760"/>
           </a:xfrm>
           <a:prstGeom prst="rect">
@@ -4241,7 +4451,7 @@
           <a:lstStyle/>
           <a:p>
             <a:pPr algn="ctr">
-              <a:defRPr sz="1600" b="1">
+              <a:defRPr sz="1400" b="1">
                 <a:solidFill>
                   <a:srgbClr val="1A1A2E"/>
                 </a:solidFill>
@@ -4256,14 +4466,14 @@
       </p:sp>
       <p:sp>
         <p:nvSpPr>
-          <p:cNvPr id="24" name="TextBox 23"/>
-          <p:cNvSpPr txBox="1"/>
-          <p:nvPr/>
-        </p:nvSpPr>
-        <p:spPr>
-          <a:xfrm>
-            <a:off x="1828800" y="5577840"/>
-            <a:ext cx="8686800" cy="365760"/>
+          <p:cNvPr id="29" name="TextBox 28"/>
+          <p:cNvSpPr txBox="1"/>
+          <p:nvPr/>
+        </p:nvSpPr>
+        <p:spPr>
+          <a:xfrm>
+            <a:off x="1828800" y="5239512"/>
+            <a:ext cx="5029200" cy="365760"/>
           </a:xfrm>
           <a:prstGeom prst="rect">
             <a:avLst/>
@@ -4277,29 +4487,65 @@
           <a:lstStyle/>
           <a:p>
             <a:pPr algn="l">
-              <a:defRPr sz="1400" b="0">
-                <a:solidFill>
-                  <a:srgbClr val="E8E8E8"/>
-                </a:solidFill>
-                <a:latin typeface="Arial"/>
-              </a:defRPr>
-            </a:pPr>
-            <a:r>
-              <a:t>愛的祝福保留 Phase 2（社交互動，非遊戲）</a:t>
-            </a:r>
-          </a:p>
-        </p:txBody>
-      </p:sp>
-      <p:sp>
-        <p:nvSpPr>
-          <p:cNvPr id="25" name="Rectangle 24"/>
+              <a:defRPr sz="1300" b="1">
+                <a:solidFill>
+                  <a:srgbClr val="FFFFFF"/>
+                </a:solidFill>
+                <a:latin typeface="Arial"/>
+              </a:defRPr>
+            </a:pPr>
+            <a:r>
+              <a:t>愛的祝福留 Phase 2</a:t>
+            </a:r>
+          </a:p>
+        </p:txBody>
+      </p:sp>
+      <p:sp>
+        <p:nvSpPr>
+          <p:cNvPr id="30" name="TextBox 29"/>
+          <p:cNvSpPr txBox="1"/>
+          <p:nvPr/>
+        </p:nvSpPr>
+        <p:spPr>
+          <a:xfrm>
+            <a:off x="7132320" y="5239512"/>
+            <a:ext cx="3657600" cy="365760"/>
+          </a:xfrm>
+          <a:prstGeom prst="rect">
+            <a:avLst/>
+          </a:prstGeom>
+          <a:noFill/>
+        </p:spPr>
+        <p:txBody>
+          <a:bodyPr wrap="square">
+            <a:spAutoFit/>
+          </a:bodyPr>
+          <a:lstStyle/>
+          <a:p>
+            <a:pPr algn="l">
+              <a:defRPr sz="1200" b="0">
+                <a:solidFill>
+                  <a:srgbClr val="999999"/>
+                </a:solidFill>
+                <a:latin typeface="Arial"/>
+              </a:defRPr>
+            </a:pPr>
+            <a:r>
+              <a:t>社交互動非遊戲</a:t>
+            </a:r>
+          </a:p>
+        </p:txBody>
+      </p:sp>
+      <p:sp>
+        <p:nvSpPr>
+          <p:cNvPr id="31" name="Rectangle 30"/>
           <p:cNvSpPr/>
           <p:nvPr/>
         </p:nvSpPr>
         <p:spPr>
           <a:xfrm>
-            <a:off x="1097280" y="6126480"/>
-            <a:ext cx="457200" cy="457200"/>
+            <a:off x="1097280" y="5760720"/>
+            <a:ext cx="457200" cy="411480"/>
           </a:xfrm>
           <a:prstGeom prst="rect">
             <a:avLst/>
@@ -4307,6 +4553,9 @@
           <a:solidFill>
             <a:srgbClr val="00D4FF"/>
           </a:solidFill>
+          <a:ln>
+            <a:noFill/>
+          </a:ln>
         </p:spPr>
         <p:style>
           <a:lnRef idx="1">
@@ -4332,13 +4581,13 @@
       </p:sp>
       <p:sp>
         <p:nvSpPr>
-          <p:cNvPr id="26" name="TextBox 25"/>
-          <p:cNvSpPr txBox="1"/>
-          <p:nvPr/>
-        </p:nvSpPr>
-        <p:spPr>
-          <a:xfrm>
-            <a:off x="1188720" y="6172200"/>
+          <p:cNvPr id="32" name="TextBox 31"/>
+          <p:cNvSpPr txBox="1"/>
+          <p:nvPr/>
+        </p:nvSpPr>
+        <p:spPr>
+          <a:xfrm>
+            <a:off x="1188720" y="5788152"/>
             <a:ext cx="365760" cy="365760"/>
           </a:xfrm>
           <a:prstGeom prst="rect">
@@ -4353,7 +4602,7 @@
           <a:lstStyle/>
           <a:p>
             <a:pPr algn="ctr">
-              <a:defRPr sz="1600" b="1">
+              <a:defRPr sz="1400" b="1">
                 <a:solidFill>
                   <a:srgbClr val="1A1A2E"/>
                 </a:solidFill>
@@ -4368,14 +4617,14 @@
       </p:sp>
       <p:sp>
         <p:nvSpPr>
-          <p:cNvPr id="27" name="TextBox 26"/>
-          <p:cNvSpPr txBox="1"/>
-          <p:nvPr/>
-        </p:nvSpPr>
-        <p:spPr>
-          <a:xfrm>
-            <a:off x="1828800" y="6172200"/>
-            <a:ext cx="8686800" cy="365760"/>
+          <p:cNvPr id="33" name="TextBox 32"/>
+          <p:cNvSpPr txBox="1"/>
+          <p:nvPr/>
+        </p:nvSpPr>
+        <p:spPr>
+          <a:xfrm>
+            <a:off x="1828800" y="5788152"/>
+            <a:ext cx="5029200" cy="365760"/>
           </a:xfrm>
           <a:prstGeom prst="rect">
             <a:avLst/>
@@ -4389,15 +4638,202 @@
           <a:lstStyle/>
           <a:p>
             <a:pPr algn="l">
-              <a:defRPr sz="1400" b="0">
-                <a:solidFill>
-                  <a:srgbClr val="E8E8E8"/>
-                </a:solidFill>
-                <a:latin typeface="Arial"/>
-              </a:defRPr>
-            </a:pPr>
-            <a:r>
-              <a:t>音樂系統 — Web Audio API，打重音/抱柔和</a:t>
+              <a:defRPr sz="1300" b="1">
+                <a:solidFill>
+                  <a:srgbClr val="FFFFFF"/>
+                </a:solidFill>
+                <a:latin typeface="Arial"/>
+              </a:defRPr>
+            </a:pPr>
+            <a:r>
+              <a:t>口訣日後自創 + 多語言</a:t>
+            </a:r>
+          </a:p>
+        </p:txBody>
+      </p:sp>
+      <p:sp>
+        <p:nvSpPr>
+          <p:cNvPr id="34" name="TextBox 33"/>
+          <p:cNvSpPr txBox="1"/>
+          <p:nvPr/>
+        </p:nvSpPr>
+        <p:spPr>
+          <a:xfrm>
+            <a:off x="7132320" y="5788152"/>
+            <a:ext cx="3657600" cy="365760"/>
+          </a:xfrm>
+          <a:prstGeom prst="rect">
+            <a:avLst/>
+          </a:prstGeom>
+          <a:noFill/>
+        </p:spPr>
+        <p:txBody>
+          <a:bodyPr wrap="square">
+            <a:spAutoFit/>
+          </a:bodyPr>
+          <a:lstStyle/>
+          <a:p>
+            <a:pPr algn="l">
+              <a:defRPr sz="1200" b="0">
+                <a:solidFill>
+                  <a:srgbClr val="999999"/>
+                </a:solidFill>
+                <a:latin typeface="Arial"/>
+              </a:defRPr>
+            </a:pPr>
+            <a:r>
+              <a:t>英文·泰文等</a:t>
+            </a:r>
+          </a:p>
+        </p:txBody>
+      </p:sp>
+      <p:sp>
+        <p:nvSpPr>
+          <p:cNvPr id="35" name="Rectangle 34"/>
+          <p:cNvSpPr/>
+          <p:nvPr/>
+        </p:nvSpPr>
+        <p:spPr>
+          <a:xfrm>
+            <a:off x="1097280" y="6309360"/>
+            <a:ext cx="457200" cy="411480"/>
+          </a:xfrm>
+          <a:prstGeom prst="rect">
+            <a:avLst/>
+          </a:prstGeom>
+          <a:solidFill>
+            <a:srgbClr val="FFD700"/>
+          </a:solidFill>
+          <a:ln>
+            <a:noFill/>
+          </a:ln>
+        </p:spPr>
+        <p:style>
+          <a:lnRef idx="1">
+            <a:schemeClr val="accent1"/>
+          </a:lnRef>
+          <a:fillRef idx="3">
+            <a:schemeClr val="accent1"/>
+          </a:fillRef>
+          <a:effectRef idx="2">
+            <a:schemeClr val="accent1"/>
+          </a:effectRef>
+          <a:fontRef idx="minor">
+            <a:schemeClr val="lt1"/>
+          </a:fontRef>
+        </p:style>
+        <p:txBody>
+          <a:bodyPr rtlCol="0" anchor="ctr"/>
+          <a:lstStyle/>
+          <a:p>
+            <a:pPr algn="ctr"/>
+          </a:p>
+        </p:txBody>
+      </p:sp>
+      <p:sp>
+        <p:nvSpPr>
+          <p:cNvPr id="36" name="TextBox 35"/>
+          <p:cNvSpPr txBox="1"/>
+          <p:nvPr/>
+        </p:nvSpPr>
+        <p:spPr>
+          <a:xfrm>
+            <a:off x="1188720" y="6336792"/>
+            <a:ext cx="365760" cy="365760"/>
+          </a:xfrm>
+          <a:prstGeom prst="rect">
+            <a:avLst/>
+          </a:prstGeom>
+          <a:noFill/>
+        </p:spPr>
+        <p:txBody>
+          <a:bodyPr wrap="square">
+            <a:spAutoFit/>
+          </a:bodyPr>
+          <a:lstStyle/>
+          <a:p>
+            <a:pPr algn="ctr">
+              <a:defRPr sz="1400" b="1">
+                <a:solidFill>
+                  <a:srgbClr val="1A1A2E"/>
+                </a:solidFill>
+                <a:latin typeface="Arial"/>
+              </a:defRPr>
+            </a:pPr>
+            <a:r>
+              <a:t>8</a:t>
+            </a:r>
+          </a:p>
+        </p:txBody>
+      </p:sp>
+      <p:sp>
+        <p:nvSpPr>
+          <p:cNvPr id="37" name="TextBox 36"/>
+          <p:cNvSpPr txBox="1"/>
+          <p:nvPr/>
+        </p:nvSpPr>
+        <p:spPr>
+          <a:xfrm>
+            <a:off x="1828800" y="6336792"/>
+            <a:ext cx="5029200" cy="365760"/>
+          </a:xfrm>
+          <a:prstGeom prst="rect">
+            <a:avLst/>
+          </a:prstGeom>
+          <a:noFill/>
+        </p:spPr>
+        <p:txBody>
+          <a:bodyPr wrap="square">
+            <a:spAutoFit/>
+          </a:bodyPr>
+          <a:lstStyle/>
+          <a:p>
+            <a:pPr algn="l">
+              <a:defRPr sz="1300" b="1">
+                <a:solidFill>
+                  <a:srgbClr val="FFFFFF"/>
+                </a:solidFill>
+                <a:latin typeface="Arial"/>
+              </a:defRPr>
+            </a:pPr>
+            <a:r>
+              <a:t>預設紙人不需 DB table</a:t>
+            </a:r>
+          </a:p>
+        </p:txBody>
+      </p:sp>
+      <p:sp>
+        <p:nvSpPr>
+          <p:cNvPr id="38" name="TextBox 37"/>
+          <p:cNvSpPr txBox="1"/>
+          <p:nvPr/>
+        </p:nvSpPr>
+        <p:spPr>
+          <a:xfrm>
+            <a:off x="7132320" y="6336792"/>
+            <a:ext cx="3657600" cy="365760"/>
+          </a:xfrm>
+          <a:prstGeom prst="rect">
+            <a:avLst/>
+          </a:prstGeom>
+          <a:noFill/>
+        </p:spPr>
+        <p:txBody>
+          <a:bodyPr wrap="square">
+            <a:spAutoFit/>
+          </a:bodyPr>
+          <a:lstStyle/>
+          <a:p>
+            <a:pPr algn="l">
+              <a:defRPr sz="1200" b="0">
+                <a:solidFill>
+                  <a:srgbClr val="999999"/>
+                </a:solidFill>
+                <a:latin typeface="Arial"/>
+              </a:defRPr>
+            </a:pPr>
+            <a:r>
+              <a:t>JSON config，6-8 款</a:t>
             </a:r>
           </a:p>
         </p:txBody>
@@ -4445,6 +4881,9 @@
           <a:solidFill>
             <a:srgbClr val="00D4FF"/>
           </a:solidFill>
+          <a:ln>
+            <a:noFill/>
+          </a:ln>
         </p:spPr>
         <p:style>
           <a:lnRef idx="1">
@@ -4499,7 +4938,7 @@
               </a:defRPr>
             </a:pPr>
             <a:r>
-              <a:t> 兩大遊戲模組對比</a:t>
+              <a:t> 紙人命名系統（最新新增）</a:t>
             </a:r>
           </a:p>
         </p:txBody>
@@ -4521,6 +4960,9 @@
           <a:solidFill>
             <a:srgbClr val="00D4FF"/>
           </a:solidFill>
+          <a:ln>
+            <a:noFill/>
+          </a:ln>
         </p:spPr>
         <p:style>
           <a:lnRef idx="1">
@@ -4546,14 +4988,172 @@
       </p:sp>
       <p:sp>
         <p:nvSpPr>
-          <p:cNvPr id="5" name="TextBox 4"/>
-          <p:cNvSpPr txBox="1"/>
-          <p:nvPr/>
-        </p:nvSpPr>
-        <p:spPr>
-          <a:xfrm>
-            <a:off x="914400" y="1645920"/>
-            <a:ext cx="1371600" cy="365760"/>
+          <p:cNvPr id="5" name="Rounded Rectangle 4"/>
+          <p:cNvSpPr/>
+          <p:nvPr/>
+        </p:nvSpPr>
+        <p:spPr>
+          <a:xfrm>
+            <a:off x="731520" y="1645920"/>
+            <a:ext cx="10515600" cy="4572000"/>
+          </a:xfrm>
+          <a:prstGeom prst="roundRect">
+            <a:avLst/>
+          </a:prstGeom>
+          <a:solidFill>
+            <a:srgbClr val="22223E"/>
+          </a:solidFill>
+          <a:ln>
+            <a:noFill/>
+          </a:ln>
+        </p:spPr>
+        <p:style>
+          <a:lnRef idx="1">
+            <a:schemeClr val="accent1"/>
+          </a:lnRef>
+          <a:fillRef idx="3">
+            <a:schemeClr val="accent1"/>
+          </a:fillRef>
+          <a:effectRef idx="2">
+            <a:schemeClr val="accent1"/>
+          </a:effectRef>
+          <a:fontRef idx="minor">
+            <a:schemeClr val="lt1"/>
+          </a:fontRef>
+        </p:style>
+        <p:txBody>
+          <a:bodyPr rtlCol="0" anchor="ctr"/>
+          <a:lstStyle/>
+          <a:p>
+            <a:pPr algn="ctr"/>
+          </a:p>
+        </p:txBody>
+      </p:sp>
+      <p:sp>
+        <p:nvSpPr>
+          <p:cNvPr id="6" name="TextBox 5"/>
+          <p:cNvSpPr txBox="1"/>
+          <p:nvPr/>
+        </p:nvSpPr>
+        <p:spPr>
+          <a:xfrm>
+            <a:off x="1097280" y="1828800"/>
+            <a:ext cx="9144000" cy="457200"/>
+          </a:xfrm>
+          <a:prstGeom prst="rect">
+            <a:avLst/>
+          </a:prstGeom>
+          <a:noFill/>
+        </p:spPr>
+        <p:txBody>
+          <a:bodyPr wrap="square">
+            <a:spAutoFit/>
+          </a:bodyPr>
+          <a:lstStyle/>
+          <a:p>
+            <a:pPr algn="l">
+              <a:defRPr sz="2000" b="1">
+                <a:solidFill>
+                  <a:srgbClr val="FFD700"/>
+                </a:solidFill>
+                <a:latin typeface="Arial"/>
+              </a:defRPr>
+            </a:pPr>
+            <a:r>
+              <a:t>打/抱之前，先輸入自訂稱呼</a:t>
+            </a:r>
+          </a:p>
+        </p:txBody>
+      </p:sp>
+      <p:sp>
+        <p:nvSpPr>
+          <p:cNvPr id="7" name="TextBox 6"/>
+          <p:cNvSpPr txBox="1"/>
+          <p:nvPr/>
+        </p:nvSpPr>
+        <p:spPr>
+          <a:xfrm>
+            <a:off x="1097280" y="2377440"/>
+            <a:ext cx="9144000" cy="274320"/>
+          </a:xfrm>
+          <a:prstGeom prst="rect">
+            <a:avLst/>
+          </a:prstGeom>
+          <a:noFill/>
+        </p:spPr>
+        <p:txBody>
+          <a:bodyPr wrap="square">
+            <a:spAutoFit/>
+          </a:bodyPr>
+          <a:lstStyle/>
+          <a:p>
+            <a:pPr algn="l">
+              <a:defRPr sz="1400" b="0">
+                <a:solidFill>
+                  <a:srgbClr val="E8E8E8"/>
+                </a:solidFill>
+                <a:latin typeface="Arial"/>
+              </a:defRPr>
+            </a:pPr>
+            <a:r>
+              <a:t>同一張「驚蟄紙人」→ 你叫「死婆」· 朋友叫「老闆」· 各自獨立記錄</a:t>
+            </a:r>
+          </a:p>
+        </p:txBody>
+      </p:sp>
+      <p:sp>
+        <p:nvSpPr>
+          <p:cNvPr id="8" name="Rounded Rectangle 7"/>
+          <p:cNvSpPr/>
+          <p:nvPr/>
+        </p:nvSpPr>
+        <p:spPr>
+          <a:xfrm>
+            <a:off x="1097280" y="3017520"/>
+            <a:ext cx="1828800" cy="457200"/>
+          </a:xfrm>
+          <a:prstGeom prst="roundRect">
+            <a:avLst/>
+          </a:prstGeom>
+          <a:solidFill>
+            <a:srgbClr val="00D4FF"/>
+          </a:solidFill>
+          <a:ln>
+            <a:noFill/>
+          </a:ln>
+        </p:spPr>
+        <p:style>
+          <a:lnRef idx="1">
+            <a:schemeClr val="accent1"/>
+          </a:lnRef>
+          <a:fillRef idx="3">
+            <a:schemeClr val="accent1"/>
+          </a:fillRef>
+          <a:effectRef idx="2">
+            <a:schemeClr val="accent1"/>
+          </a:effectRef>
+          <a:fontRef idx="minor">
+            <a:schemeClr val="lt1"/>
+          </a:fontRef>
+        </p:style>
+        <p:txBody>
+          <a:bodyPr rtlCol="0" anchor="ctr"/>
+          <a:lstStyle/>
+          <a:p>
+            <a:pPr algn="ctr"/>
+          </a:p>
+        </p:txBody>
+      </p:sp>
+      <p:sp>
+        <p:nvSpPr>
+          <p:cNvPr id="9" name="TextBox 8"/>
+          <p:cNvSpPr txBox="1"/>
+          <p:nvPr/>
+        </p:nvSpPr>
+        <p:spPr>
+          <a:xfrm>
+            <a:off x="1280160" y="3063240"/>
+            <a:ext cx="1645920" cy="365760"/>
           </a:xfrm>
           <a:prstGeom prst="rect">
             <a:avLst/>
@@ -4569,27 +5169,27 @@
             <a:pPr algn="l">
               <a:defRPr sz="1400" b="1">
                 <a:solidFill>
-                  <a:srgbClr val="FFD700"/>
-                </a:solidFill>
-                <a:latin typeface="Arial"/>
-              </a:defRPr>
-            </a:pPr>
-            <a:r>
-              <a:t>目的</a:t>
-            </a:r>
-          </a:p>
-        </p:txBody>
-      </p:sp>
-      <p:sp>
-        <p:nvSpPr>
-          <p:cNvPr id="6" name="TextBox 5"/>
-          <p:cNvSpPr txBox="1"/>
-          <p:nvPr/>
-        </p:nvSpPr>
-        <p:spPr>
-          <a:xfrm>
-            <a:off x="2560320" y="1645920"/>
-            <a:ext cx="4114800" cy="365760"/>
+                  <a:srgbClr val="1A1A2E"/>
+                </a:solidFill>
+                <a:latin typeface="Arial"/>
+              </a:defRPr>
+            </a:pPr>
+            <a:r>
+              <a:t>① 揀紙人</a:t>
+            </a:r>
+          </a:p>
+        </p:txBody>
+      </p:sp>
+      <p:sp>
+        <p:nvSpPr>
+          <p:cNvPr id="10" name="TextBox 9"/>
+          <p:cNvSpPr txBox="1"/>
+          <p:nvPr/>
+        </p:nvSpPr>
+        <p:spPr>
+          <a:xfrm>
+            <a:off x="3200400" y="3063240"/>
+            <a:ext cx="7315200" cy="365760"/>
           </a:xfrm>
           <a:prstGeom prst="rect">
             <a:avLst/>
@@ -4605,27 +5205,106 @@
             <a:pPr algn="l">
               <a:defRPr sz="1300" b="0">
                 <a:solidFill>
-                  <a:srgbClr val="FF6666"/>
-                </a:solidFill>
-                <a:latin typeface="Arial"/>
-              </a:defRPr>
-            </a:pPr>
-            <a:r>
-              <a:t>發洩、驅霉運</a:t>
-            </a:r>
-          </a:p>
-        </p:txBody>
-      </p:sp>
-      <p:sp>
-        <p:nvSpPr>
-          <p:cNvPr id="7" name="TextBox 6"/>
-          <p:cNvSpPr txBox="1"/>
-          <p:nvPr/>
-        </p:nvSpPr>
-        <p:spPr>
-          <a:xfrm>
-            <a:off x="6858000" y="1645920"/>
-            <a:ext cx="4114800" cy="365760"/>
+                  <a:srgbClr val="E8E8E8"/>
+                </a:solidFill>
+                <a:latin typeface="Arial"/>
+              </a:defRPr>
+            </a:pPr>
+            <a:r>
+              <a:t>從預設庫揀一款</a:t>
+            </a:r>
+          </a:p>
+        </p:txBody>
+      </p:sp>
+      <p:sp>
+        <p:nvSpPr>
+          <p:cNvPr id="11" name="Rounded Rectangle 10"/>
+          <p:cNvSpPr/>
+          <p:nvPr/>
+        </p:nvSpPr>
+        <p:spPr>
+          <a:xfrm>
+            <a:off x="1097280" y="3657600"/>
+            <a:ext cx="1828800" cy="457200"/>
+          </a:xfrm>
+          <a:prstGeom prst="roundRect">
+            <a:avLst/>
+          </a:prstGeom>
+          <a:solidFill>
+            <a:srgbClr val="FFD700"/>
+          </a:solidFill>
+          <a:ln>
+            <a:noFill/>
+          </a:ln>
+        </p:spPr>
+        <p:style>
+          <a:lnRef idx="1">
+            <a:schemeClr val="accent1"/>
+          </a:lnRef>
+          <a:fillRef idx="3">
+            <a:schemeClr val="accent1"/>
+          </a:fillRef>
+          <a:effectRef idx="2">
+            <a:schemeClr val="accent1"/>
+          </a:effectRef>
+          <a:fontRef idx="minor">
+            <a:schemeClr val="lt1"/>
+          </a:fontRef>
+        </p:style>
+        <p:txBody>
+          <a:bodyPr rtlCol="0" anchor="ctr"/>
+          <a:lstStyle/>
+          <a:p>
+            <a:pPr algn="ctr"/>
+          </a:p>
+        </p:txBody>
+      </p:sp>
+      <p:sp>
+        <p:nvSpPr>
+          <p:cNvPr id="12" name="TextBox 11"/>
+          <p:cNvSpPr txBox="1"/>
+          <p:nvPr/>
+        </p:nvSpPr>
+        <p:spPr>
+          <a:xfrm>
+            <a:off x="1280160" y="3703320"/>
+            <a:ext cx="1645920" cy="365760"/>
+          </a:xfrm>
+          <a:prstGeom prst="rect">
+            <a:avLst/>
+          </a:prstGeom>
+          <a:noFill/>
+        </p:spPr>
+        <p:txBody>
+          <a:bodyPr wrap="square">
+            <a:spAutoFit/>
+          </a:bodyPr>
+          <a:lstStyle/>
+          <a:p>
+            <a:pPr algn="l">
+              <a:defRPr sz="1400" b="1">
+                <a:solidFill>
+                  <a:srgbClr val="1A1A2E"/>
+                </a:solidFill>
+                <a:latin typeface="Arial"/>
+              </a:defRPr>
+            </a:pPr>
+            <a:r>
+              <a:t>② 輸入名</a:t>
+            </a:r>
+          </a:p>
+        </p:txBody>
+      </p:sp>
+      <p:sp>
+        <p:nvSpPr>
+          <p:cNvPr id="13" name="TextBox 12"/>
+          <p:cNvSpPr txBox="1"/>
+          <p:nvPr/>
+        </p:nvSpPr>
+        <p:spPr>
+          <a:xfrm>
+            <a:off x="3200400" y="3703320"/>
+            <a:ext cx="7315200" cy="365760"/>
           </a:xfrm>
           <a:prstGeom prst="rect">
             <a:avLst/>
@@ -4641,27 +5320,70 @@
             <a:pPr algn="l">
               <a:defRPr sz="1300" b="0">
                 <a:solidFill>
-                  <a:srgbClr val="FF99CC"/>
-                </a:solidFill>
-                <a:latin typeface="Arial"/>
-              </a:defRPr>
-            </a:pPr>
-            <a:r>
-              <a:t>送祝福、正能量</a:t>
-            </a:r>
-          </a:p>
-        </p:txBody>
-      </p:sp>
-      <p:sp>
-        <p:nvSpPr>
-          <p:cNvPr id="8" name="TextBox 7"/>
-          <p:cNvSpPr txBox="1"/>
-          <p:nvPr/>
-        </p:nvSpPr>
-        <p:spPr>
-          <a:xfrm>
-            <a:off x="914400" y="2240280"/>
-            <a:ext cx="1371600" cy="365760"/>
+                  <a:srgbClr val="E8E8E8"/>
+                </a:solidFill>
+                <a:latin typeface="Arial"/>
+              </a:defRPr>
+            </a:pPr>
+            <a:r>
+              <a:t>「請輸入你想打/抱嘅名：」</a:t>
+            </a:r>
+          </a:p>
+        </p:txBody>
+      </p:sp>
+      <p:sp>
+        <p:nvSpPr>
+          <p:cNvPr id="14" name="Rounded Rectangle 13"/>
+          <p:cNvSpPr/>
+          <p:nvPr/>
+        </p:nvSpPr>
+        <p:spPr>
+          <a:xfrm>
+            <a:off x="1097280" y="4297679"/>
+            <a:ext cx="1828800" cy="457200"/>
+          </a:xfrm>
+          <a:prstGeom prst="roundRect">
+            <a:avLst/>
+          </a:prstGeom>
+          <a:solidFill>
+            <a:srgbClr val="00D4FF"/>
+          </a:solidFill>
+          <a:ln>
+            <a:noFill/>
+          </a:ln>
+        </p:spPr>
+        <p:style>
+          <a:lnRef idx="1">
+            <a:schemeClr val="accent1"/>
+          </a:lnRef>
+          <a:fillRef idx="3">
+            <a:schemeClr val="accent1"/>
+          </a:fillRef>
+          <a:effectRef idx="2">
+            <a:schemeClr val="accent1"/>
+          </a:effectRef>
+          <a:fontRef idx="minor">
+            <a:schemeClr val="lt1"/>
+          </a:fontRef>
+        </p:style>
+        <p:txBody>
+          <a:bodyPr rtlCol="0" anchor="ctr"/>
+          <a:lstStyle/>
+          <a:p>
+            <a:pPr algn="ctr"/>
+          </a:p>
+        </p:txBody>
+      </p:sp>
+      <p:sp>
+        <p:nvSpPr>
+          <p:cNvPr id="15" name="TextBox 14"/>
+          <p:cNvSpPr txBox="1"/>
+          <p:nvPr/>
+        </p:nvSpPr>
+        <p:spPr>
+          <a:xfrm>
+            <a:off x="1280160" y="4343399"/>
+            <a:ext cx="1645920" cy="365760"/>
           </a:xfrm>
           <a:prstGeom prst="rect">
             <a:avLst/>
@@ -4677,27 +5399,27 @@
             <a:pPr algn="l">
               <a:defRPr sz="1400" b="1">
                 <a:solidFill>
-                  <a:srgbClr val="FFD700"/>
-                </a:solidFill>
-                <a:latin typeface="Arial"/>
-              </a:defRPr>
-            </a:pPr>
-            <a:r>
-              <a:t>口訣</a:t>
-            </a:r>
-          </a:p>
-        </p:txBody>
-      </p:sp>
-      <p:sp>
-        <p:nvSpPr>
-          <p:cNvPr id="9" name="TextBox 8"/>
-          <p:cNvSpPr txBox="1"/>
-          <p:nvPr/>
-        </p:nvSpPr>
-        <p:spPr>
-          <a:xfrm>
-            <a:off x="2560320" y="2240280"/>
-            <a:ext cx="4114800" cy="365760"/>
+                  <a:srgbClr val="1A1A2E"/>
+                </a:solidFill>
+                <a:latin typeface="Arial"/>
+              </a:defRPr>
+            </a:pPr>
+            <a:r>
+              <a:t>③ 開始遊戲</a:t>
+            </a:r>
+          </a:p>
+        </p:txBody>
+      </p:sp>
+      <p:sp>
+        <p:nvSpPr>
+          <p:cNvPr id="16" name="TextBox 15"/>
+          <p:cNvSpPr txBox="1"/>
+          <p:nvPr/>
+        </p:nvSpPr>
+        <p:spPr>
+          <a:xfrm>
+            <a:off x="3200400" y="4343399"/>
+            <a:ext cx="7315200" cy="365760"/>
           </a:xfrm>
           <a:prstGeom prst="rect">
             <a:avLst/>
@@ -4713,27 +5435,106 @@
             <a:pPr algn="l">
               <a:defRPr sz="1300" b="0">
                 <a:solidFill>
-                  <a:srgbClr val="FF6666"/>
-                </a:solidFill>
-                <a:latin typeface="Arial"/>
-              </a:defRPr>
-            </a:pPr>
-            <a:r>
-              <a:t>傳統廣東話咒罵</a:t>
-            </a:r>
-          </a:p>
-        </p:txBody>
-      </p:sp>
-      <p:sp>
-        <p:nvSpPr>
-          <p:cNvPr id="10" name="TextBox 9"/>
-          <p:cNvSpPr txBox="1"/>
-          <p:nvPr/>
-        </p:nvSpPr>
-        <p:spPr>
-          <a:xfrm>
-            <a:off x="6858000" y="2240280"/>
-            <a:ext cx="4114800" cy="365760"/>
+                  <a:srgbClr val="E8E8E8"/>
+                </a:solidFill>
+                <a:latin typeface="Arial"/>
+              </a:defRPr>
+            </a:pPr>
+            <a:r>
+              <a:t>紙人顯示自訂名</a:t>
+            </a:r>
+          </a:p>
+        </p:txBody>
+      </p:sp>
+      <p:sp>
+        <p:nvSpPr>
+          <p:cNvPr id="17" name="Rounded Rectangle 16"/>
+          <p:cNvSpPr/>
+          <p:nvPr/>
+        </p:nvSpPr>
+        <p:spPr>
+          <a:xfrm>
+            <a:off x="1097280" y="4937759"/>
+            <a:ext cx="1828800" cy="457200"/>
+          </a:xfrm>
+          <a:prstGeom prst="roundRect">
+            <a:avLst/>
+          </a:prstGeom>
+          <a:solidFill>
+            <a:srgbClr val="FFD700"/>
+          </a:solidFill>
+          <a:ln>
+            <a:noFill/>
+          </a:ln>
+        </p:spPr>
+        <p:style>
+          <a:lnRef idx="1">
+            <a:schemeClr val="accent1"/>
+          </a:lnRef>
+          <a:fillRef idx="3">
+            <a:schemeClr val="accent1"/>
+          </a:fillRef>
+          <a:effectRef idx="2">
+            <a:schemeClr val="accent1"/>
+          </a:effectRef>
+          <a:fontRef idx="minor">
+            <a:schemeClr val="lt1"/>
+          </a:fontRef>
+        </p:style>
+        <p:txBody>
+          <a:bodyPr rtlCol="0" anchor="ctr"/>
+          <a:lstStyle/>
+          <a:p>
+            <a:pPr algn="ctr"/>
+          </a:p>
+        </p:txBody>
+      </p:sp>
+      <p:sp>
+        <p:nvSpPr>
+          <p:cNvPr id="18" name="TextBox 17"/>
+          <p:cNvSpPr txBox="1"/>
+          <p:nvPr/>
+        </p:nvSpPr>
+        <p:spPr>
+          <a:xfrm>
+            <a:off x="1280160" y="4983479"/>
+            <a:ext cx="1645920" cy="365760"/>
+          </a:xfrm>
+          <a:prstGeom prst="rect">
+            <a:avLst/>
+          </a:prstGeom>
+          <a:noFill/>
+        </p:spPr>
+        <p:txBody>
+          <a:bodyPr wrap="square">
+            <a:spAutoFit/>
+          </a:bodyPr>
+          <a:lstStyle/>
+          <a:p>
+            <a:pPr algn="l">
+              <a:defRPr sz="1400" b="1">
+                <a:solidFill>
+                  <a:srgbClr val="1A1A2E"/>
+                </a:solidFill>
+                <a:latin typeface="Arial"/>
+              </a:defRPr>
+            </a:pPr>
+            <a:r>
+              <a:t>④ 記存 DB</a:t>
+            </a:r>
+          </a:p>
+        </p:txBody>
+      </p:sp>
+      <p:sp>
+        <p:nvSpPr>
+          <p:cNvPr id="19" name="TextBox 18"/>
+          <p:cNvSpPr txBox="1"/>
+          <p:nvPr/>
+        </p:nvSpPr>
+        <p:spPr>
+          <a:xfrm>
+            <a:off x="3200400" y="4983479"/>
+            <a:ext cx="7315200" cy="365760"/>
           </a:xfrm>
           <a:prstGeom prst="rect">
             <a:avLst/>
@@ -4749,27 +5550,70 @@
             <a:pPr algn="l">
               <a:defRPr sz="1300" b="0">
                 <a:solidFill>
-                  <a:srgbClr val="FF99CC"/>
-                </a:solidFill>
-                <a:latin typeface="Arial"/>
-              </a:defRPr>
-            </a:pPr>
-            <a:r>
-              <a:t>⚡自創祝福口訣</a:t>
-            </a:r>
-          </a:p>
-        </p:txBody>
-      </p:sp>
-      <p:sp>
-        <p:nvSpPr>
-          <p:cNvPr id="11" name="TextBox 10"/>
-          <p:cNvSpPr txBox="1"/>
-          <p:nvPr/>
-        </p:nvSpPr>
-        <p:spPr>
-          <a:xfrm>
-            <a:off x="914400" y="2834640"/>
-            <a:ext cx="1371600" cy="365760"/>
+                  <a:srgbClr val="E8E8E8"/>
+                </a:solidFill>
+                <a:latin typeface="Arial"/>
+              </a:defRPr>
+            </a:pPr>
+            <a:r>
+              <a:t>下次自動顯示上次嘅名</a:t>
+            </a:r>
+          </a:p>
+        </p:txBody>
+      </p:sp>
+      <p:sp>
+        <p:nvSpPr>
+          <p:cNvPr id="20" name="Rounded Rectangle 19"/>
+          <p:cNvSpPr/>
+          <p:nvPr/>
+        </p:nvSpPr>
+        <p:spPr>
+          <a:xfrm>
+            <a:off x="1097280" y="5577840"/>
+            <a:ext cx="1828800" cy="457200"/>
+          </a:xfrm>
+          <a:prstGeom prst="roundRect">
+            <a:avLst/>
+          </a:prstGeom>
+          <a:solidFill>
+            <a:srgbClr val="00D4FF"/>
+          </a:solidFill>
+          <a:ln>
+            <a:noFill/>
+          </a:ln>
+        </p:spPr>
+        <p:style>
+          <a:lnRef idx="1">
+            <a:schemeClr val="accent1"/>
+          </a:lnRef>
+          <a:fillRef idx="3">
+            <a:schemeClr val="accent1"/>
+          </a:fillRef>
+          <a:effectRef idx="2">
+            <a:schemeClr val="accent1"/>
+          </a:effectRef>
+          <a:fontRef idx="minor">
+            <a:schemeClr val="lt1"/>
+          </a:fontRef>
+        </p:style>
+        <p:txBody>
+          <a:bodyPr rtlCol="0" anchor="ctr"/>
+          <a:lstStyle/>
+          <a:p>
+            <a:pPr algn="ctr"/>
+          </a:p>
+        </p:txBody>
+      </p:sp>
+      <p:sp>
+        <p:nvSpPr>
+          <p:cNvPr id="21" name="TextBox 20"/>
+          <p:cNvSpPr txBox="1"/>
+          <p:nvPr/>
+        </p:nvSpPr>
+        <p:spPr>
+          <a:xfrm>
+            <a:off x="1280160" y="5623560"/>
+            <a:ext cx="1645920" cy="365760"/>
           </a:xfrm>
           <a:prstGeom prst="rect">
             <a:avLst/>
@@ -4785,27 +5629,27 @@
             <a:pPr algn="l">
               <a:defRPr sz="1400" b="1">
                 <a:solidFill>
-                  <a:srgbClr val="FFD700"/>
-                </a:solidFill>
-                <a:latin typeface="Arial"/>
-              </a:defRPr>
-            </a:pPr>
-            <a:r>
-              <a:t>工具</a:t>
-            </a:r>
-          </a:p>
-        </p:txBody>
-      </p:sp>
-      <p:sp>
-        <p:nvSpPr>
-          <p:cNvPr id="12" name="TextBox 11"/>
-          <p:cNvSpPr txBox="1"/>
-          <p:nvPr/>
-        </p:nvSpPr>
-        <p:spPr>
-          <a:xfrm>
-            <a:off x="2560320" y="2834640"/>
-            <a:ext cx="4114800" cy="365760"/>
+                  <a:srgbClr val="1A1A2E"/>
+                </a:solidFill>
+                <a:latin typeface="Arial"/>
+              </a:defRPr>
+            </a:pPr>
+            <a:r>
+              <a:t>⑤ 可修改</a:t>
+            </a:r>
+          </a:p>
+        </p:txBody>
+      </p:sp>
+      <p:sp>
+        <p:nvSpPr>
+          <p:cNvPr id="22" name="TextBox 21"/>
+          <p:cNvSpPr txBox="1"/>
+          <p:nvPr/>
+        </p:nvSpPr>
+        <p:spPr>
+          <a:xfrm>
+            <a:off x="3200400" y="5623560"/>
+            <a:ext cx="7315200" cy="365760"/>
           </a:xfrm>
           <a:prstGeom prst="rect">
             <a:avLst/>
@@ -4821,27 +5665,27 @@
             <a:pPr algn="l">
               <a:defRPr sz="1300" b="0">
                 <a:solidFill>
-                  <a:srgbClr val="FF6666"/>
-                </a:solidFill>
-                <a:latin typeface="Arial"/>
-              </a:defRPr>
-            </a:pPr>
-            <a:r>
-              <a:t>拖鞋·棍棒·老虎鉗</a:t>
-            </a:r>
-          </a:p>
-        </p:txBody>
-      </p:sp>
-      <p:sp>
-        <p:nvSpPr>
-          <p:cNvPr id="13" name="TextBox 12"/>
-          <p:cNvSpPr txBox="1"/>
-          <p:nvPr/>
-        </p:nvSpPr>
-        <p:spPr>
-          <a:xfrm>
-            <a:off x="6858000" y="2834640"/>
-            <a:ext cx="4114800" cy="365760"/>
+                  <a:srgbClr val="E8E8E8"/>
+                </a:solidFill>
+                <a:latin typeface="Arial"/>
+              </a:defRPr>
+            </a:pPr>
+            <a:r>
+              <a:t>隨時重新輸入改名</a:t>
+            </a:r>
+          </a:p>
+        </p:txBody>
+      </p:sp>
+      <p:sp>
+        <p:nvSpPr>
+          <p:cNvPr id="23" name="TextBox 22"/>
+          <p:cNvSpPr txBox="1"/>
+          <p:nvPr/>
+        </p:nvSpPr>
+        <p:spPr>
+          <a:xfrm>
+            <a:off x="1097280" y="5943600"/>
+            <a:ext cx="9144000" cy="274320"/>
           </a:xfrm>
           <a:prstGeom prst="rect">
             <a:avLst/>
@@ -4855,591 +5699,15 @@
           <a:lstStyle/>
           <a:p>
             <a:pPr algn="l">
-              <a:defRPr sz="1300" b="0">
-                <a:solidFill>
-                  <a:srgbClr val="FF99CC"/>
-                </a:solidFill>
-                <a:latin typeface="Arial"/>
-              </a:defRPr>
-            </a:pPr>
-            <a:r>
-              <a:t>羽毛·唇印·玫瑰</a:t>
-            </a:r>
-          </a:p>
-        </p:txBody>
-      </p:sp>
-      <p:sp>
-        <p:nvSpPr>
-          <p:cNvPr id="14" name="TextBox 13"/>
-          <p:cNvSpPr txBox="1"/>
-          <p:nvPr/>
-        </p:nvSpPr>
-        <p:spPr>
-          <a:xfrm>
-            <a:off x="914400" y="3429000"/>
-            <a:ext cx="1371600" cy="365760"/>
-          </a:xfrm>
-          <a:prstGeom prst="rect">
-            <a:avLst/>
-          </a:prstGeom>
-          <a:noFill/>
-        </p:spPr>
-        <p:txBody>
-          <a:bodyPr wrap="square">
-            <a:spAutoFit/>
-          </a:bodyPr>
-          <a:lstStyle/>
-          <a:p>
-            <a:pPr algn="l">
-              <a:defRPr sz="1400" b="1">
-                <a:solidFill>
-                  <a:srgbClr val="FFD700"/>
-                </a:solidFill>
-                <a:latin typeface="Arial"/>
-              </a:defRPr>
-            </a:pPr>
-            <a:r>
-              <a:t>擊中效果</a:t>
-            </a:r>
-          </a:p>
-        </p:txBody>
-      </p:sp>
-      <p:sp>
-        <p:nvSpPr>
-          <p:cNvPr id="15" name="TextBox 14"/>
-          <p:cNvSpPr txBox="1"/>
-          <p:nvPr/>
-        </p:nvSpPr>
-        <p:spPr>
-          <a:xfrm>
-            <a:off x="2560320" y="3429000"/>
-            <a:ext cx="4114800" cy="365760"/>
-          </a:xfrm>
-          <a:prstGeom prst="rect">
-            <a:avLst/>
-          </a:prstGeom>
-          <a:noFill/>
-        </p:spPr>
-        <p:txBody>
-          <a:bodyPr wrap="square">
-            <a:spAutoFit/>
-          </a:bodyPr>
-          <a:lstStyle/>
-          <a:p>
-            <a:pPr algn="l">
-              <a:defRPr sz="1300" b="0">
-                <a:solidFill>
-                  <a:srgbClr val="FF6666"/>
-                </a:solidFill>
-                <a:latin typeface="Arial"/>
-              </a:defRPr>
-            </a:pPr>
-            <a:r>
-              <a:t>火光·碎裂 ⚡</a:t>
-            </a:r>
-          </a:p>
-        </p:txBody>
-      </p:sp>
-      <p:sp>
-        <p:nvSpPr>
-          <p:cNvPr id="16" name="TextBox 15"/>
-          <p:cNvSpPr txBox="1"/>
-          <p:nvPr/>
-        </p:nvSpPr>
-        <p:spPr>
-          <a:xfrm>
-            <a:off x="6858000" y="3429000"/>
-            <a:ext cx="4114800" cy="365760"/>
-          </a:xfrm>
-          <a:prstGeom prst="rect">
-            <a:avLst/>
-          </a:prstGeom>
-          <a:noFill/>
-        </p:spPr>
-        <p:txBody>
-          <a:bodyPr wrap="square">
-            <a:spAutoFit/>
-          </a:bodyPr>
-          <a:lstStyle/>
-          <a:p>
-            <a:pPr algn="l">
-              <a:defRPr sz="1300" b="0">
-                <a:solidFill>
-                  <a:srgbClr val="FF99CC"/>
-                </a:solidFill>
-                <a:latin typeface="Arial"/>
-              </a:defRPr>
-            </a:pPr>
-            <a:r>
-              <a:t>心心·花瓣 💕</a:t>
-            </a:r>
-          </a:p>
-        </p:txBody>
-      </p:sp>
-      <p:sp>
-        <p:nvSpPr>
-          <p:cNvPr id="17" name="TextBox 16"/>
-          <p:cNvSpPr txBox="1"/>
-          <p:nvPr/>
-        </p:nvSpPr>
-        <p:spPr>
-          <a:xfrm>
-            <a:off x="914400" y="4023360"/>
-            <a:ext cx="1371600" cy="365760"/>
-          </a:xfrm>
-          <a:prstGeom prst="rect">
-            <a:avLst/>
-          </a:prstGeom>
-          <a:noFill/>
-        </p:spPr>
-        <p:txBody>
-          <a:bodyPr wrap="square">
-            <a:spAutoFit/>
-          </a:bodyPr>
-          <a:lstStyle/>
-          <a:p>
-            <a:pPr algn="l">
-              <a:defRPr sz="1400" b="1">
-                <a:solidFill>
-                  <a:srgbClr val="FFD700"/>
-                </a:solidFill>
-                <a:latin typeface="Arial"/>
-              </a:defRPr>
-            </a:pPr>
-            <a:r>
-              <a:t>音樂</a:t>
-            </a:r>
-          </a:p>
-        </p:txBody>
-      </p:sp>
-      <p:sp>
-        <p:nvSpPr>
-          <p:cNvPr id="18" name="TextBox 17"/>
-          <p:cNvSpPr txBox="1"/>
-          <p:nvPr/>
-        </p:nvSpPr>
-        <p:spPr>
-          <a:xfrm>
-            <a:off x="2560320" y="4023360"/>
-            <a:ext cx="4114800" cy="365760"/>
-          </a:xfrm>
-          <a:prstGeom prst="rect">
-            <a:avLst/>
-          </a:prstGeom>
-          <a:noFill/>
-        </p:spPr>
-        <p:txBody>
-          <a:bodyPr wrap="square">
-            <a:spAutoFit/>
-          </a:bodyPr>
-          <a:lstStyle/>
-          <a:p>
-            <a:pPr algn="l">
-              <a:defRPr sz="1300" b="0">
-                <a:solidFill>
-                  <a:srgbClr val="FF6666"/>
-                </a:solidFill>
-                <a:latin typeface="Arial"/>
-              </a:defRPr>
-            </a:pPr>
-            <a:r>
-              <a:t>重低音 beats 🥁</a:t>
-            </a:r>
-          </a:p>
-        </p:txBody>
-      </p:sp>
-      <p:sp>
-        <p:nvSpPr>
-          <p:cNvPr id="19" name="TextBox 18"/>
-          <p:cNvSpPr txBox="1"/>
-          <p:nvPr/>
-        </p:nvSpPr>
-        <p:spPr>
-          <a:xfrm>
-            <a:off x="6858000" y="4023360"/>
-            <a:ext cx="4114800" cy="365760"/>
-          </a:xfrm>
-          <a:prstGeom prst="rect">
-            <a:avLst/>
-          </a:prstGeom>
-          <a:noFill/>
-        </p:spPr>
-        <p:txBody>
-          <a:bodyPr wrap="square">
-            <a:spAutoFit/>
-          </a:bodyPr>
-          <a:lstStyle/>
-          <a:p>
-            <a:pPr algn="l">
-              <a:defRPr sz="1300" b="0">
-                <a:solidFill>
-                  <a:srgbClr val="FF99CC"/>
-                </a:solidFill>
-                <a:latin typeface="Arial"/>
-              </a:defRPr>
-            </a:pPr>
-            <a:r>
-              <a:t>柔和鈴聲/鋼琴 🔔</a:t>
-            </a:r>
-          </a:p>
-        </p:txBody>
-      </p:sp>
-      <p:sp>
-        <p:nvSpPr>
-          <p:cNvPr id="20" name="TextBox 19"/>
-          <p:cNvSpPr txBox="1"/>
-          <p:nvPr/>
-        </p:nvSpPr>
-        <p:spPr>
-          <a:xfrm>
-            <a:off x="914400" y="4617720"/>
-            <a:ext cx="1371600" cy="365760"/>
-          </a:xfrm>
-          <a:prstGeom prst="rect">
-            <a:avLst/>
-          </a:prstGeom>
-          <a:noFill/>
-        </p:spPr>
-        <p:txBody>
-          <a:bodyPr wrap="square">
-            <a:spAutoFit/>
-          </a:bodyPr>
-          <a:lstStyle/>
-          <a:p>
-            <a:pPr algn="l">
-              <a:defRPr sz="1400" b="1">
-                <a:solidFill>
-                  <a:srgbClr val="FFD700"/>
-                </a:solidFill>
-                <a:latin typeface="Arial"/>
-              </a:defRPr>
-            </a:pPr>
-            <a:r>
-              <a:t>時限</a:t>
-            </a:r>
-          </a:p>
-        </p:txBody>
-      </p:sp>
-      <p:sp>
-        <p:nvSpPr>
-          <p:cNvPr id="21" name="TextBox 20"/>
-          <p:cNvSpPr txBox="1"/>
-          <p:nvPr/>
-        </p:nvSpPr>
-        <p:spPr>
-          <a:xfrm>
-            <a:off x="2560320" y="4617720"/>
-            <a:ext cx="4114800" cy="365760"/>
-          </a:xfrm>
-          <a:prstGeom prst="rect">
-            <a:avLst/>
-          </a:prstGeom>
-          <a:noFill/>
-        </p:spPr>
-        <p:txBody>
-          <a:bodyPr wrap="square">
-            <a:spAutoFit/>
-          </a:bodyPr>
-          <a:lstStyle/>
-          <a:p>
-            <a:pPr algn="l">
-              <a:defRPr sz="1300" b="0">
-                <a:solidFill>
-                  <a:srgbClr val="FF6666"/>
-                </a:solidFill>
-                <a:latin typeface="Arial"/>
-              </a:defRPr>
-            </a:pPr>
-            <a:r>
-              <a:t>30 秒限時</a:t>
-            </a:r>
-          </a:p>
-        </p:txBody>
-      </p:sp>
-      <p:sp>
-        <p:nvSpPr>
-          <p:cNvPr id="22" name="TextBox 21"/>
-          <p:cNvSpPr txBox="1"/>
-          <p:nvPr/>
-        </p:nvSpPr>
-        <p:spPr>
-          <a:xfrm>
-            <a:off x="6858000" y="4617720"/>
-            <a:ext cx="4114800" cy="365760"/>
-          </a:xfrm>
-          <a:prstGeom prst="rect">
-            <a:avLst/>
-          </a:prstGeom>
-          <a:noFill/>
-        </p:spPr>
-        <p:txBody>
-          <a:bodyPr wrap="square">
-            <a:spAutoFit/>
-          </a:bodyPr>
-          <a:lstStyle/>
-          <a:p>
-            <a:pPr algn="l">
-              <a:defRPr sz="1300" b="0">
-                <a:solidFill>
-                  <a:srgbClr val="FF99CC"/>
-                </a:solidFill>
-                <a:latin typeface="Arial"/>
-              </a:defRPr>
-            </a:pPr>
-            <a:r>
-              <a:t>30 秒限時</a:t>
-            </a:r>
-          </a:p>
-        </p:txBody>
-      </p:sp>
-      <p:sp>
-        <p:nvSpPr>
-          <p:cNvPr id="23" name="TextBox 22"/>
-          <p:cNvSpPr txBox="1"/>
-          <p:nvPr/>
-        </p:nvSpPr>
-        <p:spPr>
-          <a:xfrm>
-            <a:off x="914400" y="5212080"/>
-            <a:ext cx="1371600" cy="365760"/>
-          </a:xfrm>
-          <a:prstGeom prst="rect">
-            <a:avLst/>
-          </a:prstGeom>
-          <a:noFill/>
-        </p:spPr>
-        <p:txBody>
-          <a:bodyPr wrap="square">
-            <a:spAutoFit/>
-          </a:bodyPr>
-          <a:lstStyle/>
-          <a:p>
-            <a:pPr algn="l">
-              <a:defRPr sz="1400" b="1">
-                <a:solidFill>
-                  <a:srgbClr val="FFD700"/>
-                </a:solidFill>
-                <a:latin typeface="Arial"/>
-              </a:defRPr>
-            </a:pPr>
-            <a:r>
-              <a:t>成功</a:t>
-            </a:r>
-          </a:p>
-        </p:txBody>
-      </p:sp>
-      <p:sp>
-        <p:nvSpPr>
-          <p:cNvPr id="24" name="TextBox 23"/>
-          <p:cNvSpPr txBox="1"/>
-          <p:nvPr/>
-        </p:nvSpPr>
-        <p:spPr>
-          <a:xfrm>
-            <a:off x="2560320" y="5212080"/>
-            <a:ext cx="4114800" cy="365760"/>
-          </a:xfrm>
-          <a:prstGeom prst="rect">
-            <a:avLst/>
-          </a:prstGeom>
-          <a:noFill/>
-        </p:spPr>
-        <p:txBody>
-          <a:bodyPr wrap="square">
-            <a:spAutoFit/>
-          </a:bodyPr>
-          <a:lstStyle/>
-          <a:p>
-            <a:pPr algn="l">
-              <a:defRPr sz="1300" b="0">
-                <a:solidFill>
-                  <a:srgbClr val="FF6666"/>
-                </a:solidFill>
-                <a:latin typeface="Arial"/>
-              </a:defRPr>
-            </a:pPr>
-            <a:r>
-              <a:t>紙人碎裂+彩帶</a:t>
-            </a:r>
-          </a:p>
-        </p:txBody>
-      </p:sp>
-      <p:sp>
-        <p:nvSpPr>
-          <p:cNvPr id="25" name="TextBox 24"/>
-          <p:cNvSpPr txBox="1"/>
-          <p:nvPr/>
-        </p:nvSpPr>
-        <p:spPr>
-          <a:xfrm>
-            <a:off x="6858000" y="5212080"/>
-            <a:ext cx="4114800" cy="365760"/>
-          </a:xfrm>
-          <a:prstGeom prst="rect">
-            <a:avLst/>
-          </a:prstGeom>
-          <a:noFill/>
-        </p:spPr>
-        <p:txBody>
-          <a:bodyPr wrap="square">
-            <a:spAutoFit/>
-          </a:bodyPr>
-          <a:lstStyle/>
-          <a:p>
-            <a:pPr algn="l">
-              <a:defRPr sz="1300" b="0">
-                <a:solidFill>
-                  <a:srgbClr val="FF99CC"/>
-                </a:solidFill>
-                <a:latin typeface="Arial"/>
-              </a:defRPr>
-            </a:pPr>
-            <a:r>
-              <a:t>紙人發光+大心心</a:t>
-            </a:r>
-          </a:p>
-        </p:txBody>
-      </p:sp>
-      <p:sp>
-        <p:nvSpPr>
-          <p:cNvPr id="26" name="TextBox 25"/>
-          <p:cNvSpPr txBox="1"/>
-          <p:nvPr/>
-        </p:nvSpPr>
-        <p:spPr>
-          <a:xfrm>
-            <a:off x="914400" y="5806440"/>
-            <a:ext cx="1371600" cy="365760"/>
-          </a:xfrm>
-          <a:prstGeom prst="rect">
-            <a:avLst/>
-          </a:prstGeom>
-          <a:noFill/>
-        </p:spPr>
-        <p:txBody>
-          <a:bodyPr wrap="square">
-            <a:spAutoFit/>
-          </a:bodyPr>
-          <a:lstStyle/>
-          <a:p>
-            <a:pPr algn="l">
-              <a:defRPr sz="1400" b="1">
-                <a:solidFill>
-                  <a:srgbClr val="FFD700"/>
-                </a:solidFill>
-                <a:latin typeface="Arial"/>
-              </a:defRPr>
-            </a:pPr>
-            <a:r>
-              <a:t>失敗</a:t>
-            </a:r>
-          </a:p>
-        </p:txBody>
-      </p:sp>
-      <p:sp>
-        <p:nvSpPr>
-          <p:cNvPr id="27" name="TextBox 26"/>
-          <p:cNvSpPr txBox="1"/>
-          <p:nvPr/>
-        </p:nvSpPr>
-        <p:spPr>
-          <a:xfrm>
-            <a:off x="2560320" y="5806440"/>
-            <a:ext cx="4114800" cy="365760"/>
-          </a:xfrm>
-          <a:prstGeom prst="rect">
-            <a:avLst/>
-          </a:prstGeom>
-          <a:noFill/>
-        </p:spPr>
-        <p:txBody>
-          <a:bodyPr wrap="square">
-            <a:spAutoFit/>
-          </a:bodyPr>
-          <a:lstStyle/>
-          <a:p>
-            <a:pPr algn="l">
-              <a:defRPr sz="1300" b="0">
-                <a:solidFill>
-                  <a:srgbClr val="FF6666"/>
-                </a:solidFill>
-                <a:latin typeface="Arial"/>
-              </a:defRPr>
-            </a:pPr>
-            <a:r>
-              <a:t>紙人嘲笑+鬼臉</a:t>
-            </a:r>
-          </a:p>
-        </p:txBody>
-      </p:sp>
-      <p:sp>
-        <p:nvSpPr>
-          <p:cNvPr id="28" name="TextBox 27"/>
-          <p:cNvSpPr txBox="1"/>
-          <p:nvPr/>
-        </p:nvSpPr>
-        <p:spPr>
-          <a:xfrm>
-            <a:off x="6858000" y="5806440"/>
-            <a:ext cx="4114800" cy="365760"/>
-          </a:xfrm>
-          <a:prstGeom prst="rect">
-            <a:avLst/>
-          </a:prstGeom>
-          <a:noFill/>
-        </p:spPr>
-        <p:txBody>
-          <a:bodyPr wrap="square">
-            <a:spAutoFit/>
-          </a:bodyPr>
-          <a:lstStyle/>
-          <a:p>
-            <a:pPr algn="l">
-              <a:defRPr sz="1300" b="0">
-                <a:solidFill>
-                  <a:srgbClr val="FF99CC"/>
-                </a:solidFill>
-                <a:latin typeface="Arial"/>
-              </a:defRPr>
-            </a:pPr>
-            <a:r>
-              <a:t>紙人扁嘴+嬲嬲</a:t>
-            </a:r>
-          </a:p>
-        </p:txBody>
-      </p:sp>
-      <p:sp>
-        <p:nvSpPr>
-          <p:cNvPr id="29" name="TextBox 28"/>
-          <p:cNvSpPr txBox="1"/>
-          <p:nvPr/>
-        </p:nvSpPr>
-        <p:spPr>
-          <a:xfrm>
-            <a:off x="914400" y="6400800"/>
-            <a:ext cx="10058400" cy="274320"/>
-          </a:xfrm>
-          <a:prstGeom prst="rect">
-            <a:avLst/>
-          </a:prstGeom>
-          <a:noFill/>
-        </p:spPr>
-        <p:txBody>
-          <a:bodyPr wrap="square">
-            <a:spAutoFit/>
-          </a:bodyPr>
-          <a:lstStyle/>
-          <a:p>
-            <a:pPr algn="ctr">
-              <a:defRPr sz="1400" b="1">
-                <a:solidFill>
-                  <a:srgbClr val="FFD700"/>
-                </a:solidFill>
-                <a:latin typeface="Arial"/>
-              </a:defRPr>
-            </a:pPr>
-            <a:r>
-              <a:t>同一套 Canvas 遊戲引擎，換 theme 即係第二種玩法</a:t>
+              <a:defRPr sz="1200" b="0">
+                <a:solidFill>
+                  <a:srgbClr val="999999"/>
+                </a:solidFill>
+                <a:latin typeface="Arial"/>
+              </a:defRPr>
+            </a:pPr>
+            <a:r>
+              <a:t>口訣自動代入人名：「打你個{名}頭，等你一世唔出頭」</a:t>
             </a:r>
           </a:p>
         </p:txBody>
@@ -5487,6 +5755,9 @@
           <a:solidFill>
             <a:srgbClr val="00D4FF"/>
           </a:solidFill>
+          <a:ln>
+            <a:noFill/>
+          </a:ln>
         </p:spPr>
         <p:style>
           <a:lnRef idx="1">
@@ -5541,7 +5812,7 @@
               </a:defRPr>
             </a:pPr>
             <a:r>
-              <a:t> 口訣系統</a:t>
+              <a:t>遊戲 + 口訣 + 工具 總覽</a:t>
             </a:r>
           </a:p>
         </p:txBody>
@@ -5563,6 +5834,9 @@
           <a:solidFill>
             <a:srgbClr val="00D4FF"/>
           </a:solidFill>
+          <a:ln>
+            <a:noFill/>
+          </a:ln>
         </p:spPr>
         <p:style>
           <a:lnRef idx="1">
@@ -5595,7 +5869,7 @@
         <p:spPr>
           <a:xfrm>
             <a:off x="731520" y="1645920"/>
-            <a:ext cx="5029200" cy="3200400"/>
+            <a:ext cx="5029200" cy="4572000"/>
           </a:xfrm>
           <a:prstGeom prst="roundRect">
             <a:avLst/>
@@ -5603,6 +5877,9 @@
           <a:solidFill>
             <a:srgbClr val="22223E"/>
           </a:solidFill>
+          <a:ln>
+            <a:noFill/>
+          </a:ln>
         </p:spPr>
         <p:style>
           <a:lnRef idx="1">
@@ -5628,345 +5905,24 @@
       </p:sp>
       <p:sp>
         <p:nvSpPr>
-          <p:cNvPr id="6" name="TextBox 5"/>
-          <p:cNvSpPr txBox="1"/>
-          <p:nvPr/>
-        </p:nvSpPr>
-        <p:spPr>
-          <a:xfrm>
-            <a:off x="1097280" y="1828800"/>
-            <a:ext cx="4389120" cy="365760"/>
-          </a:xfrm>
-          <a:prstGeom prst="rect">
-            <a:avLst/>
-          </a:prstGeom>
-          <a:noFill/>
-        </p:spPr>
-        <p:txBody>
-          <a:bodyPr wrap="square">
-            <a:spAutoFit/>
-          </a:bodyPr>
-          <a:lstStyle/>
-          <a:p>
-            <a:pPr algn="l">
-              <a:defRPr sz="1800" b="1">
-                <a:solidFill>
-                  <a:srgbClr val="FF4444"/>
-                </a:solidFill>
-                <a:latin typeface="Arial"/>
-              </a:defRPr>
-            </a:pPr>
-            <a:r>
-              <a:t> 打小人 — 傳統口訣</a:t>
-            </a:r>
-          </a:p>
-        </p:txBody>
-      </p:sp>
-      <p:sp>
-        <p:nvSpPr>
-          <p:cNvPr id="7" name="TextBox 6"/>
-          <p:cNvSpPr txBox="1"/>
-          <p:nvPr/>
-        </p:nvSpPr>
-        <p:spPr>
-          <a:xfrm>
-            <a:off x="1097280" y="2377440"/>
-            <a:ext cx="4389120" cy="457200"/>
-          </a:xfrm>
-          <a:prstGeom prst="rect">
-            <a:avLst/>
-          </a:prstGeom>
-          <a:noFill/>
-        </p:spPr>
-        <p:txBody>
-          <a:bodyPr wrap="square">
-            <a:spAutoFit/>
-          </a:bodyPr>
-          <a:lstStyle/>
-          <a:p>
-            <a:pPr algn="l">
-              <a:defRPr sz="1400" b="0">
-                <a:solidFill>
-                  <a:srgbClr val="FF8888"/>
-                </a:solidFill>
-                <a:latin typeface="Arial"/>
-              </a:defRPr>
-            </a:pPr>
-            <a:r>
-              <a:t>打你個小人頭，等你一世唔出頭</a:t>
-            </a:r>
-          </a:p>
-        </p:txBody>
-      </p:sp>
-      <p:sp>
-        <p:nvSpPr>
-          <p:cNvPr id="8" name="TextBox 7"/>
-          <p:cNvSpPr txBox="1"/>
-          <p:nvPr/>
-        </p:nvSpPr>
-        <p:spPr>
-          <a:xfrm>
-            <a:off x="3657600" y="2377440"/>
-            <a:ext cx="1371600" cy="457200"/>
-          </a:xfrm>
-          <a:prstGeom prst="rect">
-            <a:avLst/>
-          </a:prstGeom>
-          <a:noFill/>
-        </p:spPr>
-        <p:txBody>
-          <a:bodyPr wrap="square">
-            <a:spAutoFit/>
-          </a:bodyPr>
-          <a:lstStyle/>
-          <a:p>
-            <a:pPr algn="l">
-              <a:defRPr sz="1600" b="0">
-                <a:solidFill>
-                  <a:srgbClr val="00D4FF"/>
-                </a:solidFill>
-                <a:latin typeface="Arial"/>
-              </a:defRPr>
-            </a:pPr>
-            <a:r>
-              <a:t>🥁</a:t>
-            </a:r>
-          </a:p>
-        </p:txBody>
-      </p:sp>
-      <p:sp>
-        <p:nvSpPr>
-          <p:cNvPr id="9" name="TextBox 8"/>
-          <p:cNvSpPr txBox="1"/>
-          <p:nvPr/>
-        </p:nvSpPr>
-        <p:spPr>
-          <a:xfrm>
-            <a:off x="1097280" y="2926080"/>
-            <a:ext cx="4389120" cy="457200"/>
-          </a:xfrm>
-          <a:prstGeom prst="rect">
-            <a:avLst/>
-          </a:prstGeom>
-          <a:noFill/>
-        </p:spPr>
-        <p:txBody>
-          <a:bodyPr wrap="square">
-            <a:spAutoFit/>
-          </a:bodyPr>
-          <a:lstStyle/>
-          <a:p>
-            <a:pPr algn="l">
-              <a:defRPr sz="1400" b="0">
-                <a:solidFill>
-                  <a:srgbClr val="FF8888"/>
-                </a:solidFill>
-                <a:latin typeface="Arial"/>
-              </a:defRPr>
-            </a:pPr>
-            <a:r>
-              <a:t>打你個小人手，等你一世冇朋友</a:t>
-            </a:r>
-          </a:p>
-        </p:txBody>
-      </p:sp>
-      <p:sp>
-        <p:nvSpPr>
-          <p:cNvPr id="10" name="TextBox 9"/>
-          <p:cNvSpPr txBox="1"/>
-          <p:nvPr/>
-        </p:nvSpPr>
-        <p:spPr>
-          <a:xfrm>
-            <a:off x="3657600" y="2926080"/>
-            <a:ext cx="1371600" cy="457200"/>
-          </a:xfrm>
-          <a:prstGeom prst="rect">
-            <a:avLst/>
-          </a:prstGeom>
-          <a:noFill/>
-        </p:spPr>
-        <p:txBody>
-          <a:bodyPr wrap="square">
-            <a:spAutoFit/>
-          </a:bodyPr>
-          <a:lstStyle/>
-          <a:p>
-            <a:pPr algn="l">
-              <a:defRPr sz="1600" b="0">
-                <a:solidFill>
-                  <a:srgbClr val="00D4FF"/>
-                </a:solidFill>
-                <a:latin typeface="Arial"/>
-              </a:defRPr>
-            </a:pPr>
-            <a:r>
-              <a:t>🥁</a:t>
-            </a:r>
-          </a:p>
-        </p:txBody>
-      </p:sp>
-      <p:sp>
-        <p:nvSpPr>
-          <p:cNvPr id="11" name="TextBox 10"/>
-          <p:cNvSpPr txBox="1"/>
-          <p:nvPr/>
-        </p:nvSpPr>
-        <p:spPr>
-          <a:xfrm>
-            <a:off x="1097280" y="3474720"/>
-            <a:ext cx="4389120" cy="457200"/>
-          </a:xfrm>
-          <a:prstGeom prst="rect">
-            <a:avLst/>
-          </a:prstGeom>
-          <a:noFill/>
-        </p:spPr>
-        <p:txBody>
-          <a:bodyPr wrap="square">
-            <a:spAutoFit/>
-          </a:bodyPr>
-          <a:lstStyle/>
-          <a:p>
-            <a:pPr algn="l">
-              <a:defRPr sz="1400" b="0">
-                <a:solidFill>
-                  <a:srgbClr val="FF8888"/>
-                </a:solidFill>
-                <a:latin typeface="Arial"/>
-              </a:defRPr>
-            </a:pPr>
-            <a:r>
-              <a:t>打你個小人眼，等你一世冇人睇</a:t>
-            </a:r>
-          </a:p>
-        </p:txBody>
-      </p:sp>
-      <p:sp>
-        <p:nvSpPr>
-          <p:cNvPr id="12" name="TextBox 11"/>
-          <p:cNvSpPr txBox="1"/>
-          <p:nvPr/>
-        </p:nvSpPr>
-        <p:spPr>
-          <a:xfrm>
-            <a:off x="3657600" y="3474720"/>
-            <a:ext cx="1371600" cy="457200"/>
-          </a:xfrm>
-          <a:prstGeom prst="rect">
-            <a:avLst/>
-          </a:prstGeom>
-          <a:noFill/>
-        </p:spPr>
-        <p:txBody>
-          <a:bodyPr wrap="square">
-            <a:spAutoFit/>
-          </a:bodyPr>
-          <a:lstStyle/>
-          <a:p>
-            <a:pPr algn="l">
-              <a:defRPr sz="1600" b="0">
-                <a:solidFill>
-                  <a:srgbClr val="00D4FF"/>
-                </a:solidFill>
-                <a:latin typeface="Arial"/>
-              </a:defRPr>
-            </a:pPr>
-            <a:r>
-              <a:t>🥁</a:t>
-            </a:r>
-          </a:p>
-        </p:txBody>
-      </p:sp>
-      <p:sp>
-        <p:nvSpPr>
-          <p:cNvPr id="13" name="TextBox 12"/>
-          <p:cNvSpPr txBox="1"/>
-          <p:nvPr/>
-        </p:nvSpPr>
-        <p:spPr>
-          <a:xfrm>
-            <a:off x="1097280" y="4023360"/>
-            <a:ext cx="4389120" cy="457200"/>
-          </a:xfrm>
-          <a:prstGeom prst="rect">
-            <a:avLst/>
-          </a:prstGeom>
-          <a:noFill/>
-        </p:spPr>
-        <p:txBody>
-          <a:bodyPr wrap="square">
-            <a:spAutoFit/>
-          </a:bodyPr>
-          <a:lstStyle/>
-          <a:p>
-            <a:pPr algn="l">
-              <a:defRPr sz="1400" b="0">
-                <a:solidFill>
-                  <a:srgbClr val="FF8888"/>
-                </a:solidFill>
-                <a:latin typeface="Arial"/>
-              </a:defRPr>
-            </a:pPr>
-            <a:r>
-              <a:t>打你個小人腳，等你一世冇鞋著</a:t>
-            </a:r>
-          </a:p>
-        </p:txBody>
-      </p:sp>
-      <p:sp>
-        <p:nvSpPr>
-          <p:cNvPr id="14" name="TextBox 13"/>
-          <p:cNvSpPr txBox="1"/>
-          <p:nvPr/>
-        </p:nvSpPr>
-        <p:spPr>
-          <a:xfrm>
-            <a:off x="3657600" y="4023360"/>
-            <a:ext cx="1371600" cy="457200"/>
-          </a:xfrm>
-          <a:prstGeom prst="rect">
-            <a:avLst/>
-          </a:prstGeom>
-          <a:noFill/>
-        </p:spPr>
-        <p:txBody>
-          <a:bodyPr wrap="square">
-            <a:spAutoFit/>
-          </a:bodyPr>
-          <a:lstStyle/>
-          <a:p>
-            <a:pPr algn="l">
-              <a:defRPr sz="1600" b="0">
-                <a:solidFill>
-                  <a:srgbClr val="00D4FF"/>
-                </a:solidFill>
-                <a:latin typeface="Arial"/>
-              </a:defRPr>
-            </a:pPr>
-            <a:r>
-              <a:t>🥁</a:t>
-            </a:r>
-          </a:p>
-        </p:txBody>
-      </p:sp>
-      <p:sp>
-        <p:nvSpPr>
-          <p:cNvPr id="15" name="Rounded Rectangle 14"/>
+          <p:cNvPr id="6" name="Rectangle 5"/>
           <p:cNvSpPr/>
           <p:nvPr/>
         </p:nvSpPr>
         <p:spPr>
           <a:xfrm>
-            <a:off x="6217920" y="1645920"/>
-            <a:ext cx="5029200" cy="3200400"/>
-          </a:xfrm>
-          <a:prstGeom prst="roundRect">
+            <a:off x="731520" y="1645920"/>
+            <a:ext cx="5029200" cy="63500"/>
+          </a:xfrm>
+          <a:prstGeom prst="rect">
             <a:avLst/>
           </a:prstGeom>
           <a:solidFill>
-            <a:srgbClr val="22223E"/>
+            <a:srgbClr val="FF4444"/>
           </a:solidFill>
+          <a:ln>
+            <a:noFill/>
+          </a:ln>
         </p:spPr>
         <p:style>
           <a:lnRef idx="1">
@@ -5992,13 +5948,13 @@
       </p:sp>
       <p:sp>
         <p:nvSpPr>
-          <p:cNvPr id="16" name="TextBox 15"/>
-          <p:cNvSpPr txBox="1"/>
-          <p:nvPr/>
-        </p:nvSpPr>
-        <p:spPr>
-          <a:xfrm>
-            <a:off x="6583680" y="1828800"/>
+          <p:cNvPr id="7" name="TextBox 6"/>
+          <p:cNvSpPr txBox="1"/>
+          <p:nvPr/>
+        </p:nvSpPr>
+        <p:spPr>
+          <a:xfrm>
+            <a:off x="1097280" y="1828800"/>
             <a:ext cx="4389120" cy="365760"/>
           </a:xfrm>
           <a:prstGeom prst="rect">
@@ -6013,29 +5969,29 @@
           <a:lstStyle/>
           <a:p>
             <a:pPr algn="l">
-              <a:defRPr sz="1800" b="1">
-                <a:solidFill>
-                  <a:srgbClr val="FF88CC"/>
-                </a:solidFill>
-                <a:latin typeface="Arial"/>
-              </a:defRPr>
-            </a:pPr>
-            <a:r>
-              <a:t> 愛的抱抱 — 自創祝福口訣</a:t>
-            </a:r>
-          </a:p>
-        </p:txBody>
-      </p:sp>
-      <p:sp>
-        <p:nvSpPr>
-          <p:cNvPr id="17" name="TextBox 16"/>
-          <p:cNvSpPr txBox="1"/>
-          <p:nvPr/>
-        </p:nvSpPr>
-        <p:spPr>
-          <a:xfrm>
-            <a:off x="6583680" y="2377440"/>
-            <a:ext cx="4389120" cy="457200"/>
+              <a:defRPr sz="2000" b="1">
+                <a:solidFill>
+                  <a:srgbClr val="FF4444"/>
+                </a:solidFill>
+                <a:latin typeface="Arial"/>
+              </a:defRPr>
+            </a:pPr>
+            <a:r>
+              <a:t> 打小人</a:t>
+            </a:r>
+          </a:p>
+        </p:txBody>
+      </p:sp>
+      <p:sp>
+        <p:nvSpPr>
+          <p:cNvPr id="8" name="TextBox 7"/>
+          <p:cNvSpPr txBox="1"/>
+          <p:nvPr/>
+        </p:nvSpPr>
+        <p:spPr>
+          <a:xfrm>
+            <a:off x="1097280" y="2377440"/>
+            <a:ext cx="4389120" cy="365760"/>
           </a:xfrm>
           <a:prstGeom prst="rect">
             <a:avLst/>
@@ -6049,29 +6005,29 @@
           <a:lstStyle/>
           <a:p>
             <a:pPr algn="l">
-              <a:defRPr sz="1400" b="0">
-                <a:solidFill>
-                  <a:srgbClr val="FFBBDD"/>
-                </a:solidFill>
-                <a:latin typeface="Arial"/>
-              </a:defRPr>
-            </a:pPr>
-            <a:r>
-              <a:t>錫錫你個頭，煩惱全部走</a:t>
-            </a:r>
-          </a:p>
-        </p:txBody>
-      </p:sp>
-      <p:sp>
-        <p:nvSpPr>
-          <p:cNvPr id="18" name="TextBox 17"/>
-          <p:cNvSpPr txBox="1"/>
-          <p:nvPr/>
-        </p:nvSpPr>
-        <p:spPr>
-          <a:xfrm>
-            <a:off x="9144000" y="2377440"/>
-            <a:ext cx="1371600" cy="457200"/>
+              <a:defRPr sz="1200" b="0">
+                <a:solidFill>
+                  <a:srgbClr val="FF9999"/>
+                </a:solidFill>
+                <a:latin typeface="Arial"/>
+              </a:defRPr>
+            </a:pPr>
+            <a:r>
+              <a:t>打你個{名}頭，等你一世唔出頭</a:t>
+            </a:r>
+          </a:p>
+        </p:txBody>
+      </p:sp>
+      <p:sp>
+        <p:nvSpPr>
+          <p:cNvPr id="9" name="TextBox 8"/>
+          <p:cNvSpPr txBox="1"/>
+          <p:nvPr/>
+        </p:nvSpPr>
+        <p:spPr>
+          <a:xfrm>
+            <a:off x="1097280" y="2834640"/>
+            <a:ext cx="4389120" cy="365760"/>
           </a:xfrm>
           <a:prstGeom prst="rect">
             <a:avLst/>
@@ -6085,29 +6041,29 @@
           <a:lstStyle/>
           <a:p>
             <a:pPr algn="l">
-              <a:defRPr sz="1600" b="0">
-                <a:solidFill>
-                  <a:srgbClr val="FFD700"/>
-                </a:solidFill>
-                <a:latin typeface="Arial"/>
-              </a:defRPr>
-            </a:pPr>
-            <a:r>
-              <a:t>🎀</a:t>
-            </a:r>
-          </a:p>
-        </p:txBody>
-      </p:sp>
-      <p:sp>
-        <p:nvSpPr>
-          <p:cNvPr id="19" name="TextBox 18"/>
-          <p:cNvSpPr txBox="1"/>
-          <p:nvPr/>
-        </p:nvSpPr>
-        <p:spPr>
-          <a:xfrm>
-            <a:off x="6583680" y="2926080"/>
-            <a:ext cx="4389120" cy="457200"/>
+              <a:defRPr sz="1200" b="0">
+                <a:solidFill>
+                  <a:srgbClr val="FF9999"/>
+                </a:solidFill>
+                <a:latin typeface="Arial"/>
+              </a:defRPr>
+            </a:pPr>
+            <a:r>
+              <a:t>打你個{名}手，等你一世冇朋友</a:t>
+            </a:r>
+          </a:p>
+        </p:txBody>
+      </p:sp>
+      <p:sp>
+        <p:nvSpPr>
+          <p:cNvPr id="10" name="TextBox 9"/>
+          <p:cNvSpPr txBox="1"/>
+          <p:nvPr/>
+        </p:nvSpPr>
+        <p:spPr>
+          <a:xfrm>
+            <a:off x="1097280" y="3291840"/>
+            <a:ext cx="4389120" cy="365760"/>
           </a:xfrm>
           <a:prstGeom prst="rect">
             <a:avLst/>
@@ -6121,29 +6077,29 @@
           <a:lstStyle/>
           <a:p>
             <a:pPr algn="l">
-              <a:defRPr sz="1400" b="0">
-                <a:solidFill>
-                  <a:srgbClr val="FFBBDD"/>
-                </a:solidFill>
-                <a:latin typeface="Arial"/>
-              </a:defRPr>
-            </a:pPr>
-            <a:r>
-              <a:t>錫錫你對手，好運跟你走</a:t>
-            </a:r>
-          </a:p>
-        </p:txBody>
-      </p:sp>
-      <p:sp>
-        <p:nvSpPr>
-          <p:cNvPr id="20" name="TextBox 19"/>
-          <p:cNvSpPr txBox="1"/>
-          <p:nvPr/>
-        </p:nvSpPr>
-        <p:spPr>
-          <a:xfrm>
-            <a:off x="9144000" y="2926080"/>
-            <a:ext cx="1371600" cy="457200"/>
+              <a:defRPr sz="1200" b="0">
+                <a:solidFill>
+                  <a:srgbClr val="FF9999"/>
+                </a:solidFill>
+                <a:latin typeface="Arial"/>
+              </a:defRPr>
+            </a:pPr>
+            <a:r>
+              <a:t>打你個{名}眼，等你一世冇人睇</a:t>
+            </a:r>
+          </a:p>
+        </p:txBody>
+      </p:sp>
+      <p:sp>
+        <p:nvSpPr>
+          <p:cNvPr id="11" name="TextBox 10"/>
+          <p:cNvSpPr txBox="1"/>
+          <p:nvPr/>
+        </p:nvSpPr>
+        <p:spPr>
+          <a:xfrm>
+            <a:off x="1097280" y="3749039"/>
+            <a:ext cx="4389120" cy="365760"/>
           </a:xfrm>
           <a:prstGeom prst="rect">
             <a:avLst/>
@@ -6157,29 +6113,29 @@
           <a:lstStyle/>
           <a:p>
             <a:pPr algn="l">
-              <a:defRPr sz="1600" b="0">
-                <a:solidFill>
-                  <a:srgbClr val="FFD700"/>
-                </a:solidFill>
-                <a:latin typeface="Arial"/>
-              </a:defRPr>
-            </a:pPr>
-            <a:r>
-              <a:t>🎀</a:t>
-            </a:r>
-          </a:p>
-        </p:txBody>
-      </p:sp>
-      <p:sp>
-        <p:nvSpPr>
-          <p:cNvPr id="21" name="TextBox 20"/>
-          <p:cNvSpPr txBox="1"/>
-          <p:nvPr/>
-        </p:nvSpPr>
-        <p:spPr>
-          <a:xfrm>
-            <a:off x="6583680" y="3474720"/>
-            <a:ext cx="4389120" cy="457200"/>
+              <a:defRPr sz="1200" b="0">
+                <a:solidFill>
+                  <a:srgbClr val="FF9999"/>
+                </a:solidFill>
+                <a:latin typeface="Arial"/>
+              </a:defRPr>
+            </a:pPr>
+            <a:r>
+              <a:t>打你個{名}腳，等你一世冇鞋著</a:t>
+            </a:r>
+          </a:p>
+        </p:txBody>
+      </p:sp>
+      <p:sp>
+        <p:nvSpPr>
+          <p:cNvPr id="12" name="TextBox 11"/>
+          <p:cNvSpPr txBox="1"/>
+          <p:nvPr/>
+        </p:nvSpPr>
+        <p:spPr>
+          <a:xfrm>
+            <a:off x="1097280" y="4389120"/>
+            <a:ext cx="4389120" cy="274320"/>
           </a:xfrm>
           <a:prstGeom prst="rect">
             <a:avLst/>
@@ -6193,29 +6149,29 @@
           <a:lstStyle/>
           <a:p>
             <a:pPr algn="l">
-              <a:defRPr sz="1400" b="0">
-                <a:solidFill>
-                  <a:srgbClr val="FFBBDD"/>
-                </a:solidFill>
-                <a:latin typeface="Arial"/>
-              </a:defRPr>
-            </a:pPr>
-            <a:r>
-              <a:t>錫錫你一雙眼，日日都燦爛</a:t>
-            </a:r>
-          </a:p>
-        </p:txBody>
-      </p:sp>
-      <p:sp>
-        <p:nvSpPr>
-          <p:cNvPr id="22" name="TextBox 21"/>
-          <p:cNvSpPr txBox="1"/>
-          <p:nvPr/>
-        </p:nvSpPr>
-        <p:spPr>
-          <a:xfrm>
-            <a:off x="9144000" y="3474720"/>
-            <a:ext cx="1371600" cy="457200"/>
+              <a:defRPr sz="1300" b="0">
+                <a:solidFill>
+                  <a:srgbClr val="00D4FF"/>
+                </a:solidFill>
+                <a:latin typeface="Arial"/>
+              </a:defRPr>
+            </a:pPr>
+            <a:r>
+              <a:t>工具：拖鞋·棍棒·老虎鉗</a:t>
+            </a:r>
+          </a:p>
+        </p:txBody>
+      </p:sp>
+      <p:sp>
+        <p:nvSpPr>
+          <p:cNvPr id="13" name="TextBox 12"/>
+          <p:cNvSpPr txBox="1"/>
+          <p:nvPr/>
+        </p:nvSpPr>
+        <p:spPr>
+          <a:xfrm>
+            <a:off x="1097280" y="4754880"/>
+            <a:ext cx="4389120" cy="274320"/>
           </a:xfrm>
           <a:prstGeom prst="rect">
             <a:avLst/>
@@ -6229,29 +6185,29 @@
           <a:lstStyle/>
           <a:p>
             <a:pPr algn="l">
-              <a:defRPr sz="1600" b="0">
-                <a:solidFill>
-                  <a:srgbClr val="FFD700"/>
-                </a:solidFill>
-                <a:latin typeface="Arial"/>
-              </a:defRPr>
-            </a:pPr>
-            <a:r>
-              <a:t>🎀</a:t>
-            </a:r>
-          </a:p>
-        </p:txBody>
-      </p:sp>
-      <p:sp>
-        <p:nvSpPr>
-          <p:cNvPr id="23" name="TextBox 22"/>
-          <p:cNvSpPr txBox="1"/>
-          <p:nvPr/>
-        </p:nvSpPr>
-        <p:spPr>
-          <a:xfrm>
-            <a:off x="6583680" y="4023360"/>
-            <a:ext cx="4389120" cy="457200"/>
+              <a:defRPr sz="1300" b="0">
+                <a:solidFill>
+                  <a:srgbClr val="00D4FF"/>
+                </a:solidFill>
+                <a:latin typeface="Arial"/>
+              </a:defRPr>
+            </a:pPr>
+            <a:r>
+              <a:t>音樂：重低音 beats 🥁</a:t>
+            </a:r>
+          </a:p>
+        </p:txBody>
+      </p:sp>
+      <p:sp>
+        <p:nvSpPr>
+          <p:cNvPr id="14" name="TextBox 13"/>
+          <p:cNvSpPr txBox="1"/>
+          <p:nvPr/>
+        </p:nvSpPr>
+        <p:spPr>
+          <a:xfrm>
+            <a:off x="1097280" y="5120640"/>
+            <a:ext cx="4389120" cy="274320"/>
           </a:xfrm>
           <a:prstGeom prst="rect">
             <a:avLst/>
@@ -6265,65 +6221,29 @@
           <a:lstStyle/>
           <a:p>
             <a:pPr algn="l">
-              <a:defRPr sz="1400" b="0">
-                <a:solidFill>
-                  <a:srgbClr val="FFBBDD"/>
-                </a:solidFill>
-                <a:latin typeface="Arial"/>
-              </a:defRPr>
-            </a:pPr>
-            <a:r>
-              <a:t>錫錫你一對腳，路路都快樂</a:t>
-            </a:r>
-          </a:p>
-        </p:txBody>
-      </p:sp>
-      <p:sp>
-        <p:nvSpPr>
-          <p:cNvPr id="24" name="TextBox 23"/>
-          <p:cNvSpPr txBox="1"/>
-          <p:nvPr/>
-        </p:nvSpPr>
-        <p:spPr>
-          <a:xfrm>
-            <a:off x="9144000" y="4023360"/>
-            <a:ext cx="1371600" cy="457200"/>
-          </a:xfrm>
-          <a:prstGeom prst="rect">
-            <a:avLst/>
-          </a:prstGeom>
-          <a:noFill/>
-        </p:spPr>
-        <p:txBody>
-          <a:bodyPr wrap="square">
-            <a:spAutoFit/>
-          </a:bodyPr>
-          <a:lstStyle/>
-          <a:p>
-            <a:pPr algn="l">
-              <a:defRPr sz="1600" b="0">
-                <a:solidFill>
-                  <a:srgbClr val="FFD700"/>
-                </a:solidFill>
-                <a:latin typeface="Arial"/>
-              </a:defRPr>
-            </a:pPr>
-            <a:r>
-              <a:t>🎀</a:t>
-            </a:r>
-          </a:p>
-        </p:txBody>
-      </p:sp>
-      <p:sp>
-        <p:nvSpPr>
-          <p:cNvPr id="25" name="Rounded Rectangle 24"/>
+              <a:defRPr sz="1300" b="0">
+                <a:solidFill>
+                  <a:srgbClr val="00D4FF"/>
+                </a:solidFill>
+                <a:latin typeface="Arial"/>
+              </a:defRPr>
+            </a:pPr>
+            <a:r>
+              <a:t>計分：30 秒·連擊·暴擊</a:t>
+            </a:r>
+          </a:p>
+        </p:txBody>
+      </p:sp>
+      <p:sp>
+        <p:nvSpPr>
+          <p:cNvPr id="15" name="Rounded Rectangle 14"/>
           <p:cNvSpPr/>
           <p:nvPr/>
         </p:nvSpPr>
         <p:spPr>
           <a:xfrm>
-            <a:off x="731520" y="5029200"/>
-            <a:ext cx="10515600" cy="1371600"/>
+            <a:off x="6217920" y="1645920"/>
+            <a:ext cx="5029200" cy="4572000"/>
           </a:xfrm>
           <a:prstGeom prst="roundRect">
             <a:avLst/>
@@ -6331,6 +6251,9 @@
           <a:solidFill>
             <a:srgbClr val="22223E"/>
           </a:solidFill>
+          <a:ln>
+            <a:noFill/>
+          </a:ln>
         </p:spPr>
         <p:style>
           <a:lnRef idx="1">
@@ -6356,14 +6279,57 @@
       </p:sp>
       <p:sp>
         <p:nvSpPr>
-          <p:cNvPr id="26" name="TextBox 25"/>
-          <p:cNvSpPr txBox="1"/>
-          <p:nvPr/>
-        </p:nvSpPr>
-        <p:spPr>
-          <a:xfrm>
-            <a:off x="1097280" y="5212080"/>
-            <a:ext cx="9144000" cy="365760"/>
+          <p:cNvPr id="16" name="Rectangle 15"/>
+          <p:cNvSpPr/>
+          <p:nvPr/>
+        </p:nvSpPr>
+        <p:spPr>
+          <a:xfrm>
+            <a:off x="6217920" y="1645920"/>
+            <a:ext cx="5029200" cy="63500"/>
+          </a:xfrm>
+          <a:prstGeom prst="rect">
+            <a:avLst/>
+          </a:prstGeom>
+          <a:solidFill>
+            <a:srgbClr val="FF88CC"/>
+          </a:solidFill>
+          <a:ln>
+            <a:noFill/>
+          </a:ln>
+        </p:spPr>
+        <p:style>
+          <a:lnRef idx="1">
+            <a:schemeClr val="accent1"/>
+          </a:lnRef>
+          <a:fillRef idx="3">
+            <a:schemeClr val="accent1"/>
+          </a:fillRef>
+          <a:effectRef idx="2">
+            <a:schemeClr val="accent1"/>
+          </a:effectRef>
+          <a:fontRef idx="minor">
+            <a:schemeClr val="lt1"/>
+          </a:fontRef>
+        </p:style>
+        <p:txBody>
+          <a:bodyPr rtlCol="0" anchor="ctr"/>
+          <a:lstStyle/>
+          <a:p>
+            <a:pPr algn="ctr"/>
+          </a:p>
+        </p:txBody>
+      </p:sp>
+      <p:sp>
+        <p:nvSpPr>
+          <p:cNvPr id="17" name="TextBox 16"/>
+          <p:cNvSpPr txBox="1"/>
+          <p:nvPr/>
+        </p:nvSpPr>
+        <p:spPr>
+          <a:xfrm>
+            <a:off x="6583680" y="1828800"/>
+            <a:ext cx="4389120" cy="365760"/>
           </a:xfrm>
           <a:prstGeom prst="rect">
             <a:avLst/>
@@ -6377,29 +6343,173 @@
           <a:lstStyle/>
           <a:p>
             <a:pPr algn="l">
-              <a:defRPr sz="1800" b="1">
-                <a:solidFill>
-                  <a:srgbClr val="FFD700"/>
-                </a:solidFill>
-                <a:latin typeface="Arial"/>
-              </a:defRPr>
-            </a:pPr>
-            <a:r>
-              <a:t>日後擴充</a:t>
-            </a:r>
-          </a:p>
-        </p:txBody>
-      </p:sp>
-      <p:sp>
-        <p:nvSpPr>
-          <p:cNvPr id="27" name="TextBox 26"/>
-          <p:cNvSpPr txBox="1"/>
-          <p:nvPr/>
-        </p:nvSpPr>
-        <p:spPr>
-          <a:xfrm>
-            <a:off x="1097280" y="5669280"/>
-            <a:ext cx="9144000" cy="365760"/>
+              <a:defRPr sz="2000" b="1">
+                <a:solidFill>
+                  <a:srgbClr val="FF88CC"/>
+                </a:solidFill>
+                <a:latin typeface="Arial"/>
+              </a:defRPr>
+            </a:pPr>
+            <a:r>
+              <a:t> 愛的抱抱</a:t>
+            </a:r>
+          </a:p>
+        </p:txBody>
+      </p:sp>
+      <p:sp>
+        <p:nvSpPr>
+          <p:cNvPr id="18" name="TextBox 17"/>
+          <p:cNvSpPr txBox="1"/>
+          <p:nvPr/>
+        </p:nvSpPr>
+        <p:spPr>
+          <a:xfrm>
+            <a:off x="6583680" y="2377440"/>
+            <a:ext cx="4389120" cy="365760"/>
+          </a:xfrm>
+          <a:prstGeom prst="rect">
+            <a:avLst/>
+          </a:prstGeom>
+          <a:noFill/>
+        </p:spPr>
+        <p:txBody>
+          <a:bodyPr wrap="square">
+            <a:spAutoFit/>
+          </a:bodyPr>
+          <a:lstStyle/>
+          <a:p>
+            <a:pPr algn="l">
+              <a:defRPr sz="1200" b="0">
+                <a:solidFill>
+                  <a:srgbClr val="FFBBDD"/>
+                </a:solidFill>
+                <a:latin typeface="Arial"/>
+              </a:defRPr>
+            </a:pPr>
+            <a:r>
+              <a:t>錫錫{名}個頭，煩惱全部走</a:t>
+            </a:r>
+          </a:p>
+        </p:txBody>
+      </p:sp>
+      <p:sp>
+        <p:nvSpPr>
+          <p:cNvPr id="19" name="TextBox 18"/>
+          <p:cNvSpPr txBox="1"/>
+          <p:nvPr/>
+        </p:nvSpPr>
+        <p:spPr>
+          <a:xfrm>
+            <a:off x="6583680" y="2834640"/>
+            <a:ext cx="4389120" cy="365760"/>
+          </a:xfrm>
+          <a:prstGeom prst="rect">
+            <a:avLst/>
+          </a:prstGeom>
+          <a:noFill/>
+        </p:spPr>
+        <p:txBody>
+          <a:bodyPr wrap="square">
+            <a:spAutoFit/>
+          </a:bodyPr>
+          <a:lstStyle/>
+          <a:p>
+            <a:pPr algn="l">
+              <a:defRPr sz="1200" b="0">
+                <a:solidFill>
+                  <a:srgbClr val="FFBBDD"/>
+                </a:solidFill>
+                <a:latin typeface="Arial"/>
+              </a:defRPr>
+            </a:pPr>
+            <a:r>
+              <a:t>錫錫{名}對手，好運跟你走</a:t>
+            </a:r>
+          </a:p>
+        </p:txBody>
+      </p:sp>
+      <p:sp>
+        <p:nvSpPr>
+          <p:cNvPr id="20" name="TextBox 19"/>
+          <p:cNvSpPr txBox="1"/>
+          <p:nvPr/>
+        </p:nvSpPr>
+        <p:spPr>
+          <a:xfrm>
+            <a:off x="6583680" y="3291840"/>
+            <a:ext cx="4389120" cy="365760"/>
+          </a:xfrm>
+          <a:prstGeom prst="rect">
+            <a:avLst/>
+          </a:prstGeom>
+          <a:noFill/>
+        </p:spPr>
+        <p:txBody>
+          <a:bodyPr wrap="square">
+            <a:spAutoFit/>
+          </a:bodyPr>
+          <a:lstStyle/>
+          <a:p>
+            <a:pPr algn="l">
+              <a:defRPr sz="1200" b="0">
+                <a:solidFill>
+                  <a:srgbClr val="FFBBDD"/>
+                </a:solidFill>
+                <a:latin typeface="Arial"/>
+              </a:defRPr>
+            </a:pPr>
+            <a:r>
+              <a:t>錫錫{名}一雙眼，日日都燦爛</a:t>
+            </a:r>
+          </a:p>
+        </p:txBody>
+      </p:sp>
+      <p:sp>
+        <p:nvSpPr>
+          <p:cNvPr id="21" name="TextBox 20"/>
+          <p:cNvSpPr txBox="1"/>
+          <p:nvPr/>
+        </p:nvSpPr>
+        <p:spPr>
+          <a:xfrm>
+            <a:off x="6583680" y="3749039"/>
+            <a:ext cx="4389120" cy="365760"/>
+          </a:xfrm>
+          <a:prstGeom prst="rect">
+            <a:avLst/>
+          </a:prstGeom>
+          <a:noFill/>
+        </p:spPr>
+        <p:txBody>
+          <a:bodyPr wrap="square">
+            <a:spAutoFit/>
+          </a:bodyPr>
+          <a:lstStyle/>
+          <a:p>
+            <a:pPr algn="l">
+              <a:defRPr sz="1200" b="0">
+                <a:solidFill>
+                  <a:srgbClr val="FFBBDD"/>
+                </a:solidFill>
+                <a:latin typeface="Arial"/>
+              </a:defRPr>
+            </a:pPr>
+            <a:r>
+              <a:t>錫錫{名}一對腳，路路都快樂</a:t>
+            </a:r>
+          </a:p>
+        </p:txBody>
+      </p:sp>
+      <p:sp>
+        <p:nvSpPr>
+          <p:cNvPr id="22" name="TextBox 21"/>
+          <p:cNvSpPr txBox="1"/>
+          <p:nvPr/>
+        </p:nvSpPr>
+        <p:spPr>
+          <a:xfrm>
+            <a:off x="6583680" y="4389120"/>
+            <a:ext cx="4389120" cy="274320"/>
           </a:xfrm>
           <a:prstGeom prst="rect">
             <a:avLst/>
@@ -6415,27 +6525,27 @@
             <a:pPr algn="l">
               <a:defRPr sz="1300" b="0">
                 <a:solidFill>
-                  <a:srgbClr val="E8E8E8"/>
-                </a:solidFill>
-                <a:latin typeface="Arial"/>
-              </a:defRPr>
-            </a:pPr>
-            <a:r>
-              <a:t>▸ MVP: 兩種系統預設口訣</a:t>
-            </a:r>
-          </a:p>
-        </p:txBody>
-      </p:sp>
-      <p:sp>
-        <p:nvSpPr>
-          <p:cNvPr id="28" name="TextBox 27"/>
-          <p:cNvSpPr txBox="1"/>
-          <p:nvPr/>
-        </p:nvSpPr>
-        <p:spPr>
-          <a:xfrm>
-            <a:off x="1097280" y="6035040"/>
-            <a:ext cx="9144000" cy="365760"/>
+                  <a:srgbClr val="FFBBDD"/>
+                </a:solidFill>
+                <a:latin typeface="Arial"/>
+              </a:defRPr>
+            </a:pPr>
+            <a:r>
+              <a:t>工具：羽毛·唇印·玫瑰</a:t>
+            </a:r>
+          </a:p>
+        </p:txBody>
+      </p:sp>
+      <p:sp>
+        <p:nvSpPr>
+          <p:cNvPr id="23" name="TextBox 22"/>
+          <p:cNvSpPr txBox="1"/>
+          <p:nvPr/>
+        </p:nvSpPr>
+        <p:spPr>
+          <a:xfrm>
+            <a:off x="6583680" y="4754880"/>
+            <a:ext cx="4389120" cy="274320"/>
           </a:xfrm>
           <a:prstGeom prst="rect">
             <a:avLst/>
@@ -6451,27 +6561,27 @@
             <a:pPr algn="l">
               <a:defRPr sz="1300" b="0">
                 <a:solidFill>
-                  <a:srgbClr val="E8E8E8"/>
-                </a:solidFill>
-                <a:latin typeface="Arial"/>
-              </a:defRPr>
-            </a:pPr>
-            <a:r>
-              <a:t>▸ Phase 2: 用戶自創 + 多語言（英文·泰文）</a:t>
-            </a:r>
-          </a:p>
-        </p:txBody>
-      </p:sp>
-      <p:sp>
-        <p:nvSpPr>
-          <p:cNvPr id="29" name="TextBox 28"/>
-          <p:cNvSpPr txBox="1"/>
-          <p:nvPr/>
-        </p:nvSpPr>
-        <p:spPr>
-          <a:xfrm>
-            <a:off x="1097280" y="6400800"/>
-            <a:ext cx="9144000" cy="365760"/>
+                  <a:srgbClr val="FFBBDD"/>
+                </a:solidFill>
+                <a:latin typeface="Arial"/>
+              </a:defRPr>
+            </a:pPr>
+            <a:r>
+              <a:t>音樂：柔和鈴聲/鋼琴 🔔</a:t>
+            </a:r>
+          </a:p>
+        </p:txBody>
+      </p:sp>
+      <p:sp>
+        <p:nvSpPr>
+          <p:cNvPr id="24" name="TextBox 23"/>
+          <p:cNvSpPr txBox="1"/>
+          <p:nvPr/>
+        </p:nvSpPr>
+        <p:spPr>
+          <a:xfrm>
+            <a:off x="6583680" y="5120640"/>
+            <a:ext cx="4389120" cy="274320"/>
           </a:xfrm>
           <a:prstGeom prst="rect">
             <a:avLst/>
@@ -6487,13 +6597,13 @@
             <a:pPr algn="l">
               <a:defRPr sz="1300" b="0">
                 <a:solidFill>
-                  <a:srgbClr val="E8E8E8"/>
-                </a:solidFill>
-                <a:latin typeface="Arial"/>
-              </a:defRPr>
-            </a:pPr>
-            <a:r>
-              <a:t>▸ 玩家可自由選取口訣庫</a:t>
+                  <a:srgbClr val="FFBBDD"/>
+                </a:solidFill>
+                <a:latin typeface="Arial"/>
+              </a:defRPr>
+            </a:pPr>
+            <a:r>
+              <a:t>計分：30 秒·心心·連擊</a:t>
             </a:r>
           </a:p>
         </p:txBody>
@@ -6541,6 +6651,9 @@
           <a:solidFill>
             <a:srgbClr val="00D4FF"/>
           </a:solidFill>
+          <a:ln>
+            <a:noFill/>
+          </a:ln>
         </p:spPr>
         <p:style>
           <a:lnRef idx="1">
@@ -6595,7 +6708,7 @@
               </a:defRPr>
             </a:pPr>
             <a:r>
-              <a:t> 音樂系統</a:t>
+              <a:t>資料庫 + 時程</a:t>
             </a:r>
           </a:p>
         </p:txBody>
@@ -6617,6 +6730,9 @@
           <a:solidFill>
             <a:srgbClr val="00D4FF"/>
           </a:solidFill>
+          <a:ln>
+            <a:noFill/>
+          </a:ln>
         </p:spPr>
         <p:style>
           <a:lnRef idx="1">
@@ -6649,7 +6765,7 @@
         <p:spPr>
           <a:xfrm>
             <a:off x="731520" y="1645920"/>
-            <a:ext cx="5029200" cy="4114800"/>
+            <a:ext cx="5029200" cy="4572000"/>
           </a:xfrm>
           <a:prstGeom prst="roundRect">
             <a:avLst/>
@@ -6657,6 +6773,9 @@
           <a:solidFill>
             <a:srgbClr val="22223E"/>
           </a:solidFill>
+          <a:ln>
+            <a:noFill/>
+          </a:ln>
         </p:spPr>
         <p:style>
           <a:lnRef idx="1">
@@ -6703,15 +6822,15 @@
           <a:lstStyle/>
           <a:p>
             <a:pPr algn="l">
-              <a:defRPr sz="2000" b="1">
-                <a:solidFill>
-                  <a:srgbClr val="FF4444"/>
-                </a:solidFill>
-                <a:latin typeface="Arial"/>
-              </a:defRPr>
-            </a:pPr>
-            <a:r>
-              <a:t> 打小人 — 重低音 🥁</a:t>
+              <a:defRPr sz="1800" b="1">
+                <a:solidFill>
+                  <a:srgbClr val="FFD700"/>
+                </a:solidFill>
+                <a:latin typeface="Arial"/>
+              </a:defRPr>
+            </a:pPr>
+            <a:r>
+              <a:t>DB 5 張 Table</a:t>
             </a:r>
           </a:p>
         </p:txBody>
@@ -6725,7 +6844,7 @@
         <p:spPr>
           <a:xfrm>
             <a:off x="1097280" y="2377440"/>
-            <a:ext cx="4389120" cy="457200"/>
+            <a:ext cx="1828800" cy="365760"/>
           </a:xfrm>
           <a:prstGeom prst="rect">
             <a:avLst/>
@@ -6739,7 +6858,43 @@
           <a:lstStyle/>
           <a:p>
             <a:pPr algn="l">
-              <a:defRPr sz="1300" b="0">
+              <a:defRPr sz="1300" b="1">
+                <a:solidFill>
+                  <a:srgbClr val="00D4FF"/>
+                </a:solidFill>
+                <a:latin typeface="Arial"/>
+              </a:defRPr>
+            </a:pPr>
+            <a:r>
+              <a:t>users</a:t>
+            </a:r>
+          </a:p>
+        </p:txBody>
+      </p:sp>
+      <p:sp>
+        <p:nvSpPr>
+          <p:cNvPr id="8" name="TextBox 7"/>
+          <p:cNvSpPr txBox="1"/>
+          <p:nvPr/>
+        </p:nvSpPr>
+        <p:spPr>
+          <a:xfrm>
+            <a:off x="3017520" y="2377440"/>
+            <a:ext cx="2743200" cy="365760"/>
+          </a:xfrm>
+          <a:prstGeom prst="rect">
+            <a:avLst/>
+          </a:prstGeom>
+          <a:noFill/>
+        </p:spPr>
+        <p:txBody>
+          <a:bodyPr wrap="square">
+            <a:spAutoFit/>
+          </a:bodyPr>
+          <a:lstStyle/>
+          <a:p>
+            <a:pPr algn="l">
+              <a:defRPr sz="1100" b="0">
                 <a:solidFill>
                   <a:srgbClr val="E8E8E8"/>
                 </a:solidFill>
@@ -6747,21 +6902,21 @@
               </a:defRPr>
             </a:pPr>
             <a:r>
-              <a:t>▸ 遊戲開始 → beats 啟動</a:t>
-            </a:r>
-          </a:p>
-        </p:txBody>
-      </p:sp>
-      <p:sp>
-        <p:nvSpPr>
-          <p:cNvPr id="8" name="TextBox 7"/>
-          <p:cNvSpPr txBox="1"/>
-          <p:nvPr/>
-        </p:nvSpPr>
-        <p:spPr>
-          <a:xfrm>
-            <a:off x="1097280" y="2926080"/>
-            <a:ext cx="4389120" cy="457200"/>
+              <a:t>id, username, password_hash</a:t>
+            </a:r>
+          </a:p>
+        </p:txBody>
+      </p:sp>
+      <p:sp>
+        <p:nvSpPr>
+          <p:cNvPr id="9" name="TextBox 8"/>
+          <p:cNvSpPr txBox="1"/>
+          <p:nvPr/>
+        </p:nvSpPr>
+        <p:spPr>
+          <a:xfrm>
+            <a:off x="1097280" y="2834640"/>
+            <a:ext cx="1828800" cy="365760"/>
           </a:xfrm>
           <a:prstGeom prst="rect">
             <a:avLst/>
@@ -6775,7 +6930,43 @@
           <a:lstStyle/>
           <a:p>
             <a:pPr algn="l">
-              <a:defRPr sz="1300" b="0">
+              <a:defRPr sz="1300" b="1">
+                <a:solidFill>
+                  <a:srgbClr val="00D4FF"/>
+                </a:solidFill>
+                <a:latin typeface="Arial"/>
+              </a:defRPr>
+            </a:pPr>
+            <a:r>
+              <a:t>game_sessions</a:t>
+            </a:r>
+          </a:p>
+        </p:txBody>
+      </p:sp>
+      <p:sp>
+        <p:nvSpPr>
+          <p:cNvPr id="10" name="TextBox 9"/>
+          <p:cNvSpPr txBox="1"/>
+          <p:nvPr/>
+        </p:nvSpPr>
+        <p:spPr>
+          <a:xfrm>
+            <a:off x="3017520" y="2834640"/>
+            <a:ext cx="2743200" cy="365760"/>
+          </a:xfrm>
+          <a:prstGeom prst="rect">
+            <a:avLst/>
+          </a:prstGeom>
+          <a:noFill/>
+        </p:spPr>
+        <p:txBody>
+          <a:bodyPr wrap="square">
+            <a:spAutoFit/>
+          </a:bodyPr>
+          <a:lstStyle/>
+          <a:p>
+            <a:pPr algn="l">
+              <a:defRPr sz="1100" b="0">
                 <a:solidFill>
                   <a:srgbClr val="E8E8E8"/>
                 </a:solidFill>
@@ -6783,21 +6974,21 @@
               </a:defRPr>
             </a:pPr>
             <a:r>
-              <a:t>▸ 每句口訣對應一個重拍</a:t>
-            </a:r>
-          </a:p>
-        </p:txBody>
-      </p:sp>
-      <p:sp>
-        <p:nvSpPr>
-          <p:cNvPr id="9" name="TextBox 8"/>
-          <p:cNvSpPr txBox="1"/>
-          <p:nvPr/>
-        </p:nvSpPr>
-        <p:spPr>
-          <a:xfrm>
-            <a:off x="1097280" y="3474720"/>
-            <a:ext cx="4389120" cy="457200"/>
+              <a:t>id, user_id, mode, score, result</a:t>
+            </a:r>
+          </a:p>
+        </p:txBody>
+      </p:sp>
+      <p:sp>
+        <p:nvSpPr>
+          <p:cNvPr id="11" name="TextBox 10"/>
+          <p:cNvSpPr txBox="1"/>
+          <p:nvPr/>
+        </p:nvSpPr>
+        <p:spPr>
+          <a:xfrm>
+            <a:off x="1097280" y="3291840"/>
+            <a:ext cx="1828800" cy="365760"/>
           </a:xfrm>
           <a:prstGeom prst="rect">
             <a:avLst/>
@@ -6811,7 +7002,43 @@
           <a:lstStyle/>
           <a:p>
             <a:pPr algn="l">
-              <a:defRPr sz="1300" b="0">
+              <a:defRPr sz="1300" b="1">
+                <a:solidFill>
+                  <a:srgbClr val="00D4FF"/>
+                </a:solidFill>
+                <a:latin typeface="Arial"/>
+              </a:defRPr>
+            </a:pPr>
+            <a:r>
+              <a:t>doll_names (新)</a:t>
+            </a:r>
+          </a:p>
+        </p:txBody>
+      </p:sp>
+      <p:sp>
+        <p:nvSpPr>
+          <p:cNvPr id="12" name="TextBox 11"/>
+          <p:cNvSpPr txBox="1"/>
+          <p:nvPr/>
+        </p:nvSpPr>
+        <p:spPr>
+          <a:xfrm>
+            <a:off x="3017520" y="3291840"/>
+            <a:ext cx="2743200" cy="365760"/>
+          </a:xfrm>
+          <a:prstGeom prst="rect">
+            <a:avLst/>
+          </a:prstGeom>
+          <a:noFill/>
+        </p:spPr>
+        <p:txBody>
+          <a:bodyPr wrap="square">
+            <a:spAutoFit/>
+          </a:bodyPr>
+          <a:lstStyle/>
+          <a:p>
+            <a:pPr algn="l">
+              <a:defRPr sz="1100" b="0">
                 <a:solidFill>
                   <a:srgbClr val="E8E8E8"/>
                 </a:solidFill>
@@ -6819,21 +7046,21 @@
               </a:defRPr>
             </a:pPr>
             <a:r>
-              <a:t>▸ OscillatorNode 低頻生成</a:t>
-            </a:r>
-          </a:p>
-        </p:txBody>
-      </p:sp>
-      <p:sp>
-        <p:nvSpPr>
-          <p:cNvPr id="10" name="TextBox 9"/>
-          <p:cNvSpPr txBox="1"/>
-          <p:nvPr/>
-        </p:nvSpPr>
-        <p:spPr>
-          <a:xfrm>
-            <a:off x="1097280" y="4023360"/>
-            <a:ext cx="4389120" cy="457200"/>
+              <a:t>id, user_id, doll_id, custom_name</a:t>
+            </a:r>
+          </a:p>
+        </p:txBody>
+      </p:sp>
+      <p:sp>
+        <p:nvSpPr>
+          <p:cNvPr id="13" name="TextBox 12"/>
+          <p:cNvSpPr txBox="1"/>
+          <p:nvPr/>
+        </p:nvSpPr>
+        <p:spPr>
+          <a:xfrm>
+            <a:off x="1097280" y="3749039"/>
+            <a:ext cx="1828800" cy="365760"/>
           </a:xfrm>
           <a:prstGeom prst="rect">
             <a:avLst/>
@@ -6847,7 +7074,43 @@
           <a:lstStyle/>
           <a:p>
             <a:pPr algn="l">
-              <a:defRPr sz="1300" b="0">
+              <a:defRPr sz="1300" b="1">
+                <a:solidFill>
+                  <a:srgbClr val="00D4FF"/>
+                </a:solidFill>
+                <a:latin typeface="Arial"/>
+              </a:defRPr>
+            </a:pPr>
+            <a:r>
+              <a:t>blessings</a:t>
+            </a:r>
+          </a:p>
+        </p:txBody>
+      </p:sp>
+      <p:sp>
+        <p:nvSpPr>
+          <p:cNvPr id="14" name="TextBox 13"/>
+          <p:cNvSpPr txBox="1"/>
+          <p:nvPr/>
+        </p:nvSpPr>
+        <p:spPr>
+          <a:xfrm>
+            <a:off x="3017520" y="3749039"/>
+            <a:ext cx="2743200" cy="365760"/>
+          </a:xfrm>
+          <a:prstGeom prst="rect">
+            <a:avLst/>
+          </a:prstGeom>
+          <a:noFill/>
+        </p:spPr>
+        <p:txBody>
+          <a:bodyPr wrap="square">
+            <a:spAutoFit/>
+          </a:bodyPr>
+          <a:lstStyle/>
+          <a:p>
+            <a:pPr algn="l">
+              <a:defRPr sz="1100" b="0">
                 <a:solidFill>
                   <a:srgbClr val="E8E8E8"/>
                 </a:solidFill>
@@ -6855,21 +7118,21 @@
               </a:defRPr>
             </a:pPr>
             <a:r>
-              <a:t>▸ 擊中 + 拍聲同步</a:t>
-            </a:r>
-          </a:p>
-        </p:txBody>
-      </p:sp>
-      <p:sp>
-        <p:nvSpPr>
-          <p:cNvPr id="11" name="TextBox 10"/>
-          <p:cNvSpPr txBox="1"/>
-          <p:nvPr/>
-        </p:nvSpPr>
-        <p:spPr>
-          <a:xfrm>
-            <a:off x="1097280" y="4572000"/>
-            <a:ext cx="4389120" cy="457200"/>
+              <a:t>id, user_id, message</a:t>
+            </a:r>
+          </a:p>
+        </p:txBody>
+      </p:sp>
+      <p:sp>
+        <p:nvSpPr>
+          <p:cNvPr id="15" name="TextBox 14"/>
+          <p:cNvSpPr txBox="1"/>
+          <p:nvPr/>
+        </p:nvSpPr>
+        <p:spPr>
+          <a:xfrm>
+            <a:off x="1097280" y="4206240"/>
+            <a:ext cx="1828800" cy="365760"/>
           </a:xfrm>
           <a:prstGeom prst="rect">
             <a:avLst/>
@@ -6883,7 +7146,43 @@
           <a:lstStyle/>
           <a:p>
             <a:pPr algn="l">
-              <a:defRPr sz="1300" b="0">
+              <a:defRPr sz="1300" b="1">
+                <a:solidFill>
+                  <a:srgbClr val="00D4FF"/>
+                </a:solidFill>
+                <a:latin typeface="Arial"/>
+              </a:defRPr>
+            </a:pPr>
+            <a:r>
+              <a:t>tools</a:t>
+            </a:r>
+          </a:p>
+        </p:txBody>
+      </p:sp>
+      <p:sp>
+        <p:nvSpPr>
+          <p:cNvPr id="16" name="TextBox 15"/>
+          <p:cNvSpPr txBox="1"/>
+          <p:nvPr/>
+        </p:nvSpPr>
+        <p:spPr>
+          <a:xfrm>
+            <a:off x="3017520" y="4206240"/>
+            <a:ext cx="2743200" cy="365760"/>
+          </a:xfrm>
+          <a:prstGeom prst="rect">
+            <a:avLst/>
+          </a:prstGeom>
+          <a:noFill/>
+        </p:spPr>
+        <p:txBody>
+          <a:bodyPr wrap="square">
+            <a:spAutoFit/>
+          </a:bodyPr>
+          <a:lstStyle/>
+          <a:p>
+            <a:pPr algn="l">
+              <a:defRPr sz="1100" b="0">
                 <a:solidFill>
                   <a:srgbClr val="E8E8E8"/>
                 </a:solidFill>
@@ -6891,21 +7190,21 @@
               </a:defRPr>
             </a:pPr>
             <a:r>
-              <a:t>▸ 失敗音效：低沉的 buzz</a:t>
-            </a:r>
-          </a:p>
-        </p:txBody>
-      </p:sp>
-      <p:sp>
-        <p:nvSpPr>
-          <p:cNvPr id="12" name="Rounded Rectangle 11"/>
+              <a:t>id, name, icon, mode, power</a:t>
+            </a:r>
+          </a:p>
+        </p:txBody>
+      </p:sp>
+      <p:sp>
+        <p:nvSpPr>
+          <p:cNvPr id="17" name="Rounded Rectangle 16"/>
           <p:cNvSpPr/>
           <p:nvPr/>
         </p:nvSpPr>
         <p:spPr>
           <a:xfrm>
             <a:off x="6217920" y="1645920"/>
-            <a:ext cx="5029200" cy="4114800"/>
+            <a:ext cx="5029200" cy="4572000"/>
           </a:xfrm>
           <a:prstGeom prst="roundRect">
             <a:avLst/>
@@ -6913,6 +7212,9 @@
           <a:solidFill>
             <a:srgbClr val="22223E"/>
           </a:solidFill>
+          <a:ln>
+            <a:noFill/>
+          </a:ln>
         </p:spPr>
         <p:style>
           <a:lnRef idx="1">
@@ -6938,7 +7240,7 @@
       </p:sp>
       <p:sp>
         <p:nvSpPr>
-          <p:cNvPr id="13" name="TextBox 12"/>
+          <p:cNvPr id="18" name="TextBox 17"/>
           <p:cNvSpPr txBox="1"/>
           <p:nvPr/>
         </p:nvSpPr>
@@ -6959,29 +7261,29 @@
           <a:lstStyle/>
           <a:p>
             <a:pPr algn="l">
-              <a:defRPr sz="2000" b="1">
-                <a:solidFill>
-                  <a:srgbClr val="FF88CC"/>
-                </a:solidFill>
-                <a:latin typeface="Arial"/>
-              </a:defRPr>
-            </a:pPr>
-            <a:r>
-              <a:t> 愛的抱抱 — 柔和 🔔</a:t>
-            </a:r>
-          </a:p>
-        </p:txBody>
-      </p:sp>
-      <p:sp>
-        <p:nvSpPr>
-          <p:cNvPr id="14" name="TextBox 13"/>
+              <a:defRPr sz="1800" b="1">
+                <a:solidFill>
+                  <a:srgbClr val="FFD700"/>
+                </a:solidFill>
+                <a:latin typeface="Arial"/>
+              </a:defRPr>
+            </a:pPr>
+            <a:r>
+              <a:t>時程 ~14-17 日</a:t>
+            </a:r>
+          </a:p>
+        </p:txBody>
+      </p:sp>
+      <p:sp>
+        <p:nvSpPr>
+          <p:cNvPr id="19" name="TextBox 18"/>
           <p:cNvSpPr txBox="1"/>
           <p:nvPr/>
         </p:nvSpPr>
         <p:spPr>
           <a:xfrm>
             <a:off x="6583680" y="2377440"/>
-            <a:ext cx="4389120" cy="457200"/>
+            <a:ext cx="2286000" cy="365760"/>
           </a:xfrm>
           <a:prstGeom prst="rect">
             <a:avLst/>
@@ -7003,21 +7305,57 @@
               </a:defRPr>
             </a:pPr>
             <a:r>
-              <a:t>▸ 遊戲開始 → 柔和 melody</a:t>
-            </a:r>
-          </a:p>
-        </p:txBody>
-      </p:sp>
-      <p:sp>
-        <p:nvSpPr>
-          <p:cNvPr id="15" name="TextBox 14"/>
-          <p:cNvSpPr txBox="1"/>
-          <p:nvPr/>
-        </p:nvSpPr>
-        <p:spPr>
-          <a:xfrm>
-            <a:off x="6583680" y="2926080"/>
-            <a:ext cx="4389120" cy="457200"/>
+              <a:t>Setup</a:t>
+            </a:r>
+          </a:p>
+        </p:txBody>
+      </p:sp>
+      <p:sp>
+        <p:nvSpPr>
+          <p:cNvPr id="20" name="TextBox 19"/>
+          <p:cNvSpPr txBox="1"/>
+          <p:nvPr/>
+        </p:nvSpPr>
+        <p:spPr>
+          <a:xfrm>
+            <a:off x="9144000" y="2377440"/>
+            <a:ext cx="1371600" cy="365760"/>
+          </a:xfrm>
+          <a:prstGeom prst="rect">
+            <a:avLst/>
+          </a:prstGeom>
+          <a:noFill/>
+        </p:spPr>
+        <p:txBody>
+          <a:bodyPr wrap="square">
+            <a:spAutoFit/>
+          </a:bodyPr>
+          <a:lstStyle/>
+          <a:p>
+            <a:pPr algn="l">
+              <a:defRPr sz="1300" b="1">
+                <a:solidFill>
+                  <a:srgbClr val="00D4FF"/>
+                </a:solidFill>
+                <a:latin typeface="Arial"/>
+              </a:defRPr>
+            </a:pPr>
+            <a:r>
+              <a:t>1-2日</a:t>
+            </a:r>
+          </a:p>
+        </p:txBody>
+      </p:sp>
+      <p:sp>
+        <p:nvSpPr>
+          <p:cNvPr id="21" name="TextBox 20"/>
+          <p:cNvSpPr txBox="1"/>
+          <p:nvPr/>
+        </p:nvSpPr>
+        <p:spPr>
+          <a:xfrm>
+            <a:off x="6583680" y="2880360"/>
+            <a:ext cx="2286000" cy="365760"/>
           </a:xfrm>
           <a:prstGeom prst="rect">
             <a:avLst/>
@@ -7039,21 +7377,57 @@
               </a:defRPr>
             </a:pPr>
             <a:r>
-              <a:t>▸ 每句口訣對應上行音階</a:t>
-            </a:r>
-          </a:p>
-        </p:txBody>
-      </p:sp>
-      <p:sp>
-        <p:nvSpPr>
-          <p:cNvPr id="16" name="TextBox 15"/>
-          <p:cNvSpPr txBox="1"/>
-          <p:nvPr/>
-        </p:nvSpPr>
-        <p:spPr>
-          <a:xfrm>
-            <a:off x="6583680" y="3474720"/>
-            <a:ext cx="4389120" cy="457200"/>
+              <a:t>Auth</a:t>
+            </a:r>
+          </a:p>
+        </p:txBody>
+      </p:sp>
+      <p:sp>
+        <p:nvSpPr>
+          <p:cNvPr id="22" name="TextBox 21"/>
+          <p:cNvSpPr txBox="1"/>
+          <p:nvPr/>
+        </p:nvSpPr>
+        <p:spPr>
+          <a:xfrm>
+            <a:off x="9144000" y="2880360"/>
+            <a:ext cx="1371600" cy="365760"/>
+          </a:xfrm>
+          <a:prstGeom prst="rect">
+            <a:avLst/>
+          </a:prstGeom>
+          <a:noFill/>
+        </p:spPr>
+        <p:txBody>
+          <a:bodyPr wrap="square">
+            <a:spAutoFit/>
+          </a:bodyPr>
+          <a:lstStyle/>
+          <a:p>
+            <a:pPr algn="l">
+              <a:defRPr sz="1300" b="1">
+                <a:solidFill>
+                  <a:srgbClr val="00D4FF"/>
+                </a:solidFill>
+                <a:latin typeface="Arial"/>
+              </a:defRPr>
+            </a:pPr>
+            <a:r>
+              <a:t>1-2日</a:t>
+            </a:r>
+          </a:p>
+        </p:txBody>
+      </p:sp>
+      <p:sp>
+        <p:nvSpPr>
+          <p:cNvPr id="23" name="TextBox 22"/>
+          <p:cNvSpPr txBox="1"/>
+          <p:nvPr/>
+        </p:nvSpPr>
+        <p:spPr>
+          <a:xfrm>
+            <a:off x="6583680" y="3383280"/>
+            <a:ext cx="2286000" cy="365760"/>
           </a:xfrm>
           <a:prstGeom prst="rect">
             <a:avLst/>
@@ -7075,21 +7449,57 @@
               </a:defRPr>
             </a:pPr>
             <a:r>
-              <a:t>▸ OscillatorNode 高頻生成</a:t>
-            </a:r>
-          </a:p>
-        </p:txBody>
-      </p:sp>
-      <p:sp>
-        <p:nvSpPr>
-          <p:cNvPr id="17" name="TextBox 16"/>
-          <p:cNvSpPr txBox="1"/>
-          <p:nvPr/>
-        </p:nvSpPr>
-        <p:spPr>
-          <a:xfrm>
-            <a:off x="6583680" y="4023360"/>
-            <a:ext cx="4389120" cy="457200"/>
+              <a:t>Splash v3</a:t>
+            </a:r>
+          </a:p>
+        </p:txBody>
+      </p:sp>
+      <p:sp>
+        <p:nvSpPr>
+          <p:cNvPr id="24" name="TextBox 23"/>
+          <p:cNvSpPr txBox="1"/>
+          <p:nvPr/>
+        </p:nvSpPr>
+        <p:spPr>
+          <a:xfrm>
+            <a:off x="9144000" y="3383280"/>
+            <a:ext cx="1371600" cy="365760"/>
+          </a:xfrm>
+          <a:prstGeom prst="rect">
+            <a:avLst/>
+          </a:prstGeom>
+          <a:noFill/>
+        </p:spPr>
+        <p:txBody>
+          <a:bodyPr wrap="square">
+            <a:spAutoFit/>
+          </a:bodyPr>
+          <a:lstStyle/>
+          <a:p>
+            <a:pPr algn="l">
+              <a:defRPr sz="1300" b="1">
+                <a:solidFill>
+                  <a:srgbClr val="00D4FF"/>
+                </a:solidFill>
+                <a:latin typeface="Arial"/>
+              </a:defRPr>
+            </a:pPr>
+            <a:r>
+              <a:t>2日</a:t>
+            </a:r>
+          </a:p>
+        </p:txBody>
+      </p:sp>
+      <p:sp>
+        <p:nvSpPr>
+          <p:cNvPr id="25" name="TextBox 24"/>
+          <p:cNvSpPr txBox="1"/>
+          <p:nvPr/>
+        </p:nvSpPr>
+        <p:spPr>
+          <a:xfrm>
+            <a:off x="6583680" y="3886200"/>
+            <a:ext cx="2286000" cy="365760"/>
           </a:xfrm>
           <a:prstGeom prst="rect">
             <a:avLst/>
@@ -7111,21 +7521,57 @@
               </a:defRPr>
             </a:pPr>
             <a:r>
-              <a:t>▸ 擊中 + 心心跳聲</a:t>
-            </a:r>
-          </a:p>
-        </p:txBody>
-      </p:sp>
-      <p:sp>
-        <p:nvSpPr>
-          <p:cNvPr id="18" name="TextBox 17"/>
-          <p:cNvSpPr txBox="1"/>
-          <p:nvPr/>
-        </p:nvSpPr>
-        <p:spPr>
-          <a:xfrm>
-            <a:off x="6583680" y="4572000"/>
-            <a:ext cx="4389120" cy="457200"/>
+              <a:t>主頁</a:t>
+            </a:r>
+          </a:p>
+        </p:txBody>
+      </p:sp>
+      <p:sp>
+        <p:nvSpPr>
+          <p:cNvPr id="26" name="TextBox 25"/>
+          <p:cNvSpPr txBox="1"/>
+          <p:nvPr/>
+        </p:nvSpPr>
+        <p:spPr>
+          <a:xfrm>
+            <a:off x="9144000" y="3886200"/>
+            <a:ext cx="1371600" cy="365760"/>
+          </a:xfrm>
+          <a:prstGeom prst="rect">
+            <a:avLst/>
+          </a:prstGeom>
+          <a:noFill/>
+        </p:spPr>
+        <p:txBody>
+          <a:bodyPr wrap="square">
+            <a:spAutoFit/>
+          </a:bodyPr>
+          <a:lstStyle/>
+          <a:p>
+            <a:pPr algn="l">
+              <a:defRPr sz="1300" b="1">
+                <a:solidFill>
+                  <a:srgbClr val="00D4FF"/>
+                </a:solidFill>
+                <a:latin typeface="Arial"/>
+              </a:defRPr>
+            </a:pPr>
+            <a:r>
+              <a:t>1日</a:t>
+            </a:r>
+          </a:p>
+        </p:txBody>
+      </p:sp>
+      <p:sp>
+        <p:nvSpPr>
+          <p:cNvPr id="27" name="TextBox 26"/>
+          <p:cNvSpPr txBox="1"/>
+          <p:nvPr/>
+        </p:nvSpPr>
+        <p:spPr>
+          <a:xfrm>
+            <a:off x="6583680" y="4389120"/>
+            <a:ext cx="2286000" cy="365760"/>
           </a:xfrm>
           <a:prstGeom prst="rect">
             <a:avLst/>
@@ -7147,43 +7593,259 @@
               </a:defRPr>
             </a:pPr>
             <a:r>
-              <a:t>▸ 失敗音效：溫柔的 buzz</a:t>
-            </a:r>
-          </a:p>
-        </p:txBody>
-      </p:sp>
-      <p:sp>
-        <p:nvSpPr>
-          <p:cNvPr id="19" name="TextBox 18"/>
-          <p:cNvSpPr txBox="1"/>
-          <p:nvPr/>
-        </p:nvSpPr>
-        <p:spPr>
-          <a:xfrm>
-            <a:off x="1097280" y="5943600"/>
-            <a:ext cx="9144000" cy="457200"/>
-          </a:xfrm>
-          <a:prstGeom prst="rect">
-            <a:avLst/>
-          </a:prstGeom>
-          <a:noFill/>
-        </p:spPr>
-        <p:txBody>
-          <a:bodyPr wrap="square">
-            <a:spAutoFit/>
-          </a:bodyPr>
-          <a:lstStyle/>
-          <a:p>
-            <a:pPr algn="ctr">
-              <a:defRPr sz="1400" b="1">
-                <a:solidFill>
-                  <a:srgbClr val="FFD700"/>
-                </a:solidFill>
-                <a:latin typeface="Arial"/>
-              </a:defRPr>
-            </a:pPr>
-            <a:r>
-              <a:t>Web Audio API · 零外部音檔 · Browser 原生生成 · 玩家設定可開關</a:t>
+              <a:t>打小人</a:t>
+            </a:r>
+          </a:p>
+        </p:txBody>
+      </p:sp>
+      <p:sp>
+        <p:nvSpPr>
+          <p:cNvPr id="28" name="TextBox 27"/>
+          <p:cNvSpPr txBox="1"/>
+          <p:nvPr/>
+        </p:nvSpPr>
+        <p:spPr>
+          <a:xfrm>
+            <a:off x="9144000" y="4389120"/>
+            <a:ext cx="1371600" cy="365760"/>
+          </a:xfrm>
+          <a:prstGeom prst="rect">
+            <a:avLst/>
+          </a:prstGeom>
+          <a:noFill/>
+        </p:spPr>
+        <p:txBody>
+          <a:bodyPr wrap="square">
+            <a:spAutoFit/>
+          </a:bodyPr>
+          <a:lstStyle/>
+          <a:p>
+            <a:pPr algn="l">
+              <a:defRPr sz="1300" b="1">
+                <a:solidFill>
+                  <a:srgbClr val="00D4FF"/>
+                </a:solidFill>
+                <a:latin typeface="Arial"/>
+              </a:defRPr>
+            </a:pPr>
+            <a:r>
+              <a:t>4日</a:t>
+            </a:r>
+          </a:p>
+        </p:txBody>
+      </p:sp>
+      <p:sp>
+        <p:nvSpPr>
+          <p:cNvPr id="29" name="TextBox 28"/>
+          <p:cNvSpPr txBox="1"/>
+          <p:nvPr/>
+        </p:nvSpPr>
+        <p:spPr>
+          <a:xfrm>
+            <a:off x="6583680" y="4892040"/>
+            <a:ext cx="2286000" cy="365760"/>
+          </a:xfrm>
+          <a:prstGeom prst="rect">
+            <a:avLst/>
+          </a:prstGeom>
+          <a:noFill/>
+        </p:spPr>
+        <p:txBody>
+          <a:bodyPr wrap="square">
+            <a:spAutoFit/>
+          </a:bodyPr>
+          <a:lstStyle/>
+          <a:p>
+            <a:pPr algn="l">
+              <a:defRPr sz="1300" b="0">
+                <a:solidFill>
+                  <a:srgbClr val="E8E8E8"/>
+                </a:solidFill>
+                <a:latin typeface="Arial"/>
+              </a:defRPr>
+            </a:pPr>
+            <a:r>
+              <a:t>愛的抱抱</a:t>
+            </a:r>
+          </a:p>
+        </p:txBody>
+      </p:sp>
+      <p:sp>
+        <p:nvSpPr>
+          <p:cNvPr id="30" name="TextBox 29"/>
+          <p:cNvSpPr txBox="1"/>
+          <p:nvPr/>
+        </p:nvSpPr>
+        <p:spPr>
+          <a:xfrm>
+            <a:off x="9144000" y="4892040"/>
+            <a:ext cx="1371600" cy="365760"/>
+          </a:xfrm>
+          <a:prstGeom prst="rect">
+            <a:avLst/>
+          </a:prstGeom>
+          <a:noFill/>
+        </p:spPr>
+        <p:txBody>
+          <a:bodyPr wrap="square">
+            <a:spAutoFit/>
+          </a:bodyPr>
+          <a:lstStyle/>
+          <a:p>
+            <a:pPr algn="l">
+              <a:defRPr sz="1300" b="1">
+                <a:solidFill>
+                  <a:srgbClr val="00D4FF"/>
+                </a:solidFill>
+                <a:latin typeface="Arial"/>
+              </a:defRPr>
+            </a:pPr>
+            <a:r>
+              <a:t>2日</a:t>
+            </a:r>
+          </a:p>
+        </p:txBody>
+      </p:sp>
+      <p:sp>
+        <p:nvSpPr>
+          <p:cNvPr id="31" name="TextBox 30"/>
+          <p:cNvSpPr txBox="1"/>
+          <p:nvPr/>
+        </p:nvSpPr>
+        <p:spPr>
+          <a:xfrm>
+            <a:off x="6583680" y="5394960"/>
+            <a:ext cx="2286000" cy="365760"/>
+          </a:xfrm>
+          <a:prstGeom prst="rect">
+            <a:avLst/>
+          </a:prstGeom>
+          <a:noFill/>
+        </p:spPr>
+        <p:txBody>
+          <a:bodyPr wrap="square">
+            <a:spAutoFit/>
+          </a:bodyPr>
+          <a:lstStyle/>
+          <a:p>
+            <a:pPr algn="l">
+              <a:defRPr sz="1300" b="0">
+                <a:solidFill>
+                  <a:srgbClr val="E8E8E8"/>
+                </a:solidFill>
+                <a:latin typeface="Arial"/>
+              </a:defRPr>
+            </a:pPr>
+            <a:r>
+              <a:t>音樂+命名</a:t>
+            </a:r>
+          </a:p>
+        </p:txBody>
+      </p:sp>
+      <p:sp>
+        <p:nvSpPr>
+          <p:cNvPr id="32" name="TextBox 31"/>
+          <p:cNvSpPr txBox="1"/>
+          <p:nvPr/>
+        </p:nvSpPr>
+        <p:spPr>
+          <a:xfrm>
+            <a:off x="9144000" y="5394960"/>
+            <a:ext cx="1371600" cy="365760"/>
+          </a:xfrm>
+          <a:prstGeom prst="rect">
+            <a:avLst/>
+          </a:prstGeom>
+          <a:noFill/>
+        </p:spPr>
+        <p:txBody>
+          <a:bodyPr wrap="square">
+            <a:spAutoFit/>
+          </a:bodyPr>
+          <a:lstStyle/>
+          <a:p>
+            <a:pPr algn="l">
+              <a:defRPr sz="1300" b="1">
+                <a:solidFill>
+                  <a:srgbClr val="00D4FF"/>
+                </a:solidFill>
+                <a:latin typeface="Arial"/>
+              </a:defRPr>
+            </a:pPr>
+            <a:r>
+              <a:t>1日</a:t>
+            </a:r>
+          </a:p>
+        </p:txBody>
+      </p:sp>
+      <p:sp>
+        <p:nvSpPr>
+          <p:cNvPr id="33" name="TextBox 32"/>
+          <p:cNvSpPr txBox="1"/>
+          <p:nvPr/>
+        </p:nvSpPr>
+        <p:spPr>
+          <a:xfrm>
+            <a:off x="6583680" y="5897880"/>
+            <a:ext cx="2286000" cy="365760"/>
+          </a:xfrm>
+          <a:prstGeom prst="rect">
+            <a:avLst/>
+          </a:prstGeom>
+          <a:noFill/>
+        </p:spPr>
+        <p:txBody>
+          <a:bodyPr wrap="square">
+            <a:spAutoFit/>
+          </a:bodyPr>
+          <a:lstStyle/>
+          <a:p>
+            <a:pPr algn="l">
+              <a:defRPr sz="1300" b="0">
+                <a:solidFill>
+                  <a:srgbClr val="E8E8E8"/>
+                </a:solidFill>
+                <a:latin typeface="Arial"/>
+              </a:defRPr>
+            </a:pPr>
+            <a:r>
+              <a:t>測試</a:t>
+            </a:r>
+          </a:p>
+        </p:txBody>
+      </p:sp>
+      <p:sp>
+        <p:nvSpPr>
+          <p:cNvPr id="34" name="TextBox 33"/>
+          <p:cNvSpPr txBox="1"/>
+          <p:nvPr/>
+        </p:nvSpPr>
+        <p:spPr>
+          <a:xfrm>
+            <a:off x="9144000" y="5897880"/>
+            <a:ext cx="1371600" cy="365760"/>
+          </a:xfrm>
+          <a:prstGeom prst="rect">
+            <a:avLst/>
+          </a:prstGeom>
+          <a:noFill/>
+        </p:spPr>
+        <p:txBody>
+          <a:bodyPr wrap="square">
+            <a:spAutoFit/>
+          </a:bodyPr>
+          <a:lstStyle/>
+          <a:p>
+            <a:pPr algn="l">
+              <a:defRPr sz="1300" b="1">
+                <a:solidFill>
+                  <a:srgbClr val="00D4FF"/>
+                </a:solidFill>
+                <a:latin typeface="Arial"/>
+              </a:defRPr>
+            </a:pPr>
+            <a:r>
+              <a:t>2日</a:t>
             </a:r>
           </a:p>
         </p:txBody>
@@ -7222,8 +7884,8 @@
         </p:nvSpPr>
         <p:spPr>
           <a:xfrm>
-            <a:off x="0" y="274320"/>
-            <a:ext cx="12191695" cy="50800"/>
+            <a:off x="0" y="0"/>
+            <a:ext cx="12191695" cy="73152"/>
           </a:xfrm>
           <a:prstGeom prst="rect">
             <a:avLst/>
@@ -7231,6 +7893,9 @@
           <a:solidFill>
             <a:srgbClr val="00D4FF"/>
           </a:solidFill>
+          <a:ln>
+            <a:noFill/>
+          </a:ln>
         </p:spPr>
         <p:style>
           <a:lnRef idx="1">
@@ -7262,22 +7927,22 @@
         </p:nvSpPr>
         <p:spPr>
           <a:xfrm>
-            <a:off x="731520" y="457200"/>
-            <a:ext cx="7315200" cy="731520"/>
-          </a:xfrm>
-          <a:prstGeom prst="rect">
-            <a:avLst/>
-          </a:prstGeom>
-          <a:noFill/>
-        </p:spPr>
-        <p:txBody>
-          <a:bodyPr wrap="square">
-            <a:spAutoFit/>
-          </a:bodyPr>
-          <a:lstStyle/>
-          <a:p>
-            <a:pPr algn="l">
-              <a:defRPr sz="3600" b="1">
+            <a:off x="914400" y="1371600"/>
+            <a:ext cx="10058400" cy="1371600"/>
+          </a:xfrm>
+          <a:prstGeom prst="rect">
+            <a:avLst/>
+          </a:prstGeom>
+          <a:noFill/>
+        </p:spPr>
+        <p:txBody>
+          <a:bodyPr wrap="square">
+            <a:spAutoFit/>
+          </a:bodyPr>
+          <a:lstStyle/>
+          <a:p>
+            <a:pPr algn="ctr">
+              <a:defRPr sz="4800" b="1">
                 <a:solidFill>
                   <a:srgbClr val="FFFFFF"/>
                 </a:solidFill>
@@ -7285,28 +7950,67 @@
               </a:defRPr>
             </a:pPr>
             <a:r>
-              <a:t> Splash 動畫  v2</a:t>
-            </a:r>
-          </a:p>
-        </p:txBody>
-      </p:sp>
-      <p:sp>
-        <p:nvSpPr>
-          <p:cNvPr id="4" name="Rectangle 3"/>
+              <a:t> 準備開工  v3</a:t>
+            </a:r>
+          </a:p>
+        </p:txBody>
+      </p:sp>
+      <p:sp>
+        <p:nvSpPr>
+          <p:cNvPr id="4" name="TextBox 3"/>
+          <p:cNvSpPr txBox="1"/>
+          <p:nvPr/>
+        </p:nvSpPr>
+        <p:spPr>
+          <a:xfrm>
+            <a:off x="914400" y="2926080"/>
+            <a:ext cx="10058400" cy="731520"/>
+          </a:xfrm>
+          <a:prstGeom prst="rect">
+            <a:avLst/>
+          </a:prstGeom>
+          <a:noFill/>
+        </p:spPr>
+        <p:txBody>
+          <a:bodyPr wrap="square">
+            <a:spAutoFit/>
+          </a:bodyPr>
+          <a:lstStyle/>
+          <a:p>
+            <a:pPr algn="ctr">
+              <a:defRPr sz="2400" b="0">
+                <a:solidFill>
+                  <a:srgbClr val="00D4FF"/>
+                </a:solidFill>
+                <a:latin typeface="Arial"/>
+              </a:defRPr>
+            </a:pPr>
+            <a:r>
+              <a:t>口訣 · 音樂 · 命名 · 一打一抱</a:t>
+            </a:r>
+          </a:p>
+        </p:txBody>
+      </p:sp>
+      <p:sp>
+        <p:nvSpPr>
+          <p:cNvPr id="5" name="Rectangle 4"/>
           <p:cNvSpPr/>
           <p:nvPr/>
         </p:nvSpPr>
         <p:spPr>
           <a:xfrm>
-            <a:off x="731520" y="1188720"/>
-            <a:ext cx="2286000" cy="38100"/>
+            <a:off x="4572000" y="3931920"/>
+            <a:ext cx="2743200" cy="25400"/>
           </a:xfrm>
           <a:prstGeom prst="rect">
             <a:avLst/>
           </a:prstGeom>
           <a:solidFill>
-            <a:srgbClr val="00D4FF"/>
+            <a:srgbClr val="FFD700"/>
           </a:solidFill>
+          <a:ln>
+            <a:noFill/>
+          </a:ln>
         </p:spPr>
         <p:style>
           <a:lnRef idx="1">
@@ -7332,3332 +8036,6 @@
       </p:sp>
       <p:sp>
         <p:nvSpPr>
-          <p:cNvPr id="5" name="Rounded Rectangle 4"/>
-          <p:cNvSpPr/>
-          <p:nvPr/>
-        </p:nvSpPr>
-        <p:spPr>
-          <a:xfrm>
-            <a:off x="731520" y="1645920"/>
-            <a:ext cx="10515600" cy="4572000"/>
-          </a:xfrm>
-          <a:prstGeom prst="roundRect">
-            <a:avLst/>
-          </a:prstGeom>
-          <a:solidFill>
-            <a:srgbClr val="22223E"/>
-          </a:solidFill>
-        </p:spPr>
-        <p:style>
-          <a:lnRef idx="1">
-            <a:schemeClr val="accent1"/>
-          </a:lnRef>
-          <a:fillRef idx="3">
-            <a:schemeClr val="accent1"/>
-          </a:fillRef>
-          <a:effectRef idx="2">
-            <a:schemeClr val="accent1"/>
-          </a:effectRef>
-          <a:fontRef idx="minor">
-            <a:schemeClr val="lt1"/>
-          </a:fontRef>
-        </p:style>
-        <p:txBody>
-          <a:bodyPr rtlCol="0" anchor="ctr"/>
-          <a:lstStyle/>
-          <a:p>
-            <a:pPr algn="ctr"/>
-          </a:p>
-        </p:txBody>
-      </p:sp>
-      <p:sp>
-        <p:nvSpPr>
-          <p:cNvPr id="6" name="TextBox 5"/>
-          <p:cNvSpPr txBox="1"/>
-          <p:nvPr/>
-        </p:nvSpPr>
-        <p:spPr>
-          <a:xfrm>
-            <a:off x="1097280" y="1828800"/>
-            <a:ext cx="9144000" cy="457200"/>
-          </a:xfrm>
-          <a:prstGeom prst="rect">
-            <a:avLst/>
-          </a:prstGeom>
-          <a:noFill/>
-        </p:spPr>
-        <p:txBody>
-          <a:bodyPr wrap="square">
-            <a:spAutoFit/>
-          </a:bodyPr>
-          <a:lstStyle/>
-          <a:p>
-            <a:pPr algn="l">
-              <a:defRPr sz="2000" b="1">
-                <a:solidFill>
-                  <a:srgbClr val="FFD700"/>
-                </a:solidFill>
-                <a:latin typeface="Arial"/>
-              </a:defRPr>
-            </a:pPr>
-            <a:r>
-              <a:t>配合口訣 — 片長 ~12 秒</a:t>
-            </a:r>
-          </a:p>
-        </p:txBody>
-      </p:sp>
-      <p:sp>
-        <p:nvSpPr>
-          <p:cNvPr id="7" name="TextBox 6"/>
-          <p:cNvSpPr txBox="1"/>
-          <p:nvPr/>
-        </p:nvSpPr>
-        <p:spPr>
-          <a:xfrm>
-            <a:off x="1097280" y="2560320"/>
-            <a:ext cx="1371600" cy="274320"/>
-          </a:xfrm>
-          <a:prstGeom prst="rect">
-            <a:avLst/>
-          </a:prstGeom>
-          <a:noFill/>
-        </p:spPr>
-        <p:txBody>
-          <a:bodyPr wrap="square">
-            <a:spAutoFit/>
-          </a:bodyPr>
-          <a:lstStyle/>
-          <a:p>
-            <a:pPr algn="l">
-              <a:defRPr sz="1300" b="1">
-                <a:solidFill>
-                  <a:srgbClr val="00D4FF"/>
-                </a:solidFill>
-                <a:latin typeface="Arial"/>
-              </a:defRPr>
-            </a:pPr>
-            <a:r>
-              <a:t>0-1.5s</a:t>
-            </a:r>
-          </a:p>
-        </p:txBody>
-      </p:sp>
-      <p:sp>
-        <p:nvSpPr>
-          <p:cNvPr id="8" name="TextBox 7"/>
-          <p:cNvSpPr txBox="1"/>
-          <p:nvPr/>
-        </p:nvSpPr>
-        <p:spPr>
-          <a:xfrm>
-            <a:off x="2560320" y="2560320"/>
-            <a:ext cx="2743200" cy="274320"/>
-          </a:xfrm>
-          <a:prstGeom prst="rect">
-            <a:avLst/>
-          </a:prstGeom>
-          <a:noFill/>
-        </p:spPr>
-        <p:txBody>
-          <a:bodyPr wrap="square">
-            <a:spAutoFit/>
-          </a:bodyPr>
-          <a:lstStyle/>
-          <a:p>
-            <a:pPr algn="l">
-              <a:defRPr sz="1400" b="1">
-                <a:solidFill>
-                  <a:srgbClr val="FFD700"/>
-                </a:solidFill>
-                <a:latin typeface="Arial"/>
-              </a:defRPr>
-            </a:pPr>
-            <a:r>
-              <a:t>⚡ 閃電劃過</a:t>
-            </a:r>
-          </a:p>
-        </p:txBody>
-      </p:sp>
-      <p:sp>
-        <p:nvSpPr>
-          <p:cNvPr id="9" name="TextBox 8"/>
-          <p:cNvSpPr txBox="1"/>
-          <p:nvPr/>
-        </p:nvSpPr>
-        <p:spPr>
-          <a:xfrm>
-            <a:off x="5486400" y="2560320"/>
-            <a:ext cx="4572000" cy="274320"/>
-          </a:xfrm>
-          <a:prstGeom prst="rect">
-            <a:avLst/>
-          </a:prstGeom>
-          <a:noFill/>
-        </p:spPr>
-        <p:txBody>
-          <a:bodyPr wrap="square">
-            <a:spAutoFit/>
-          </a:bodyPr>
-          <a:lstStyle/>
-          <a:p>
-            <a:pPr algn="l">
-              <a:defRPr sz="1300" b="0">
-                <a:solidFill>
-                  <a:srgbClr val="E8E8E8"/>
-                </a:solidFill>
-                <a:latin typeface="Arial"/>
-              </a:defRPr>
-            </a:pPr>
-            <a:r>
-              <a:t>—</a:t>
-            </a:r>
-          </a:p>
-        </p:txBody>
-      </p:sp>
-      <p:sp>
-        <p:nvSpPr>
-          <p:cNvPr id="10" name="Rectangle 9"/>
-          <p:cNvSpPr/>
-          <p:nvPr/>
-        </p:nvSpPr>
-        <p:spPr>
-          <a:xfrm>
-            <a:off x="1097280" y="2926080"/>
-            <a:ext cx="9601200" cy="12700"/>
-          </a:xfrm>
-          <a:prstGeom prst="rect">
-            <a:avLst/>
-          </a:prstGeom>
-          <a:solidFill>
-            <a:srgbClr val="333355"/>
-          </a:solidFill>
-        </p:spPr>
-        <p:style>
-          <a:lnRef idx="1">
-            <a:schemeClr val="accent1"/>
-          </a:lnRef>
-          <a:fillRef idx="3">
-            <a:schemeClr val="accent1"/>
-          </a:fillRef>
-          <a:effectRef idx="2">
-            <a:schemeClr val="accent1"/>
-          </a:effectRef>
-          <a:fontRef idx="minor">
-            <a:schemeClr val="lt1"/>
-          </a:fontRef>
-        </p:style>
-        <p:txBody>
-          <a:bodyPr rtlCol="0" anchor="ctr"/>
-          <a:lstStyle/>
-          <a:p>
-            <a:pPr algn="ctr"/>
-          </a:p>
-        </p:txBody>
-      </p:sp>
-      <p:sp>
-        <p:nvSpPr>
-          <p:cNvPr id="11" name="TextBox 10"/>
-          <p:cNvSpPr txBox="1"/>
-          <p:nvPr/>
-        </p:nvSpPr>
-        <p:spPr>
-          <a:xfrm>
-            <a:off x="1097280" y="3154679"/>
-            <a:ext cx="1371600" cy="274320"/>
-          </a:xfrm>
-          <a:prstGeom prst="rect">
-            <a:avLst/>
-          </a:prstGeom>
-          <a:noFill/>
-        </p:spPr>
-        <p:txBody>
-          <a:bodyPr wrap="square">
-            <a:spAutoFit/>
-          </a:bodyPr>
-          <a:lstStyle/>
-          <a:p>
-            <a:pPr algn="l">
-              <a:defRPr sz="1300" b="1">
-                <a:solidFill>
-                  <a:srgbClr val="00D4FF"/>
-                </a:solidFill>
-                <a:latin typeface="Arial"/>
-              </a:defRPr>
-            </a:pPr>
-            <a:r>
-              <a:t>1.5-3s</a:t>
-            </a:r>
-          </a:p>
-        </p:txBody>
-      </p:sp>
-      <p:sp>
-        <p:nvSpPr>
-          <p:cNvPr id="12" name="TextBox 11"/>
-          <p:cNvSpPr txBox="1"/>
-          <p:nvPr/>
-        </p:nvSpPr>
-        <p:spPr>
-          <a:xfrm>
-            <a:off x="2560320" y="3154679"/>
-            <a:ext cx="2743200" cy="274320"/>
-          </a:xfrm>
-          <a:prstGeom prst="rect">
-            <a:avLst/>
-          </a:prstGeom>
-          <a:noFill/>
-        </p:spPr>
-        <p:txBody>
-          <a:bodyPr wrap="square">
-            <a:spAutoFit/>
-          </a:bodyPr>
-          <a:lstStyle/>
-          <a:p>
-            <a:pPr algn="l">
-              <a:defRPr sz="1400" b="1">
-                <a:solidFill>
-                  <a:srgbClr val="FFD700"/>
-                </a:solidFill>
-                <a:latin typeface="Arial"/>
-              </a:defRPr>
-            </a:pPr>
-            <a:r>
-              <a:t>「愛打」Logo浮現</a:t>
-            </a:r>
-          </a:p>
-        </p:txBody>
-      </p:sp>
-      <p:sp>
-        <p:nvSpPr>
-          <p:cNvPr id="13" name="TextBox 12"/>
-          <p:cNvSpPr txBox="1"/>
-          <p:nvPr/>
-        </p:nvSpPr>
-        <p:spPr>
-          <a:xfrm>
-            <a:off x="5486400" y="3154679"/>
-            <a:ext cx="4572000" cy="274320"/>
-          </a:xfrm>
-          <a:prstGeom prst="rect">
-            <a:avLst/>
-          </a:prstGeom>
-          <a:noFill/>
-        </p:spPr>
-        <p:txBody>
-          <a:bodyPr wrap="square">
-            <a:spAutoFit/>
-          </a:bodyPr>
-          <a:lstStyle/>
-          <a:p>
-            <a:pPr algn="l">
-              <a:defRPr sz="1300" b="0">
-                <a:solidFill>
-                  <a:srgbClr val="E8E8E8"/>
-                </a:solidFill>
-                <a:latin typeface="Arial"/>
-              </a:defRPr>
-            </a:pPr>
-            <a:r>
-              <a:t>—</a:t>
-            </a:r>
-          </a:p>
-        </p:txBody>
-      </p:sp>
-      <p:sp>
-        <p:nvSpPr>
-          <p:cNvPr id="14" name="Rectangle 13"/>
-          <p:cNvSpPr/>
-          <p:nvPr/>
-        </p:nvSpPr>
-        <p:spPr>
-          <a:xfrm>
-            <a:off x="1097280" y="3520439"/>
-            <a:ext cx="9601200" cy="12700"/>
-          </a:xfrm>
-          <a:prstGeom prst="rect">
-            <a:avLst/>
-          </a:prstGeom>
-          <a:solidFill>
-            <a:srgbClr val="333355"/>
-          </a:solidFill>
-        </p:spPr>
-        <p:style>
-          <a:lnRef idx="1">
-            <a:schemeClr val="accent1"/>
-          </a:lnRef>
-          <a:fillRef idx="3">
-            <a:schemeClr val="accent1"/>
-          </a:fillRef>
-          <a:effectRef idx="2">
-            <a:schemeClr val="accent1"/>
-          </a:effectRef>
-          <a:fontRef idx="minor">
-            <a:schemeClr val="lt1"/>
-          </a:fontRef>
-        </p:style>
-        <p:txBody>
-          <a:bodyPr rtlCol="0" anchor="ctr"/>
-          <a:lstStyle/>
-          <a:p>
-            <a:pPr algn="ctr"/>
-          </a:p>
-        </p:txBody>
-      </p:sp>
-      <p:sp>
-        <p:nvSpPr>
-          <p:cNvPr id="15" name="TextBox 14"/>
-          <p:cNvSpPr txBox="1"/>
-          <p:nvPr/>
-        </p:nvSpPr>
-        <p:spPr>
-          <a:xfrm>
-            <a:off x="1097280" y="3749039"/>
-            <a:ext cx="1371600" cy="274320"/>
-          </a:xfrm>
-          <a:prstGeom prst="rect">
-            <a:avLst/>
-          </a:prstGeom>
-          <a:noFill/>
-        </p:spPr>
-        <p:txBody>
-          <a:bodyPr wrap="square">
-            <a:spAutoFit/>
-          </a:bodyPr>
-          <a:lstStyle/>
-          <a:p>
-            <a:pPr algn="l">
-              <a:defRPr sz="1300" b="1">
-                <a:solidFill>
-                  <a:srgbClr val="00D4FF"/>
-                </a:solidFill>
-                <a:latin typeface="Arial"/>
-              </a:defRPr>
-            </a:pPr>
-            <a:r>
-              <a:t>3-4s</a:t>
-            </a:r>
-          </a:p>
-        </p:txBody>
-      </p:sp>
-      <p:sp>
-        <p:nvSpPr>
-          <p:cNvPr id="16" name="TextBox 15"/>
-          <p:cNvSpPr txBox="1"/>
-          <p:nvPr/>
-        </p:nvSpPr>
-        <p:spPr>
-          <a:xfrm>
-            <a:off x="2560320" y="3749039"/>
-            <a:ext cx="2743200" cy="274320"/>
-          </a:xfrm>
-          <a:prstGeom prst="rect">
-            <a:avLst/>
-          </a:prstGeom>
-          <a:noFill/>
-        </p:spPr>
-        <p:txBody>
-          <a:bodyPr wrap="square">
-            <a:spAutoFit/>
-          </a:bodyPr>
-          <a:lstStyle/>
-          <a:p>
-            <a:pPr algn="l">
-              <a:defRPr sz="1400" b="1">
-                <a:solidFill>
-                  <a:srgbClr val="FFD700"/>
-                </a:solidFill>
-                <a:latin typeface="Arial"/>
-              </a:defRPr>
-            </a:pPr>
-            <a:r>
-              <a:t>紙人剪影飄入</a:t>
-            </a:r>
-          </a:p>
-        </p:txBody>
-      </p:sp>
-      <p:sp>
-        <p:nvSpPr>
-          <p:cNvPr id="17" name="TextBox 16"/>
-          <p:cNvSpPr txBox="1"/>
-          <p:nvPr/>
-        </p:nvSpPr>
-        <p:spPr>
-          <a:xfrm>
-            <a:off x="5486400" y="3749039"/>
-            <a:ext cx="4572000" cy="274320"/>
-          </a:xfrm>
-          <a:prstGeom prst="rect">
-            <a:avLst/>
-          </a:prstGeom>
-          <a:noFill/>
-        </p:spPr>
-        <p:txBody>
-          <a:bodyPr wrap="square">
-            <a:spAutoFit/>
-          </a:bodyPr>
-          <a:lstStyle/>
-          <a:p>
-            <a:pPr algn="l">
-              <a:defRPr sz="1300" b="0">
-                <a:solidFill>
-                  <a:srgbClr val="E8E8E8"/>
-                </a:solidFill>
-                <a:latin typeface="Arial"/>
-              </a:defRPr>
-            </a:pPr>
-            <a:r>
-              <a:t>—</a:t>
-            </a:r>
-          </a:p>
-        </p:txBody>
-      </p:sp>
-      <p:sp>
-        <p:nvSpPr>
-          <p:cNvPr id="18" name="Rectangle 17"/>
-          <p:cNvSpPr/>
-          <p:nvPr/>
-        </p:nvSpPr>
-        <p:spPr>
-          <a:xfrm>
-            <a:off x="1097280" y="4114799"/>
-            <a:ext cx="9601200" cy="12700"/>
-          </a:xfrm>
-          <a:prstGeom prst="rect">
-            <a:avLst/>
-          </a:prstGeom>
-          <a:solidFill>
-            <a:srgbClr val="333355"/>
-          </a:solidFill>
-        </p:spPr>
-        <p:style>
-          <a:lnRef idx="1">
-            <a:schemeClr val="accent1"/>
-          </a:lnRef>
-          <a:fillRef idx="3">
-            <a:schemeClr val="accent1"/>
-          </a:fillRef>
-          <a:effectRef idx="2">
-            <a:schemeClr val="accent1"/>
-          </a:effectRef>
-          <a:fontRef idx="minor">
-            <a:schemeClr val="lt1"/>
-          </a:fontRef>
-        </p:style>
-        <p:txBody>
-          <a:bodyPr rtlCol="0" anchor="ctr"/>
-          <a:lstStyle/>
-          <a:p>
-            <a:pPr algn="ctr"/>
-          </a:p>
-        </p:txBody>
-      </p:sp>
-      <p:sp>
-        <p:nvSpPr>
-          <p:cNvPr id="19" name="TextBox 18"/>
-          <p:cNvSpPr txBox="1"/>
-          <p:nvPr/>
-        </p:nvSpPr>
-        <p:spPr>
-          <a:xfrm>
-            <a:off x="1097280" y="4343400"/>
-            <a:ext cx="1371600" cy="274320"/>
-          </a:xfrm>
-          <a:prstGeom prst="rect">
-            <a:avLst/>
-          </a:prstGeom>
-          <a:noFill/>
-        </p:spPr>
-        <p:txBody>
-          <a:bodyPr wrap="square">
-            <a:spAutoFit/>
-          </a:bodyPr>
-          <a:lstStyle/>
-          <a:p>
-            <a:pPr algn="l">
-              <a:defRPr sz="1300" b="1">
-                <a:solidFill>
-                  <a:srgbClr val="00D4FF"/>
-                </a:solidFill>
-                <a:latin typeface="Arial"/>
-              </a:defRPr>
-            </a:pPr>
-            <a:r>
-              <a:t>4-6s</a:t>
-            </a:r>
-          </a:p>
-        </p:txBody>
-      </p:sp>
-      <p:sp>
-        <p:nvSpPr>
-          <p:cNvPr id="20" name="TextBox 19"/>
-          <p:cNvSpPr txBox="1"/>
-          <p:nvPr/>
-        </p:nvSpPr>
-        <p:spPr>
-          <a:xfrm>
-            <a:off x="2560320" y="4343400"/>
-            <a:ext cx="2743200" cy="274320"/>
-          </a:xfrm>
-          <a:prstGeom prst="rect">
-            <a:avLst/>
-          </a:prstGeom>
-          <a:noFill/>
-        </p:spPr>
-        <p:txBody>
-          <a:bodyPr wrap="square">
-            <a:spAutoFit/>
-          </a:bodyPr>
-          <a:lstStyle/>
-          <a:p>
-            <a:pPr algn="l">
-              <a:defRPr sz="1400" b="1">
-                <a:solidFill>
-                  <a:srgbClr val="FFD700"/>
-                </a:solidFill>
-                <a:latin typeface="Arial"/>
-              </a:defRPr>
-            </a:pPr>
-            <a:r>
-              <a:t>口訣顯示·打小人</a:t>
-            </a:r>
-          </a:p>
-        </p:txBody>
-      </p:sp>
-      <p:sp>
-        <p:nvSpPr>
-          <p:cNvPr id="21" name="TextBox 20"/>
-          <p:cNvSpPr txBox="1"/>
-          <p:nvPr/>
-        </p:nvSpPr>
-        <p:spPr>
-          <a:xfrm>
-            <a:off x="5486400" y="4343400"/>
-            <a:ext cx="4572000" cy="274320"/>
-          </a:xfrm>
-          <a:prstGeom prst="rect">
-            <a:avLst/>
-          </a:prstGeom>
-          <a:noFill/>
-        </p:spPr>
-        <p:txBody>
-          <a:bodyPr wrap="square">
-            <a:spAutoFit/>
-          </a:bodyPr>
-          <a:lstStyle/>
-          <a:p>
-            <a:pPr algn="l">
-              <a:defRPr sz="1300" b="0">
-                <a:solidFill>
-                  <a:srgbClr val="E8E8E8"/>
-                </a:solidFill>
-                <a:latin typeface="Arial"/>
-              </a:defRPr>
-            </a:pPr>
-            <a:r>
-              <a:t>2句咒罵口訣</a:t>
-            </a:r>
-          </a:p>
-        </p:txBody>
-      </p:sp>
-      <p:sp>
-        <p:nvSpPr>
-          <p:cNvPr id="22" name="Rectangle 21"/>
-          <p:cNvSpPr/>
-          <p:nvPr/>
-        </p:nvSpPr>
-        <p:spPr>
-          <a:xfrm>
-            <a:off x="1097280" y="4709160"/>
-            <a:ext cx="9601200" cy="12700"/>
-          </a:xfrm>
-          <a:prstGeom prst="rect">
-            <a:avLst/>
-          </a:prstGeom>
-          <a:solidFill>
-            <a:srgbClr val="333355"/>
-          </a:solidFill>
-        </p:spPr>
-        <p:style>
-          <a:lnRef idx="1">
-            <a:schemeClr val="accent1"/>
-          </a:lnRef>
-          <a:fillRef idx="3">
-            <a:schemeClr val="accent1"/>
-          </a:fillRef>
-          <a:effectRef idx="2">
-            <a:schemeClr val="accent1"/>
-          </a:effectRef>
-          <a:fontRef idx="minor">
-            <a:schemeClr val="lt1"/>
-          </a:fontRef>
-        </p:style>
-        <p:txBody>
-          <a:bodyPr rtlCol="0" anchor="ctr"/>
-          <a:lstStyle/>
-          <a:p>
-            <a:pPr algn="ctr"/>
-          </a:p>
-        </p:txBody>
-      </p:sp>
-      <p:sp>
-        <p:nvSpPr>
-          <p:cNvPr id="23" name="TextBox 22"/>
-          <p:cNvSpPr txBox="1"/>
-          <p:nvPr/>
-        </p:nvSpPr>
-        <p:spPr>
-          <a:xfrm>
-            <a:off x="1097280" y="4937760"/>
-            <a:ext cx="1371600" cy="274320"/>
-          </a:xfrm>
-          <a:prstGeom prst="rect">
-            <a:avLst/>
-          </a:prstGeom>
-          <a:noFill/>
-        </p:spPr>
-        <p:txBody>
-          <a:bodyPr wrap="square">
-            <a:spAutoFit/>
-          </a:bodyPr>
-          <a:lstStyle/>
-          <a:p>
-            <a:pPr algn="l">
-              <a:defRPr sz="1300" b="1">
-                <a:solidFill>
-                  <a:srgbClr val="00D4FF"/>
-                </a:solidFill>
-                <a:latin typeface="Arial"/>
-              </a:defRPr>
-            </a:pPr>
-            <a:r>
-              <a:t>6-8s</a:t>
-            </a:r>
-          </a:p>
-        </p:txBody>
-      </p:sp>
-      <p:sp>
-        <p:nvSpPr>
-          <p:cNvPr id="24" name="TextBox 23"/>
-          <p:cNvSpPr txBox="1"/>
-          <p:nvPr/>
-        </p:nvSpPr>
-        <p:spPr>
-          <a:xfrm>
-            <a:off x="2560320" y="4937760"/>
-            <a:ext cx="2743200" cy="274320"/>
-          </a:xfrm>
-          <a:prstGeom prst="rect">
-            <a:avLst/>
-          </a:prstGeom>
-          <a:noFill/>
-        </p:spPr>
-        <p:txBody>
-          <a:bodyPr wrap="square">
-            <a:spAutoFit/>
-          </a:bodyPr>
-          <a:lstStyle/>
-          <a:p>
-            <a:pPr algn="l">
-              <a:defRPr sz="1400" b="1">
-                <a:solidFill>
-                  <a:srgbClr val="FFD700"/>
-                </a:solidFill>
-                <a:latin typeface="Arial"/>
-              </a:defRPr>
-            </a:pPr>
-            <a:r>
-              <a:t>口訣顯示·抱抱</a:t>
-            </a:r>
-          </a:p>
-        </p:txBody>
-      </p:sp>
-      <p:sp>
-        <p:nvSpPr>
-          <p:cNvPr id="25" name="TextBox 24"/>
-          <p:cNvSpPr txBox="1"/>
-          <p:nvPr/>
-        </p:nvSpPr>
-        <p:spPr>
-          <a:xfrm>
-            <a:off x="5486400" y="4937760"/>
-            <a:ext cx="4572000" cy="274320"/>
-          </a:xfrm>
-          <a:prstGeom prst="rect">
-            <a:avLst/>
-          </a:prstGeom>
-          <a:noFill/>
-        </p:spPr>
-        <p:txBody>
-          <a:bodyPr wrap="square">
-            <a:spAutoFit/>
-          </a:bodyPr>
-          <a:lstStyle/>
-          <a:p>
-            <a:pPr algn="l">
-              <a:defRPr sz="1300" b="0">
-                <a:solidFill>
-                  <a:srgbClr val="E8E8E8"/>
-                </a:solidFill>
-                <a:latin typeface="Arial"/>
-              </a:defRPr>
-            </a:pPr>
-            <a:r>
-              <a:t>2句祝福口訣</a:t>
-            </a:r>
-          </a:p>
-        </p:txBody>
-      </p:sp>
-      <p:sp>
-        <p:nvSpPr>
-          <p:cNvPr id="26" name="Rectangle 25"/>
-          <p:cNvSpPr/>
-          <p:nvPr/>
-        </p:nvSpPr>
-        <p:spPr>
-          <a:xfrm>
-            <a:off x="1097280" y="5303520"/>
-            <a:ext cx="9601200" cy="12700"/>
-          </a:xfrm>
-          <a:prstGeom prst="rect">
-            <a:avLst/>
-          </a:prstGeom>
-          <a:solidFill>
-            <a:srgbClr val="333355"/>
-          </a:solidFill>
-        </p:spPr>
-        <p:style>
-          <a:lnRef idx="1">
-            <a:schemeClr val="accent1"/>
-          </a:lnRef>
-          <a:fillRef idx="3">
-            <a:schemeClr val="accent1"/>
-          </a:fillRef>
-          <a:effectRef idx="2">
-            <a:schemeClr val="accent1"/>
-          </a:effectRef>
-          <a:fontRef idx="minor">
-            <a:schemeClr val="lt1"/>
-          </a:fontRef>
-        </p:style>
-        <p:txBody>
-          <a:bodyPr rtlCol="0" anchor="ctr"/>
-          <a:lstStyle/>
-          <a:p>
-            <a:pPr algn="ctr"/>
-          </a:p>
-        </p:txBody>
-      </p:sp>
-      <p:sp>
-        <p:nvSpPr>
-          <p:cNvPr id="27" name="TextBox 26"/>
-          <p:cNvSpPr txBox="1"/>
-          <p:nvPr/>
-        </p:nvSpPr>
-        <p:spPr>
-          <a:xfrm>
-            <a:off x="1097280" y="5532120"/>
-            <a:ext cx="1371600" cy="274320"/>
-          </a:xfrm>
-          <a:prstGeom prst="rect">
-            <a:avLst/>
-          </a:prstGeom>
-          <a:noFill/>
-        </p:spPr>
-        <p:txBody>
-          <a:bodyPr wrap="square">
-            <a:spAutoFit/>
-          </a:bodyPr>
-          <a:lstStyle/>
-          <a:p>
-            <a:pPr algn="l">
-              <a:defRPr sz="1300" b="1">
-                <a:solidFill>
-                  <a:srgbClr val="00D4FF"/>
-                </a:solidFill>
-                <a:latin typeface="Arial"/>
-              </a:defRPr>
-            </a:pPr>
-            <a:r>
-              <a:t>8-10s</a:t>
-            </a:r>
-          </a:p>
-        </p:txBody>
-      </p:sp>
-      <p:sp>
-        <p:nvSpPr>
-          <p:cNvPr id="28" name="TextBox 27"/>
-          <p:cNvSpPr txBox="1"/>
-          <p:nvPr/>
-        </p:nvSpPr>
-        <p:spPr>
-          <a:xfrm>
-            <a:off x="2560320" y="5532120"/>
-            <a:ext cx="2743200" cy="274320"/>
-          </a:xfrm>
-          <a:prstGeom prst="rect">
-            <a:avLst/>
-          </a:prstGeom>
-          <a:noFill/>
-        </p:spPr>
-        <p:txBody>
-          <a:bodyPr wrap="square">
-            <a:spAutoFit/>
-          </a:bodyPr>
-          <a:lstStyle/>
-          <a:p>
-            <a:pPr algn="l">
-              <a:defRPr sz="1400" b="1">
-                <a:solidFill>
-                  <a:srgbClr val="FFD700"/>
-                </a:solidFill>
-                <a:latin typeface="Arial"/>
-              </a:defRPr>
-            </a:pPr>
-            <a:r>
-              <a:t>打+抱動畫交替</a:t>
-            </a:r>
-          </a:p>
-        </p:txBody>
-      </p:sp>
-      <p:sp>
-        <p:nvSpPr>
-          <p:cNvPr id="29" name="TextBox 28"/>
-          <p:cNvSpPr txBox="1"/>
-          <p:nvPr/>
-        </p:nvSpPr>
-        <p:spPr>
-          <a:xfrm>
-            <a:off x="5486400" y="5532120"/>
-            <a:ext cx="4572000" cy="274320"/>
-          </a:xfrm>
-          <a:prstGeom prst="rect">
-            <a:avLst/>
-          </a:prstGeom>
-          <a:noFill/>
-        </p:spPr>
-        <p:txBody>
-          <a:bodyPr wrap="square">
-            <a:spAutoFit/>
-          </a:bodyPr>
-          <a:lstStyle/>
-          <a:p>
-            <a:pPr algn="l">
-              <a:defRPr sz="1300" b="0">
-                <a:solidFill>
-                  <a:srgbClr val="E8E8E8"/>
-                </a:solidFill>
-                <a:latin typeface="Arial"/>
-              </a:defRPr>
-            </a:pPr>
-            <a:r>
-              <a:t>⚡ vs 💕</a:t>
-            </a:r>
-          </a:p>
-        </p:txBody>
-      </p:sp>
-      <p:sp>
-        <p:nvSpPr>
-          <p:cNvPr id="30" name="Rectangle 29"/>
-          <p:cNvSpPr/>
-          <p:nvPr/>
-        </p:nvSpPr>
-        <p:spPr>
-          <a:xfrm>
-            <a:off x="1097280" y="5897880"/>
-            <a:ext cx="9601200" cy="12700"/>
-          </a:xfrm>
-          <a:prstGeom prst="rect">
-            <a:avLst/>
-          </a:prstGeom>
-          <a:solidFill>
-            <a:srgbClr val="333355"/>
-          </a:solidFill>
-        </p:spPr>
-        <p:style>
-          <a:lnRef idx="1">
-            <a:schemeClr val="accent1"/>
-          </a:lnRef>
-          <a:fillRef idx="3">
-            <a:schemeClr val="accent1"/>
-          </a:fillRef>
-          <a:effectRef idx="2">
-            <a:schemeClr val="accent1"/>
-          </a:effectRef>
-          <a:fontRef idx="minor">
-            <a:schemeClr val="lt1"/>
-          </a:fontRef>
-        </p:style>
-        <p:txBody>
-          <a:bodyPr rtlCol="0" anchor="ctr"/>
-          <a:lstStyle/>
-          <a:p>
-            <a:pPr algn="ctr"/>
-          </a:p>
-        </p:txBody>
-      </p:sp>
-      <p:sp>
-        <p:nvSpPr>
-          <p:cNvPr id="31" name="TextBox 30"/>
-          <p:cNvSpPr txBox="1"/>
-          <p:nvPr/>
-        </p:nvSpPr>
-        <p:spPr>
-          <a:xfrm>
-            <a:off x="1097280" y="6126480"/>
-            <a:ext cx="1371600" cy="274320"/>
-          </a:xfrm>
-          <a:prstGeom prst="rect">
-            <a:avLst/>
-          </a:prstGeom>
-          <a:noFill/>
-        </p:spPr>
-        <p:txBody>
-          <a:bodyPr wrap="square">
-            <a:spAutoFit/>
-          </a:bodyPr>
-          <a:lstStyle/>
-          <a:p>
-            <a:pPr algn="l">
-              <a:defRPr sz="1300" b="1">
-                <a:solidFill>
-                  <a:srgbClr val="00D4FF"/>
-                </a:solidFill>
-                <a:latin typeface="Arial"/>
-              </a:defRPr>
-            </a:pPr>
-            <a:r>
-              <a:t>10-12s</a:t>
-            </a:r>
-          </a:p>
-        </p:txBody>
-      </p:sp>
-      <p:sp>
-        <p:nvSpPr>
-          <p:cNvPr id="32" name="TextBox 31"/>
-          <p:cNvSpPr txBox="1"/>
-          <p:nvPr/>
-        </p:nvSpPr>
-        <p:spPr>
-          <a:xfrm>
-            <a:off x="2560320" y="6126480"/>
-            <a:ext cx="2743200" cy="274320"/>
-          </a:xfrm>
-          <a:prstGeom prst="rect">
-            <a:avLst/>
-          </a:prstGeom>
-          <a:noFill/>
-        </p:spPr>
-        <p:txBody>
-          <a:bodyPr wrap="square">
-            <a:spAutoFit/>
-          </a:bodyPr>
-          <a:lstStyle/>
-          <a:p>
-            <a:pPr algn="l">
-              <a:defRPr sz="1400" b="1">
-                <a:solidFill>
-                  <a:srgbClr val="FFD700"/>
-                </a:solidFill>
-                <a:latin typeface="Arial"/>
-              </a:defRPr>
-            </a:pPr>
-            <a:r>
-              <a:t>Logo + 習俗簡介</a:t>
-            </a:r>
-          </a:p>
-        </p:txBody>
-      </p:sp>
-      <p:sp>
-        <p:nvSpPr>
-          <p:cNvPr id="33" name="TextBox 32"/>
-          <p:cNvSpPr txBox="1"/>
-          <p:nvPr/>
-        </p:nvSpPr>
-        <p:spPr>
-          <a:xfrm>
-            <a:off x="5486400" y="6126480"/>
-            <a:ext cx="4572000" cy="274320"/>
-          </a:xfrm>
-          <a:prstGeom prst="rect">
-            <a:avLst/>
-          </a:prstGeom>
-          <a:noFill/>
-        </p:spPr>
-        <p:txBody>
-          <a:bodyPr wrap="square">
-            <a:spAutoFit/>
-          </a:bodyPr>
-          <a:lstStyle/>
-          <a:p>
-            <a:pPr algn="l">
-              <a:defRPr sz="1300" b="0">
-                <a:solidFill>
-                  <a:srgbClr val="E8E8E8"/>
-                </a:solidFill>
-                <a:latin typeface="Arial"/>
-              </a:defRPr>
-            </a:pPr>
-            <a:r>
-              <a:t>→ fade out → 主頁</a:t>
-            </a:r>
-          </a:p>
-        </p:txBody>
-      </p:sp>
-      <p:sp>
-        <p:nvSpPr>
-          <p:cNvPr id="34" name="Rectangle 33"/>
-          <p:cNvSpPr/>
-          <p:nvPr/>
-        </p:nvSpPr>
-        <p:spPr>
-          <a:xfrm>
-            <a:off x="1097280" y="6492240"/>
-            <a:ext cx="9601200" cy="12700"/>
-          </a:xfrm>
-          <a:prstGeom prst="rect">
-            <a:avLst/>
-          </a:prstGeom>
-          <a:solidFill>
-            <a:srgbClr val="333355"/>
-          </a:solidFill>
-        </p:spPr>
-        <p:style>
-          <a:lnRef idx="1">
-            <a:schemeClr val="accent1"/>
-          </a:lnRef>
-          <a:fillRef idx="3">
-            <a:schemeClr val="accent1"/>
-          </a:fillRef>
-          <a:effectRef idx="2">
-            <a:schemeClr val="accent1"/>
-          </a:effectRef>
-          <a:fontRef idx="minor">
-            <a:schemeClr val="lt1"/>
-          </a:fontRef>
-        </p:style>
-        <p:txBody>
-          <a:bodyPr rtlCol="0" anchor="ctr"/>
-          <a:lstStyle/>
-          <a:p>
-            <a:pPr algn="ctr"/>
-          </a:p>
-        </p:txBody>
-      </p:sp>
-      <p:sp>
-        <p:nvSpPr>
-          <p:cNvPr id="35" name="TextBox 34"/>
-          <p:cNvSpPr txBox="1"/>
-          <p:nvPr/>
-        </p:nvSpPr>
-        <p:spPr>
-          <a:xfrm>
-            <a:off x="1097280" y="5943600"/>
-            <a:ext cx="9144000" cy="274320"/>
-          </a:xfrm>
-          <a:prstGeom prst="rect">
-            <a:avLst/>
-          </a:prstGeom>
-          <a:noFill/>
-        </p:spPr>
-        <p:txBody>
-          <a:bodyPr wrap="square">
-            <a:spAutoFit/>
-          </a:bodyPr>
-          <a:lstStyle/>
-          <a:p>
-            <a:pPr algn="l">
-              <a:defRPr sz="1200" b="0">
-                <a:solidFill>
-                  <a:srgbClr val="999999"/>
-                </a:solidFill>
-                <a:latin typeface="Arial"/>
-              </a:defRPr>
-            </a:pPr>
-            <a:r>
-              <a:t>可跳過 · session內不重播 · Canvas JavaScript 實作</a:t>
-            </a:r>
-          </a:p>
-        </p:txBody>
-      </p:sp>
-    </p:spTree>
-  </p:cSld>
-  <p:clrMapOvr>
-    <a:masterClrMapping/>
-  </p:clrMapOvr>
-</p:sld>
-</file>
-
-<file path=ppt/slides/slide7.xml><?xml version="1.0" encoding="utf-8"?>
-<p:sld xmlns:a="http://schemas.openxmlformats.org/drawingml/2006/main" xmlns:p="http://schemas.openxmlformats.org/presentationml/2006/main" xmlns:r="http://schemas.openxmlformats.org/officeDocument/2006/relationships">
-  <p:cSld>
-    <p:bg>
-      <p:bgPr>
-        <a:solidFill>
-          <a:srgbClr val="1A1A2E"/>
-        </a:solidFill>
-        <a:effectLst/>
-      </p:bgPr>
-    </p:bg>
-    <p:spTree>
-      <p:nvGrpSpPr>
-        <p:cNvPr id="1" name=""/>
-        <p:cNvGrpSpPr/>
-        <p:nvPr/>
-      </p:nvGrpSpPr>
-      <p:grpSpPr/>
-      <p:sp>
-        <p:nvSpPr>
-          <p:cNvPr id="2" name="Rectangle 1"/>
-          <p:cNvSpPr/>
-          <p:nvPr/>
-        </p:nvSpPr>
-        <p:spPr>
-          <a:xfrm>
-            <a:off x="0" y="274320"/>
-            <a:ext cx="12191695" cy="50800"/>
-          </a:xfrm>
-          <a:prstGeom prst="rect">
-            <a:avLst/>
-          </a:prstGeom>
-          <a:solidFill>
-            <a:srgbClr val="00D4FF"/>
-          </a:solidFill>
-        </p:spPr>
-        <p:style>
-          <a:lnRef idx="1">
-            <a:schemeClr val="accent1"/>
-          </a:lnRef>
-          <a:fillRef idx="3">
-            <a:schemeClr val="accent1"/>
-          </a:fillRef>
-          <a:effectRef idx="2">
-            <a:schemeClr val="accent1"/>
-          </a:effectRef>
-          <a:fontRef idx="minor">
-            <a:schemeClr val="lt1"/>
-          </a:fontRef>
-        </p:style>
-        <p:txBody>
-          <a:bodyPr rtlCol="0" anchor="ctr"/>
-          <a:lstStyle/>
-          <a:p>
-            <a:pPr algn="ctr"/>
-          </a:p>
-        </p:txBody>
-      </p:sp>
-      <p:sp>
-        <p:nvSpPr>
-          <p:cNvPr id="3" name="TextBox 2"/>
-          <p:cNvSpPr txBox="1"/>
-          <p:nvPr/>
-        </p:nvSpPr>
-        <p:spPr>
-          <a:xfrm>
-            <a:off x="731520" y="457200"/>
-            <a:ext cx="7315200" cy="731520"/>
-          </a:xfrm>
-          <a:prstGeom prst="rect">
-            <a:avLst/>
-          </a:prstGeom>
-          <a:noFill/>
-        </p:spPr>
-        <p:txBody>
-          <a:bodyPr wrap="square">
-            <a:spAutoFit/>
-          </a:bodyPr>
-          <a:lstStyle/>
-          <a:p>
-            <a:pPr algn="l">
-              <a:defRPr sz="3600" b="1">
-                <a:solidFill>
-                  <a:srgbClr val="FFFFFF"/>
-                </a:solidFill>
-                <a:latin typeface="Arial"/>
-              </a:defRPr>
-            </a:pPr>
-            <a:r>
-              <a:t> 工具系統</a:t>
-            </a:r>
-          </a:p>
-        </p:txBody>
-      </p:sp>
-      <p:sp>
-        <p:nvSpPr>
-          <p:cNvPr id="4" name="Rectangle 3"/>
-          <p:cNvSpPr/>
-          <p:nvPr/>
-        </p:nvSpPr>
-        <p:spPr>
-          <a:xfrm>
-            <a:off x="731520" y="1188720"/>
-            <a:ext cx="2286000" cy="38100"/>
-          </a:xfrm>
-          <a:prstGeom prst="rect">
-            <a:avLst/>
-          </a:prstGeom>
-          <a:solidFill>
-            <a:srgbClr val="00D4FF"/>
-          </a:solidFill>
-        </p:spPr>
-        <p:style>
-          <a:lnRef idx="1">
-            <a:schemeClr val="accent1"/>
-          </a:lnRef>
-          <a:fillRef idx="3">
-            <a:schemeClr val="accent1"/>
-          </a:fillRef>
-          <a:effectRef idx="2">
-            <a:schemeClr val="accent1"/>
-          </a:effectRef>
-          <a:fontRef idx="minor">
-            <a:schemeClr val="lt1"/>
-          </a:fontRef>
-        </p:style>
-        <p:txBody>
-          <a:bodyPr rtlCol="0" anchor="ctr"/>
-          <a:lstStyle/>
-          <a:p>
-            <a:pPr algn="ctr"/>
-          </a:p>
-        </p:txBody>
-      </p:sp>
-      <p:sp>
-        <p:nvSpPr>
-          <p:cNvPr id="5" name="Rounded Rectangle 4"/>
-          <p:cNvSpPr/>
-          <p:nvPr/>
-        </p:nvSpPr>
-        <p:spPr>
-          <a:xfrm>
-            <a:off x="731520" y="1645920"/>
-            <a:ext cx="5029200" cy="4114800"/>
-          </a:xfrm>
-          <a:prstGeom prst="roundRect">
-            <a:avLst/>
-          </a:prstGeom>
-          <a:solidFill>
-            <a:srgbClr val="22223E"/>
-          </a:solidFill>
-        </p:spPr>
-        <p:style>
-          <a:lnRef idx="1">
-            <a:schemeClr val="accent1"/>
-          </a:lnRef>
-          <a:fillRef idx="3">
-            <a:schemeClr val="accent1"/>
-          </a:fillRef>
-          <a:effectRef idx="2">
-            <a:schemeClr val="accent1"/>
-          </a:effectRef>
-          <a:fontRef idx="minor">
-            <a:schemeClr val="lt1"/>
-          </a:fontRef>
-        </p:style>
-        <p:txBody>
-          <a:bodyPr rtlCol="0" anchor="ctr"/>
-          <a:lstStyle/>
-          <a:p>
-            <a:pPr algn="ctr"/>
-          </a:p>
-        </p:txBody>
-      </p:sp>
-      <p:sp>
-        <p:nvSpPr>
-          <p:cNvPr id="6" name="TextBox 5"/>
-          <p:cNvSpPr txBox="1"/>
-          <p:nvPr/>
-        </p:nvSpPr>
-        <p:spPr>
-          <a:xfrm>
-            <a:off x="1097280" y="1828800"/>
-            <a:ext cx="4389120" cy="365760"/>
-          </a:xfrm>
-          <a:prstGeom prst="rect">
-            <a:avLst/>
-          </a:prstGeom>
-          <a:noFill/>
-        </p:spPr>
-        <p:txBody>
-          <a:bodyPr wrap="square">
-            <a:spAutoFit/>
-          </a:bodyPr>
-          <a:lstStyle/>
-          <a:p>
-            <a:pPr algn="l">
-              <a:defRPr sz="2000" b="1">
-                <a:solidFill>
-                  <a:srgbClr val="FF4444"/>
-                </a:solidFill>
-                <a:latin typeface="Arial"/>
-              </a:defRPr>
-            </a:pPr>
-            <a:r>
-              <a:t> 打小人</a:t>
-            </a:r>
-          </a:p>
-        </p:txBody>
-      </p:sp>
-      <p:sp>
-        <p:nvSpPr>
-          <p:cNvPr id="7" name="TextBox 6"/>
-          <p:cNvSpPr txBox="1"/>
-          <p:nvPr/>
-        </p:nvSpPr>
-        <p:spPr>
-          <a:xfrm>
-            <a:off x="1097280" y="2377440"/>
-            <a:ext cx="1828800" cy="274320"/>
-          </a:xfrm>
-          <a:prstGeom prst="rect">
-            <a:avLst/>
-          </a:prstGeom>
-          <a:noFill/>
-        </p:spPr>
-        <p:txBody>
-          <a:bodyPr wrap="square">
-            <a:spAutoFit/>
-          </a:bodyPr>
-          <a:lstStyle/>
-          <a:p>
-            <a:pPr algn="l">
-              <a:defRPr sz="1500" b="1">
-                <a:solidFill>
-                  <a:srgbClr val="00D4FF"/>
-                </a:solidFill>
-                <a:latin typeface="Arial"/>
-              </a:defRPr>
-            </a:pPr>
-            <a:r>
-              <a:t>拖鞋 🥿</a:t>
-            </a:r>
-          </a:p>
-        </p:txBody>
-      </p:sp>
-      <p:sp>
-        <p:nvSpPr>
-          <p:cNvPr id="8" name="TextBox 7"/>
-          <p:cNvSpPr txBox="1"/>
-          <p:nvPr/>
-        </p:nvSpPr>
-        <p:spPr>
-          <a:xfrm>
-            <a:off x="1097280" y="2743200"/>
-            <a:ext cx="3657600" cy="274320"/>
-          </a:xfrm>
-          <a:prstGeom prst="rect">
-            <a:avLst/>
-          </a:prstGeom>
-          <a:noFill/>
-        </p:spPr>
-        <p:txBody>
-          <a:bodyPr wrap="square">
-            <a:spAutoFit/>
-          </a:bodyPr>
-          <a:lstStyle/>
-          <a:p>
-            <a:pPr algn="l">
-              <a:defRPr sz="1300" b="0">
-                <a:solidFill>
-                  <a:srgbClr val="E8E8E8"/>
-                </a:solidFill>
-                <a:latin typeface="Arial"/>
-              </a:defRPr>
-            </a:pPr>
-            <a:r>
-              <a:t>範圍小，速度快</a:t>
-            </a:r>
-          </a:p>
-        </p:txBody>
-      </p:sp>
-      <p:sp>
-        <p:nvSpPr>
-          <p:cNvPr id="9" name="TextBox 8"/>
-          <p:cNvSpPr txBox="1"/>
-          <p:nvPr/>
-        </p:nvSpPr>
-        <p:spPr>
-          <a:xfrm>
-            <a:off x="1097280" y="3108960"/>
-            <a:ext cx="1828800" cy="274320"/>
-          </a:xfrm>
-          <a:prstGeom prst="rect">
-            <a:avLst/>
-          </a:prstGeom>
-          <a:noFill/>
-        </p:spPr>
-        <p:txBody>
-          <a:bodyPr wrap="square">
-            <a:spAutoFit/>
-          </a:bodyPr>
-          <a:lstStyle/>
-          <a:p>
-            <a:pPr algn="l">
-              <a:defRPr sz="1500" b="1">
-                <a:solidFill>
-                  <a:srgbClr val="00D4FF"/>
-                </a:solidFill>
-                <a:latin typeface="Arial"/>
-              </a:defRPr>
-            </a:pPr>
-            <a:r>
-              <a:t>棍棒 🏏</a:t>
-            </a:r>
-          </a:p>
-        </p:txBody>
-      </p:sp>
-      <p:sp>
-        <p:nvSpPr>
-          <p:cNvPr id="10" name="TextBox 9"/>
-          <p:cNvSpPr txBox="1"/>
-          <p:nvPr/>
-        </p:nvSpPr>
-        <p:spPr>
-          <a:xfrm>
-            <a:off x="1097280" y="3474720"/>
-            <a:ext cx="3657600" cy="274320"/>
-          </a:xfrm>
-          <a:prstGeom prst="rect">
-            <a:avLst/>
-          </a:prstGeom>
-          <a:noFill/>
-        </p:spPr>
-        <p:txBody>
-          <a:bodyPr wrap="square">
-            <a:spAutoFit/>
-          </a:bodyPr>
-          <a:lstStyle/>
-          <a:p>
-            <a:pPr algn="l">
-              <a:defRPr sz="1300" b="0">
-                <a:solidFill>
-                  <a:srgbClr val="E8E8E8"/>
-                </a:solidFill>
-                <a:latin typeface="Arial"/>
-              </a:defRPr>
-            </a:pPr>
-            <a:r>
-              <a:t>範圍中，威力中</a:t>
-            </a:r>
-          </a:p>
-        </p:txBody>
-      </p:sp>
-      <p:sp>
-        <p:nvSpPr>
-          <p:cNvPr id="11" name="TextBox 10"/>
-          <p:cNvSpPr txBox="1"/>
-          <p:nvPr/>
-        </p:nvSpPr>
-        <p:spPr>
-          <a:xfrm>
-            <a:off x="1097280" y="3840480"/>
-            <a:ext cx="1828800" cy="274320"/>
-          </a:xfrm>
-          <a:prstGeom prst="rect">
-            <a:avLst/>
-          </a:prstGeom>
-          <a:noFill/>
-        </p:spPr>
-        <p:txBody>
-          <a:bodyPr wrap="square">
-            <a:spAutoFit/>
-          </a:bodyPr>
-          <a:lstStyle/>
-          <a:p>
-            <a:pPr algn="l">
-              <a:defRPr sz="1500" b="1">
-                <a:solidFill>
-                  <a:srgbClr val="00D4FF"/>
-                </a:solidFill>
-                <a:latin typeface="Arial"/>
-              </a:defRPr>
-            </a:pPr>
-            <a:r>
-              <a:t>老虎鉗 🦀</a:t>
-            </a:r>
-          </a:p>
-        </p:txBody>
-      </p:sp>
-      <p:sp>
-        <p:nvSpPr>
-          <p:cNvPr id="12" name="TextBox 11"/>
-          <p:cNvSpPr txBox="1"/>
-          <p:nvPr/>
-        </p:nvSpPr>
-        <p:spPr>
-          <a:xfrm>
-            <a:off x="1097280" y="4206240"/>
-            <a:ext cx="3657600" cy="274320"/>
-          </a:xfrm>
-          <a:prstGeom prst="rect">
-            <a:avLst/>
-          </a:prstGeom>
-          <a:noFill/>
-        </p:spPr>
-        <p:txBody>
-          <a:bodyPr wrap="square">
-            <a:spAutoFit/>
-          </a:bodyPr>
-          <a:lstStyle/>
-          <a:p>
-            <a:pPr algn="l">
-              <a:defRPr sz="1300" b="0">
-                <a:solidFill>
-                  <a:srgbClr val="E8E8E8"/>
-                </a:solidFill>
-                <a:latin typeface="Arial"/>
-              </a:defRPr>
-            </a:pPr>
-            <a:r>
-              <a:t>精準打擊，高暴擊</a:t>
-            </a:r>
-          </a:p>
-        </p:txBody>
-      </p:sp>
-      <p:sp>
-        <p:nvSpPr>
-          <p:cNvPr id="13" name="Rounded Rectangle 12"/>
-          <p:cNvSpPr/>
-          <p:nvPr/>
-        </p:nvSpPr>
-        <p:spPr>
-          <a:xfrm>
-            <a:off x="6217920" y="1645920"/>
-            <a:ext cx="5029200" cy="4114800"/>
-          </a:xfrm>
-          <a:prstGeom prst="roundRect">
-            <a:avLst/>
-          </a:prstGeom>
-          <a:solidFill>
-            <a:srgbClr val="22223E"/>
-          </a:solidFill>
-        </p:spPr>
-        <p:style>
-          <a:lnRef idx="1">
-            <a:schemeClr val="accent1"/>
-          </a:lnRef>
-          <a:fillRef idx="3">
-            <a:schemeClr val="accent1"/>
-          </a:fillRef>
-          <a:effectRef idx="2">
-            <a:schemeClr val="accent1"/>
-          </a:effectRef>
-          <a:fontRef idx="minor">
-            <a:schemeClr val="lt1"/>
-          </a:fontRef>
-        </p:style>
-        <p:txBody>
-          <a:bodyPr rtlCol="0" anchor="ctr"/>
-          <a:lstStyle/>
-          <a:p>
-            <a:pPr algn="ctr"/>
-          </a:p>
-        </p:txBody>
-      </p:sp>
-      <p:sp>
-        <p:nvSpPr>
-          <p:cNvPr id="14" name="TextBox 13"/>
-          <p:cNvSpPr txBox="1"/>
-          <p:nvPr/>
-        </p:nvSpPr>
-        <p:spPr>
-          <a:xfrm>
-            <a:off x="6583680" y="1828800"/>
-            <a:ext cx="4389120" cy="365760"/>
-          </a:xfrm>
-          <a:prstGeom prst="rect">
-            <a:avLst/>
-          </a:prstGeom>
-          <a:noFill/>
-        </p:spPr>
-        <p:txBody>
-          <a:bodyPr wrap="square">
-            <a:spAutoFit/>
-          </a:bodyPr>
-          <a:lstStyle/>
-          <a:p>
-            <a:pPr algn="l">
-              <a:defRPr sz="2000" b="1">
-                <a:solidFill>
-                  <a:srgbClr val="FF88CC"/>
-                </a:solidFill>
-                <a:latin typeface="Arial"/>
-              </a:defRPr>
-            </a:pPr>
-            <a:r>
-              <a:t> 愛的抱抱</a:t>
-            </a:r>
-          </a:p>
-        </p:txBody>
-      </p:sp>
-      <p:sp>
-        <p:nvSpPr>
-          <p:cNvPr id="15" name="TextBox 14"/>
-          <p:cNvSpPr txBox="1"/>
-          <p:nvPr/>
-        </p:nvSpPr>
-        <p:spPr>
-          <a:xfrm>
-            <a:off x="6583680" y="2377440"/>
-            <a:ext cx="1828800" cy="274320"/>
-          </a:xfrm>
-          <a:prstGeom prst="rect">
-            <a:avLst/>
-          </a:prstGeom>
-          <a:noFill/>
-        </p:spPr>
-        <p:txBody>
-          <a:bodyPr wrap="square">
-            <a:spAutoFit/>
-          </a:bodyPr>
-          <a:lstStyle/>
-          <a:p>
-            <a:pPr algn="l">
-              <a:defRPr sz="1500" b="1">
-                <a:solidFill>
-                  <a:srgbClr val="FFBBDD"/>
-                </a:solidFill>
-                <a:latin typeface="Arial"/>
-              </a:defRPr>
-            </a:pPr>
-            <a:r>
-              <a:t>羽毛 🪶</a:t>
-            </a:r>
-          </a:p>
-        </p:txBody>
-      </p:sp>
-      <p:sp>
-        <p:nvSpPr>
-          <p:cNvPr id="16" name="TextBox 15"/>
-          <p:cNvSpPr txBox="1"/>
-          <p:nvPr/>
-        </p:nvSpPr>
-        <p:spPr>
-          <a:xfrm>
-            <a:off x="6583680" y="2743200"/>
-            <a:ext cx="3657600" cy="274320"/>
-          </a:xfrm>
-          <a:prstGeom prst="rect">
-            <a:avLst/>
-          </a:prstGeom>
-          <a:noFill/>
-        </p:spPr>
-        <p:txBody>
-          <a:bodyPr wrap="square">
-            <a:spAutoFit/>
-          </a:bodyPr>
-          <a:lstStyle/>
-          <a:p>
-            <a:pPr algn="l">
-              <a:defRPr sz="1300" b="0">
-                <a:solidFill>
-                  <a:srgbClr val="E8E8E8"/>
-                </a:solidFill>
-                <a:latin typeface="Arial"/>
-              </a:defRPr>
-            </a:pPr>
-            <a:r>
-              <a:t>輕柔飄落，小愛心</a:t>
-            </a:r>
-          </a:p>
-        </p:txBody>
-      </p:sp>
-      <p:sp>
-        <p:nvSpPr>
-          <p:cNvPr id="17" name="TextBox 16"/>
-          <p:cNvSpPr txBox="1"/>
-          <p:nvPr/>
-        </p:nvSpPr>
-        <p:spPr>
-          <a:xfrm>
-            <a:off x="6583680" y="3108960"/>
-            <a:ext cx="1828800" cy="274320"/>
-          </a:xfrm>
-          <a:prstGeom prst="rect">
-            <a:avLst/>
-          </a:prstGeom>
-          <a:noFill/>
-        </p:spPr>
-        <p:txBody>
-          <a:bodyPr wrap="square">
-            <a:spAutoFit/>
-          </a:bodyPr>
-          <a:lstStyle/>
-          <a:p>
-            <a:pPr algn="l">
-              <a:defRPr sz="1500" b="1">
-                <a:solidFill>
-                  <a:srgbClr val="FFBBDD"/>
-                </a:solidFill>
-                <a:latin typeface="Arial"/>
-              </a:defRPr>
-            </a:pPr>
-            <a:r>
-              <a:t>唇印 💋</a:t>
-            </a:r>
-          </a:p>
-        </p:txBody>
-      </p:sp>
-      <p:sp>
-        <p:nvSpPr>
-          <p:cNvPr id="18" name="TextBox 17"/>
-          <p:cNvSpPr txBox="1"/>
-          <p:nvPr/>
-        </p:nvSpPr>
-        <p:spPr>
-          <a:xfrm>
-            <a:off x="6583680" y="3474720"/>
-            <a:ext cx="3657600" cy="274320"/>
-          </a:xfrm>
-          <a:prstGeom prst="rect">
-            <a:avLst/>
-          </a:prstGeom>
-          <a:noFill/>
-        </p:spPr>
-        <p:txBody>
-          <a:bodyPr wrap="square">
-            <a:spAutoFit/>
-          </a:bodyPr>
-          <a:lstStyle/>
-          <a:p>
-            <a:pPr algn="l">
-              <a:defRPr sz="1300" b="0">
-                <a:solidFill>
-                  <a:srgbClr val="E8E8E8"/>
-                </a:solidFill>
-                <a:latin typeface="Arial"/>
-              </a:defRPr>
-            </a:pPr>
-            <a:r>
-              <a:t>紅色唇印 + 大心心</a:t>
-            </a:r>
-          </a:p>
-        </p:txBody>
-      </p:sp>
-      <p:sp>
-        <p:nvSpPr>
-          <p:cNvPr id="19" name="TextBox 18"/>
-          <p:cNvSpPr txBox="1"/>
-          <p:nvPr/>
-        </p:nvSpPr>
-        <p:spPr>
-          <a:xfrm>
-            <a:off x="6583680" y="3840480"/>
-            <a:ext cx="1828800" cy="274320"/>
-          </a:xfrm>
-          <a:prstGeom prst="rect">
-            <a:avLst/>
-          </a:prstGeom>
-          <a:noFill/>
-        </p:spPr>
-        <p:txBody>
-          <a:bodyPr wrap="square">
-            <a:spAutoFit/>
-          </a:bodyPr>
-          <a:lstStyle/>
-          <a:p>
-            <a:pPr algn="l">
-              <a:defRPr sz="1500" b="1">
-                <a:solidFill>
-                  <a:srgbClr val="FFBBDD"/>
-                </a:solidFill>
-                <a:latin typeface="Arial"/>
-              </a:defRPr>
-            </a:pPr>
-            <a:r>
-              <a:t>玫瑰 🌹</a:t>
-            </a:r>
-          </a:p>
-        </p:txBody>
-      </p:sp>
-      <p:sp>
-        <p:nvSpPr>
-          <p:cNvPr id="20" name="TextBox 19"/>
-          <p:cNvSpPr txBox="1"/>
-          <p:nvPr/>
-        </p:nvSpPr>
-        <p:spPr>
-          <a:xfrm>
-            <a:off x="6583680" y="4206240"/>
-            <a:ext cx="3657600" cy="274320"/>
-          </a:xfrm>
-          <a:prstGeom prst="rect">
-            <a:avLst/>
-          </a:prstGeom>
-          <a:noFill/>
-        </p:spPr>
-        <p:txBody>
-          <a:bodyPr wrap="square">
-            <a:spAutoFit/>
-          </a:bodyPr>
-          <a:lstStyle/>
-          <a:p>
-            <a:pPr algn="l">
-              <a:defRPr sz="1300" b="0">
-                <a:solidFill>
-                  <a:srgbClr val="E8E8E8"/>
-                </a:solidFill>
-                <a:latin typeface="Arial"/>
-              </a:defRPr>
-            </a:pPr>
-            <a:r>
-              <a:t>花瓣紛飛，浪漫效果</a:t>
-            </a:r>
-          </a:p>
-        </p:txBody>
-      </p:sp>
-      <p:sp>
-        <p:nvSpPr>
-          <p:cNvPr id="21" name="TextBox 20"/>
-          <p:cNvSpPr txBox="1"/>
-          <p:nvPr/>
-        </p:nvSpPr>
-        <p:spPr>
-          <a:xfrm>
-            <a:off x="1097280" y="5943600"/>
-            <a:ext cx="9144000" cy="274320"/>
-          </a:xfrm>
-          <a:prstGeom prst="rect">
-            <a:avLst/>
-          </a:prstGeom>
-          <a:noFill/>
-        </p:spPr>
-        <p:txBody>
-          <a:bodyPr wrap="square">
-            <a:spAutoFit/>
-          </a:bodyPr>
-          <a:lstStyle/>
-          <a:p>
-            <a:pPr algn="ctr">
-              <a:defRPr sz="1200" b="0">
-                <a:solidFill>
-                  <a:srgbClr val="999999"/>
-                </a:solidFill>
-                <a:latin typeface="Arial"/>
-              </a:defRPr>
-            </a:pPr>
-            <a:r>
-              <a:t>同一套碰撞/計分邏輯，切換工具類別即可更換動畫 + 音效</a:t>
-            </a:r>
-          </a:p>
-        </p:txBody>
-      </p:sp>
-    </p:spTree>
-  </p:cSld>
-  <p:clrMapOvr>
-    <a:masterClrMapping/>
-  </p:clrMapOvr>
-</p:sld>
-</file>
-
-<file path=ppt/slides/slide8.xml><?xml version="1.0" encoding="utf-8"?>
-<p:sld xmlns:a="http://schemas.openxmlformats.org/drawingml/2006/main" xmlns:p="http://schemas.openxmlformats.org/presentationml/2006/main" xmlns:r="http://schemas.openxmlformats.org/officeDocument/2006/relationships">
-  <p:cSld>
-    <p:bg>
-      <p:bgPr>
-        <a:solidFill>
-          <a:srgbClr val="1A1A2E"/>
-        </a:solidFill>
-        <a:effectLst/>
-      </p:bgPr>
-    </p:bg>
-    <p:spTree>
-      <p:nvGrpSpPr>
-        <p:cNvPr id="1" name=""/>
-        <p:cNvGrpSpPr/>
-        <p:nvPr/>
-      </p:nvGrpSpPr>
-      <p:grpSpPr/>
-      <p:sp>
-        <p:nvSpPr>
-          <p:cNvPr id="2" name="Rectangle 1"/>
-          <p:cNvSpPr/>
-          <p:nvPr/>
-        </p:nvSpPr>
-        <p:spPr>
-          <a:xfrm>
-            <a:off x="0" y="274320"/>
-            <a:ext cx="12191695" cy="50800"/>
-          </a:xfrm>
-          <a:prstGeom prst="rect">
-            <a:avLst/>
-          </a:prstGeom>
-          <a:solidFill>
-            <a:srgbClr val="00D4FF"/>
-          </a:solidFill>
-        </p:spPr>
-        <p:style>
-          <a:lnRef idx="1">
-            <a:schemeClr val="accent1"/>
-          </a:lnRef>
-          <a:fillRef idx="3">
-            <a:schemeClr val="accent1"/>
-          </a:fillRef>
-          <a:effectRef idx="2">
-            <a:schemeClr val="accent1"/>
-          </a:effectRef>
-          <a:fontRef idx="minor">
-            <a:schemeClr val="lt1"/>
-          </a:fontRef>
-        </p:style>
-        <p:txBody>
-          <a:bodyPr rtlCol="0" anchor="ctr"/>
-          <a:lstStyle/>
-          <a:p>
-            <a:pPr algn="ctr"/>
-          </a:p>
-        </p:txBody>
-      </p:sp>
-      <p:sp>
-        <p:nvSpPr>
-          <p:cNvPr id="3" name="TextBox 2"/>
-          <p:cNvSpPr txBox="1"/>
-          <p:nvPr/>
-        </p:nvSpPr>
-        <p:spPr>
-          <a:xfrm>
-            <a:off x="731520" y="457200"/>
-            <a:ext cx="7315200" cy="731520"/>
-          </a:xfrm>
-          <a:prstGeom prst="rect">
-            <a:avLst/>
-          </a:prstGeom>
-          <a:noFill/>
-        </p:spPr>
-        <p:txBody>
-          <a:bodyPr wrap="square">
-            <a:spAutoFit/>
-          </a:bodyPr>
-          <a:lstStyle/>
-          <a:p>
-            <a:pPr algn="l">
-              <a:defRPr sz="3600" b="1">
-                <a:solidFill>
-                  <a:srgbClr val="FFFFFF"/>
-                </a:solidFill>
-                <a:latin typeface="Arial"/>
-              </a:defRPr>
-            </a:pPr>
-            <a:r>
-              <a:t>資料庫 + 時程</a:t>
-            </a:r>
-          </a:p>
-        </p:txBody>
-      </p:sp>
-      <p:sp>
-        <p:nvSpPr>
-          <p:cNvPr id="4" name="Rectangle 3"/>
-          <p:cNvSpPr/>
-          <p:nvPr/>
-        </p:nvSpPr>
-        <p:spPr>
-          <a:xfrm>
-            <a:off x="731520" y="1188720"/>
-            <a:ext cx="2286000" cy="38100"/>
-          </a:xfrm>
-          <a:prstGeom prst="rect">
-            <a:avLst/>
-          </a:prstGeom>
-          <a:solidFill>
-            <a:srgbClr val="00D4FF"/>
-          </a:solidFill>
-        </p:spPr>
-        <p:style>
-          <a:lnRef idx="1">
-            <a:schemeClr val="accent1"/>
-          </a:lnRef>
-          <a:fillRef idx="3">
-            <a:schemeClr val="accent1"/>
-          </a:fillRef>
-          <a:effectRef idx="2">
-            <a:schemeClr val="accent1"/>
-          </a:effectRef>
-          <a:fontRef idx="minor">
-            <a:schemeClr val="lt1"/>
-          </a:fontRef>
-        </p:style>
-        <p:txBody>
-          <a:bodyPr rtlCol="0" anchor="ctr"/>
-          <a:lstStyle/>
-          <a:p>
-            <a:pPr algn="ctr"/>
-          </a:p>
-        </p:txBody>
-      </p:sp>
-      <p:sp>
-        <p:nvSpPr>
-          <p:cNvPr id="5" name="Rounded Rectangle 4"/>
-          <p:cNvSpPr/>
-          <p:nvPr/>
-        </p:nvSpPr>
-        <p:spPr>
-          <a:xfrm>
-            <a:off x="731520" y="1645920"/>
-            <a:ext cx="5029200" cy="4572000"/>
-          </a:xfrm>
-          <a:prstGeom prst="roundRect">
-            <a:avLst/>
-          </a:prstGeom>
-          <a:solidFill>
-            <a:srgbClr val="22223E"/>
-          </a:solidFill>
-        </p:spPr>
-        <p:style>
-          <a:lnRef idx="1">
-            <a:schemeClr val="accent1"/>
-          </a:lnRef>
-          <a:fillRef idx="3">
-            <a:schemeClr val="accent1"/>
-          </a:fillRef>
-          <a:effectRef idx="2">
-            <a:schemeClr val="accent1"/>
-          </a:effectRef>
-          <a:fontRef idx="minor">
-            <a:schemeClr val="lt1"/>
-          </a:fontRef>
-        </p:style>
-        <p:txBody>
-          <a:bodyPr rtlCol="0" anchor="ctr"/>
-          <a:lstStyle/>
-          <a:p>
-            <a:pPr algn="ctr"/>
-          </a:p>
-        </p:txBody>
-      </p:sp>
-      <p:sp>
-        <p:nvSpPr>
-          <p:cNvPr id="6" name="TextBox 5"/>
-          <p:cNvSpPr txBox="1"/>
-          <p:nvPr/>
-        </p:nvSpPr>
-        <p:spPr>
-          <a:xfrm>
-            <a:off x="1097280" y="1828800"/>
-            <a:ext cx="4389120" cy="365760"/>
-          </a:xfrm>
-          <a:prstGeom prst="rect">
-            <a:avLst/>
-          </a:prstGeom>
-          <a:noFill/>
-        </p:spPr>
-        <p:txBody>
-          <a:bodyPr wrap="square">
-            <a:spAutoFit/>
-          </a:bodyPr>
-          <a:lstStyle/>
-          <a:p>
-            <a:pPr algn="l">
-              <a:defRPr sz="1800" b="1">
-                <a:solidFill>
-                  <a:srgbClr val="FFD700"/>
-                </a:solidFill>
-                <a:latin typeface="Arial"/>
-              </a:defRPr>
-            </a:pPr>
-            <a:r>
-              <a:t> 資料庫 MVP 版本</a:t>
-            </a:r>
-          </a:p>
-        </p:txBody>
-      </p:sp>
-      <p:sp>
-        <p:nvSpPr>
-          <p:cNvPr id="7" name="TextBox 6"/>
-          <p:cNvSpPr txBox="1"/>
-          <p:nvPr/>
-        </p:nvSpPr>
-        <p:spPr>
-          <a:xfrm>
-            <a:off x="1097280" y="2377440"/>
-            <a:ext cx="1828800" cy="365760"/>
-          </a:xfrm>
-          <a:prstGeom prst="rect">
-            <a:avLst/>
-          </a:prstGeom>
-          <a:noFill/>
-        </p:spPr>
-        <p:txBody>
-          <a:bodyPr wrap="square">
-            <a:spAutoFit/>
-          </a:bodyPr>
-          <a:lstStyle/>
-          <a:p>
-            <a:pPr algn="l">
-              <a:defRPr sz="1300" b="1">
-                <a:solidFill>
-                  <a:srgbClr val="00D4FF"/>
-                </a:solidFill>
-                <a:latin typeface="Arial"/>
-              </a:defRPr>
-            </a:pPr>
-            <a:r>
-              <a:t>users</a:t>
-            </a:r>
-          </a:p>
-        </p:txBody>
-      </p:sp>
-      <p:sp>
-        <p:nvSpPr>
-          <p:cNvPr id="8" name="TextBox 7"/>
-          <p:cNvSpPr txBox="1"/>
-          <p:nvPr/>
-        </p:nvSpPr>
-        <p:spPr>
-          <a:xfrm>
-            <a:off x="3017520" y="2377440"/>
-            <a:ext cx="2743200" cy="365760"/>
-          </a:xfrm>
-          <a:prstGeom prst="rect">
-            <a:avLst/>
-          </a:prstGeom>
-          <a:noFill/>
-        </p:spPr>
-        <p:txBody>
-          <a:bodyPr wrap="square">
-            <a:spAutoFit/>
-          </a:bodyPr>
-          <a:lstStyle/>
-          <a:p>
-            <a:pPr algn="l">
-              <a:defRPr sz="1100" b="0">
-                <a:solidFill>
-                  <a:srgbClr val="E8E8E8"/>
-                </a:solidFill>
-                <a:latin typeface="Arial"/>
-              </a:defRPr>
-            </a:pPr>
-            <a:r>
-              <a:t>id, username, email, password_hash, created_at</a:t>
-            </a:r>
-          </a:p>
-        </p:txBody>
-      </p:sp>
-      <p:sp>
-        <p:nvSpPr>
-          <p:cNvPr id="9" name="TextBox 8"/>
-          <p:cNvSpPr txBox="1"/>
-          <p:nvPr/>
-        </p:nvSpPr>
-        <p:spPr>
-          <a:xfrm>
-            <a:off x="1097280" y="2834640"/>
-            <a:ext cx="1828800" cy="365760"/>
-          </a:xfrm>
-          <a:prstGeom prst="rect">
-            <a:avLst/>
-          </a:prstGeom>
-          <a:noFill/>
-        </p:spPr>
-        <p:txBody>
-          <a:bodyPr wrap="square">
-            <a:spAutoFit/>
-          </a:bodyPr>
-          <a:lstStyle/>
-          <a:p>
-            <a:pPr algn="l">
-              <a:defRPr sz="1300" b="1">
-                <a:solidFill>
-                  <a:srgbClr val="00D4FF"/>
-                </a:solidFill>
-                <a:latin typeface="Arial"/>
-              </a:defRPr>
-            </a:pPr>
-            <a:r>
-              <a:t>game_sessions</a:t>
-            </a:r>
-          </a:p>
-        </p:txBody>
-      </p:sp>
-      <p:sp>
-        <p:nvSpPr>
-          <p:cNvPr id="10" name="TextBox 9"/>
-          <p:cNvSpPr txBox="1"/>
-          <p:nvPr/>
-        </p:nvSpPr>
-        <p:spPr>
-          <a:xfrm>
-            <a:off x="3017520" y="2834640"/>
-            <a:ext cx="2743200" cy="365760"/>
-          </a:xfrm>
-          <a:prstGeom prst="rect">
-            <a:avLst/>
-          </a:prstGeom>
-          <a:noFill/>
-        </p:spPr>
-        <p:txBody>
-          <a:bodyPr wrap="square">
-            <a:spAutoFit/>
-          </a:bodyPr>
-          <a:lstStyle/>
-          <a:p>
-            <a:pPr algn="l">
-              <a:defRPr sz="1100" b="0">
-                <a:solidFill>
-                  <a:srgbClr val="E8E8E8"/>
-                </a:solidFill>
-                <a:latin typeface="Arial"/>
-              </a:defRPr>
-            </a:pPr>
-            <a:r>
-              <a:t>id, user_id, mode, score, combo, tool, result</a:t>
-            </a:r>
-          </a:p>
-        </p:txBody>
-      </p:sp>
-      <p:sp>
-        <p:nvSpPr>
-          <p:cNvPr id="11" name="TextBox 10"/>
-          <p:cNvSpPr txBox="1"/>
-          <p:nvPr/>
-        </p:nvSpPr>
-        <p:spPr>
-          <a:xfrm>
-            <a:off x="1097280" y="3291840"/>
-            <a:ext cx="1828800" cy="365760"/>
-          </a:xfrm>
-          <a:prstGeom prst="rect">
-            <a:avLst/>
-          </a:prstGeom>
-          <a:noFill/>
-        </p:spPr>
-        <p:txBody>
-          <a:bodyPr wrap="square">
-            <a:spAutoFit/>
-          </a:bodyPr>
-          <a:lstStyle/>
-          <a:p>
-            <a:pPr algn="l">
-              <a:defRPr sz="1300" b="1">
-                <a:solidFill>
-                  <a:srgbClr val="00D4FF"/>
-                </a:solidFill>
-                <a:latin typeface="Arial"/>
-              </a:defRPr>
-            </a:pPr>
-            <a:r>
-              <a:t>blessings</a:t>
-            </a:r>
-          </a:p>
-        </p:txBody>
-      </p:sp>
-      <p:sp>
-        <p:nvSpPr>
-          <p:cNvPr id="12" name="TextBox 11"/>
-          <p:cNvSpPr txBox="1"/>
-          <p:nvPr/>
-        </p:nvSpPr>
-        <p:spPr>
-          <a:xfrm>
-            <a:off x="3017520" y="3291840"/>
-            <a:ext cx="2743200" cy="365760"/>
-          </a:xfrm>
-          <a:prstGeom prst="rect">
-            <a:avLst/>
-          </a:prstGeom>
-          <a:noFill/>
-        </p:spPr>
-        <p:txBody>
-          <a:bodyPr wrap="square">
-            <a:spAutoFit/>
-          </a:bodyPr>
-          <a:lstStyle/>
-          <a:p>
-            <a:pPr algn="l">
-              <a:defRPr sz="1100" b="0">
-                <a:solidFill>
-                  <a:srgbClr val="E8E8E8"/>
-                </a:solidFill>
-                <a:latin typeface="Arial"/>
-              </a:defRPr>
-            </a:pPr>
-            <a:r>
-              <a:t>id, user_id, message, paper_doll_id</a:t>
-            </a:r>
-          </a:p>
-        </p:txBody>
-      </p:sp>
-      <p:sp>
-        <p:nvSpPr>
-          <p:cNvPr id="13" name="TextBox 12"/>
-          <p:cNvSpPr txBox="1"/>
-          <p:nvPr/>
-        </p:nvSpPr>
-        <p:spPr>
-          <a:xfrm>
-            <a:off x="1097280" y="3749039"/>
-            <a:ext cx="1828800" cy="365760"/>
-          </a:xfrm>
-          <a:prstGeom prst="rect">
-            <a:avLst/>
-          </a:prstGeom>
-          <a:noFill/>
-        </p:spPr>
-        <p:txBody>
-          <a:bodyPr wrap="square">
-            <a:spAutoFit/>
-          </a:bodyPr>
-          <a:lstStyle/>
-          <a:p>
-            <a:pPr algn="l">
-              <a:defRPr sz="1300" b="1">
-                <a:solidFill>
-                  <a:srgbClr val="00D4FF"/>
-                </a:solidFill>
-                <a:latin typeface="Arial"/>
-              </a:defRPr>
-            </a:pPr>
-            <a:r>
-              <a:t>tools</a:t>
-            </a:r>
-          </a:p>
-        </p:txBody>
-      </p:sp>
-      <p:sp>
-        <p:nvSpPr>
-          <p:cNvPr id="14" name="TextBox 13"/>
-          <p:cNvSpPr txBox="1"/>
-          <p:nvPr/>
-        </p:nvSpPr>
-        <p:spPr>
-          <a:xfrm>
-            <a:off x="3017520" y="3749039"/>
-            <a:ext cx="2743200" cy="365760"/>
-          </a:xfrm>
-          <a:prstGeom prst="rect">
-            <a:avLst/>
-          </a:prstGeom>
-          <a:noFill/>
-        </p:spPr>
-        <p:txBody>
-          <a:bodyPr wrap="square">
-            <a:spAutoFit/>
-          </a:bodyPr>
-          <a:lstStyle/>
-          <a:p>
-            <a:pPr algn="l">
-              <a:defRPr sz="1100" b="0">
-                <a:solidFill>
-                  <a:srgbClr val="E8E8E8"/>
-                </a:solidFill>
-                <a:latin typeface="Arial"/>
-              </a:defRPr>
-            </a:pPr>
-            <a:r>
-              <a:t>id, name, icon, mode, power, range</a:t>
-            </a:r>
-          </a:p>
-        </p:txBody>
-      </p:sp>
-      <p:sp>
-        <p:nvSpPr>
-          <p:cNvPr id="15" name="TextBox 14"/>
-          <p:cNvSpPr txBox="1"/>
-          <p:nvPr/>
-        </p:nvSpPr>
-        <p:spPr>
-          <a:xfrm>
-            <a:off x="1097280" y="4389120"/>
-            <a:ext cx="4389120" cy="1371600"/>
-          </a:xfrm>
-          <a:prstGeom prst="rect">
-            <a:avLst/>
-          </a:prstGeom>
-          <a:noFill/>
-        </p:spPr>
-        <p:txBody>
-          <a:bodyPr wrap="square">
-            <a:spAutoFit/>
-          </a:bodyPr>
-          <a:lstStyle/>
-          <a:p>
-            <a:pPr algn="l">
-              <a:defRPr sz="1100" b="0">
-                <a:solidFill>
-                  <a:srgbClr val="999999"/>
-                </a:solidFill>
-                <a:latin typeface="Arial"/>
-              </a:defRPr>
-            </a:pPr>
-            <a:r>
-              <a:t>[ 紙人用 JSON config ]</a:t>
-            </a:r>
-            <a:br/>
-            <a:r>
-              <a:t>[ 音樂 Web Audio API ]</a:t>
-            </a:r>
-            <a:br/>
-            <a:r>
-              <a:t>[ Render Postgres 1GB 免費 ]</a:t>
-            </a:r>
-          </a:p>
-        </p:txBody>
-      </p:sp>
-      <p:sp>
-        <p:nvSpPr>
-          <p:cNvPr id="16" name="Rounded Rectangle 15"/>
-          <p:cNvSpPr/>
-          <p:nvPr/>
-        </p:nvSpPr>
-        <p:spPr>
-          <a:xfrm>
-            <a:off x="6217920" y="1645920"/>
-            <a:ext cx="5029200" cy="4572000"/>
-          </a:xfrm>
-          <a:prstGeom prst="roundRect">
-            <a:avLst/>
-          </a:prstGeom>
-          <a:solidFill>
-            <a:srgbClr val="22223E"/>
-          </a:solidFill>
-        </p:spPr>
-        <p:style>
-          <a:lnRef idx="1">
-            <a:schemeClr val="accent1"/>
-          </a:lnRef>
-          <a:fillRef idx="3">
-            <a:schemeClr val="accent1"/>
-          </a:fillRef>
-          <a:effectRef idx="2">
-            <a:schemeClr val="accent1"/>
-          </a:effectRef>
-          <a:fontRef idx="minor">
-            <a:schemeClr val="lt1"/>
-          </a:fontRef>
-        </p:style>
-        <p:txBody>
-          <a:bodyPr rtlCol="0" anchor="ctr"/>
-          <a:lstStyle/>
-          <a:p>
-            <a:pPr algn="ctr"/>
-          </a:p>
-        </p:txBody>
-      </p:sp>
-      <p:sp>
-        <p:nvSpPr>
-          <p:cNvPr id="17" name="TextBox 16"/>
-          <p:cNvSpPr txBox="1"/>
-          <p:nvPr/>
-        </p:nvSpPr>
-        <p:spPr>
-          <a:xfrm>
-            <a:off x="6583680" y="1828800"/>
-            <a:ext cx="4389120" cy="365760"/>
-          </a:xfrm>
-          <a:prstGeom prst="rect">
-            <a:avLst/>
-          </a:prstGeom>
-          <a:noFill/>
-        </p:spPr>
-        <p:txBody>
-          <a:bodyPr wrap="square">
-            <a:spAutoFit/>
-          </a:bodyPr>
-          <a:lstStyle/>
-          <a:p>
-            <a:pPr algn="l">
-              <a:defRPr sz="1800" b="1">
-                <a:solidFill>
-                  <a:srgbClr val="FFD700"/>
-                </a:solidFill>
-                <a:latin typeface="Arial"/>
-              </a:defRPr>
-            </a:pPr>
-            <a:r>
-              <a:t> 開發時程</a:t>
-            </a:r>
-          </a:p>
-        </p:txBody>
-      </p:sp>
-      <p:sp>
-        <p:nvSpPr>
-          <p:cNvPr id="18" name="TextBox 17"/>
-          <p:cNvSpPr txBox="1"/>
-          <p:nvPr/>
-        </p:nvSpPr>
-        <p:spPr>
-          <a:xfrm>
-            <a:off x="6583680" y="2377440"/>
-            <a:ext cx="2286000" cy="365760"/>
-          </a:xfrm>
-          <a:prstGeom prst="rect">
-            <a:avLst/>
-          </a:prstGeom>
-          <a:noFill/>
-        </p:spPr>
-        <p:txBody>
-          <a:bodyPr wrap="square">
-            <a:spAutoFit/>
-          </a:bodyPr>
-          <a:lstStyle/>
-          <a:p>
-            <a:pPr algn="l">
-              <a:defRPr sz="1300" b="0">
-                <a:solidFill>
-                  <a:srgbClr val="E8E8E8"/>
-                </a:solidFill>
-                <a:latin typeface="Arial"/>
-              </a:defRPr>
-            </a:pPr>
-            <a:r>
-              <a:t>Setup</a:t>
-            </a:r>
-          </a:p>
-        </p:txBody>
-      </p:sp>
-      <p:sp>
-        <p:nvSpPr>
-          <p:cNvPr id="19" name="TextBox 18"/>
-          <p:cNvSpPr txBox="1"/>
-          <p:nvPr/>
-        </p:nvSpPr>
-        <p:spPr>
-          <a:xfrm>
-            <a:off x="9144000" y="2377440"/>
-            <a:ext cx="1371600" cy="365760"/>
-          </a:xfrm>
-          <a:prstGeom prst="rect">
-            <a:avLst/>
-          </a:prstGeom>
-          <a:noFill/>
-        </p:spPr>
-        <p:txBody>
-          <a:bodyPr wrap="square">
-            <a:spAutoFit/>
-          </a:bodyPr>
-          <a:lstStyle/>
-          <a:p>
-            <a:pPr algn="l">
-              <a:defRPr sz="1300" b="1">
-                <a:solidFill>
-                  <a:srgbClr val="00D4FF"/>
-                </a:solidFill>
-                <a:latin typeface="Arial"/>
-              </a:defRPr>
-            </a:pPr>
-            <a:r>
-              <a:t>1-2日</a:t>
-            </a:r>
-          </a:p>
-        </p:txBody>
-      </p:sp>
-      <p:sp>
-        <p:nvSpPr>
-          <p:cNvPr id="20" name="TextBox 19"/>
-          <p:cNvSpPr txBox="1"/>
-          <p:nvPr/>
-        </p:nvSpPr>
-        <p:spPr>
-          <a:xfrm>
-            <a:off x="6583680" y="2880360"/>
-            <a:ext cx="2286000" cy="365760"/>
-          </a:xfrm>
-          <a:prstGeom prst="rect">
-            <a:avLst/>
-          </a:prstGeom>
-          <a:noFill/>
-        </p:spPr>
-        <p:txBody>
-          <a:bodyPr wrap="square">
-            <a:spAutoFit/>
-          </a:bodyPr>
-          <a:lstStyle/>
-          <a:p>
-            <a:pPr algn="l">
-              <a:defRPr sz="1300" b="0">
-                <a:solidFill>
-                  <a:srgbClr val="E8E8E8"/>
-                </a:solidFill>
-                <a:latin typeface="Arial"/>
-              </a:defRPr>
-            </a:pPr>
-            <a:r>
-              <a:t>Auth</a:t>
-            </a:r>
-          </a:p>
-        </p:txBody>
-      </p:sp>
-      <p:sp>
-        <p:nvSpPr>
-          <p:cNvPr id="21" name="TextBox 20"/>
-          <p:cNvSpPr txBox="1"/>
-          <p:nvPr/>
-        </p:nvSpPr>
-        <p:spPr>
-          <a:xfrm>
-            <a:off x="9144000" y="2880360"/>
-            <a:ext cx="1371600" cy="365760"/>
-          </a:xfrm>
-          <a:prstGeom prst="rect">
-            <a:avLst/>
-          </a:prstGeom>
-          <a:noFill/>
-        </p:spPr>
-        <p:txBody>
-          <a:bodyPr wrap="square">
-            <a:spAutoFit/>
-          </a:bodyPr>
-          <a:lstStyle/>
-          <a:p>
-            <a:pPr algn="l">
-              <a:defRPr sz="1300" b="1">
-                <a:solidFill>
-                  <a:srgbClr val="00D4FF"/>
-                </a:solidFill>
-                <a:latin typeface="Arial"/>
-              </a:defRPr>
-            </a:pPr>
-            <a:r>
-              <a:t>1-2日</a:t>
-            </a:r>
-          </a:p>
-        </p:txBody>
-      </p:sp>
-      <p:sp>
-        <p:nvSpPr>
-          <p:cNvPr id="22" name="TextBox 21"/>
-          <p:cNvSpPr txBox="1"/>
-          <p:nvPr/>
-        </p:nvSpPr>
-        <p:spPr>
-          <a:xfrm>
-            <a:off x="6583680" y="3383280"/>
-            <a:ext cx="2286000" cy="365760"/>
-          </a:xfrm>
-          <a:prstGeom prst="rect">
-            <a:avLst/>
-          </a:prstGeom>
-          <a:noFill/>
-        </p:spPr>
-        <p:txBody>
-          <a:bodyPr wrap="square">
-            <a:spAutoFit/>
-          </a:bodyPr>
-          <a:lstStyle/>
-          <a:p>
-            <a:pPr algn="l">
-              <a:defRPr sz="1300" b="0">
-                <a:solidFill>
-                  <a:srgbClr val="E8E8E8"/>
-                </a:solidFill>
-                <a:latin typeface="Arial"/>
-              </a:defRPr>
-            </a:pPr>
-            <a:r>
-              <a:t>Splash v2</a:t>
-            </a:r>
-          </a:p>
-        </p:txBody>
-      </p:sp>
-      <p:sp>
-        <p:nvSpPr>
-          <p:cNvPr id="23" name="TextBox 22"/>
-          <p:cNvSpPr txBox="1"/>
-          <p:nvPr/>
-        </p:nvSpPr>
-        <p:spPr>
-          <a:xfrm>
-            <a:off x="9144000" y="3383280"/>
-            <a:ext cx="1371600" cy="365760"/>
-          </a:xfrm>
-          <a:prstGeom prst="rect">
-            <a:avLst/>
-          </a:prstGeom>
-          <a:noFill/>
-        </p:spPr>
-        <p:txBody>
-          <a:bodyPr wrap="square">
-            <a:spAutoFit/>
-          </a:bodyPr>
-          <a:lstStyle/>
-          <a:p>
-            <a:pPr algn="l">
-              <a:defRPr sz="1300" b="1">
-                <a:solidFill>
-                  <a:srgbClr val="00D4FF"/>
-                </a:solidFill>
-                <a:latin typeface="Arial"/>
-              </a:defRPr>
-            </a:pPr>
-            <a:r>
-              <a:t>2日</a:t>
-            </a:r>
-          </a:p>
-        </p:txBody>
-      </p:sp>
-      <p:sp>
-        <p:nvSpPr>
-          <p:cNvPr id="24" name="TextBox 23"/>
-          <p:cNvSpPr txBox="1"/>
-          <p:nvPr/>
-        </p:nvSpPr>
-        <p:spPr>
-          <a:xfrm>
-            <a:off x="6583680" y="3886200"/>
-            <a:ext cx="2286000" cy="365760"/>
-          </a:xfrm>
-          <a:prstGeom prst="rect">
-            <a:avLst/>
-          </a:prstGeom>
-          <a:noFill/>
-        </p:spPr>
-        <p:txBody>
-          <a:bodyPr wrap="square">
-            <a:spAutoFit/>
-          </a:bodyPr>
-          <a:lstStyle/>
-          <a:p>
-            <a:pPr algn="l">
-              <a:defRPr sz="1300" b="0">
-                <a:solidFill>
-                  <a:srgbClr val="E8E8E8"/>
-                </a:solidFill>
-                <a:latin typeface="Arial"/>
-              </a:defRPr>
-            </a:pPr>
-            <a:r>
-              <a:t>主頁</a:t>
-            </a:r>
-          </a:p>
-        </p:txBody>
-      </p:sp>
-      <p:sp>
-        <p:nvSpPr>
-          <p:cNvPr id="25" name="TextBox 24"/>
-          <p:cNvSpPr txBox="1"/>
-          <p:nvPr/>
-        </p:nvSpPr>
-        <p:spPr>
-          <a:xfrm>
-            <a:off x="9144000" y="3886200"/>
-            <a:ext cx="1371600" cy="365760"/>
-          </a:xfrm>
-          <a:prstGeom prst="rect">
-            <a:avLst/>
-          </a:prstGeom>
-          <a:noFill/>
-        </p:spPr>
-        <p:txBody>
-          <a:bodyPr wrap="square">
-            <a:spAutoFit/>
-          </a:bodyPr>
-          <a:lstStyle/>
-          <a:p>
-            <a:pPr algn="l">
-              <a:defRPr sz="1300" b="1">
-                <a:solidFill>
-                  <a:srgbClr val="00D4FF"/>
-                </a:solidFill>
-                <a:latin typeface="Arial"/>
-              </a:defRPr>
-            </a:pPr>
-            <a:r>
-              <a:t>1日</a:t>
-            </a:r>
-          </a:p>
-        </p:txBody>
-      </p:sp>
-      <p:sp>
-        <p:nvSpPr>
-          <p:cNvPr id="26" name="TextBox 25"/>
-          <p:cNvSpPr txBox="1"/>
-          <p:nvPr/>
-        </p:nvSpPr>
-        <p:spPr>
-          <a:xfrm>
-            <a:off x="6583680" y="4389120"/>
-            <a:ext cx="2286000" cy="365760"/>
-          </a:xfrm>
-          <a:prstGeom prst="rect">
-            <a:avLst/>
-          </a:prstGeom>
-          <a:noFill/>
-        </p:spPr>
-        <p:txBody>
-          <a:bodyPr wrap="square">
-            <a:spAutoFit/>
-          </a:bodyPr>
-          <a:lstStyle/>
-          <a:p>
-            <a:pPr algn="l">
-              <a:defRPr sz="1300" b="0">
-                <a:solidFill>
-                  <a:srgbClr val="E8E8E8"/>
-                </a:solidFill>
-                <a:latin typeface="Arial"/>
-              </a:defRPr>
-            </a:pPr>
-            <a:r>
-              <a:t>打小人 game</a:t>
-            </a:r>
-          </a:p>
-        </p:txBody>
-      </p:sp>
-      <p:sp>
-        <p:nvSpPr>
-          <p:cNvPr id="27" name="TextBox 26"/>
-          <p:cNvSpPr txBox="1"/>
-          <p:nvPr/>
-        </p:nvSpPr>
-        <p:spPr>
-          <a:xfrm>
-            <a:off x="9144000" y="4389120"/>
-            <a:ext cx="1371600" cy="365760"/>
-          </a:xfrm>
-          <a:prstGeom prst="rect">
-            <a:avLst/>
-          </a:prstGeom>
-          <a:noFill/>
-        </p:spPr>
-        <p:txBody>
-          <a:bodyPr wrap="square">
-            <a:spAutoFit/>
-          </a:bodyPr>
-          <a:lstStyle/>
-          <a:p>
-            <a:pPr algn="l">
-              <a:defRPr sz="1300" b="1">
-                <a:solidFill>
-                  <a:srgbClr val="00D4FF"/>
-                </a:solidFill>
-                <a:latin typeface="Arial"/>
-              </a:defRPr>
-            </a:pPr>
-            <a:r>
-              <a:t>4日</a:t>
-            </a:r>
-          </a:p>
-        </p:txBody>
-      </p:sp>
-      <p:sp>
-        <p:nvSpPr>
-          <p:cNvPr id="28" name="TextBox 27"/>
-          <p:cNvSpPr txBox="1"/>
-          <p:nvPr/>
-        </p:nvSpPr>
-        <p:spPr>
-          <a:xfrm>
-            <a:off x="6583680" y="4892040"/>
-            <a:ext cx="2286000" cy="365760"/>
-          </a:xfrm>
-          <a:prstGeom prst="rect">
-            <a:avLst/>
-          </a:prstGeom>
-          <a:noFill/>
-        </p:spPr>
-        <p:txBody>
-          <a:bodyPr wrap="square">
-            <a:spAutoFit/>
-          </a:bodyPr>
-          <a:lstStyle/>
-          <a:p>
-            <a:pPr algn="l">
-              <a:defRPr sz="1300" b="0">
-                <a:solidFill>
-                  <a:srgbClr val="E8E8E8"/>
-                </a:solidFill>
-                <a:latin typeface="Arial"/>
-              </a:defRPr>
-            </a:pPr>
-            <a:r>
-              <a:t>愛的抱抱</a:t>
-            </a:r>
-          </a:p>
-        </p:txBody>
-      </p:sp>
-      <p:sp>
-        <p:nvSpPr>
-          <p:cNvPr id="29" name="TextBox 28"/>
-          <p:cNvSpPr txBox="1"/>
-          <p:nvPr/>
-        </p:nvSpPr>
-        <p:spPr>
-          <a:xfrm>
-            <a:off x="9144000" y="4892040"/>
-            <a:ext cx="1371600" cy="365760"/>
-          </a:xfrm>
-          <a:prstGeom prst="rect">
-            <a:avLst/>
-          </a:prstGeom>
-          <a:noFill/>
-        </p:spPr>
-        <p:txBody>
-          <a:bodyPr wrap="square">
-            <a:spAutoFit/>
-          </a:bodyPr>
-          <a:lstStyle/>
-          <a:p>
-            <a:pPr algn="l">
-              <a:defRPr sz="1300" b="1">
-                <a:solidFill>
-                  <a:srgbClr val="00D4FF"/>
-                </a:solidFill>
-                <a:latin typeface="Arial"/>
-              </a:defRPr>
-            </a:pPr>
-            <a:r>
-              <a:t>2日</a:t>
-            </a:r>
-          </a:p>
-        </p:txBody>
-      </p:sp>
-      <p:sp>
-        <p:nvSpPr>
-          <p:cNvPr id="30" name="TextBox 29"/>
-          <p:cNvSpPr txBox="1"/>
-          <p:nvPr/>
-        </p:nvSpPr>
-        <p:spPr>
-          <a:xfrm>
-            <a:off x="6583680" y="5394960"/>
-            <a:ext cx="2286000" cy="365760"/>
-          </a:xfrm>
-          <a:prstGeom prst="rect">
-            <a:avLst/>
-          </a:prstGeom>
-          <a:noFill/>
-        </p:spPr>
-        <p:txBody>
-          <a:bodyPr wrap="square">
-            <a:spAutoFit/>
-          </a:bodyPr>
-          <a:lstStyle/>
-          <a:p>
-            <a:pPr algn="l">
-              <a:defRPr sz="1300" b="0">
-                <a:solidFill>
-                  <a:srgbClr val="E8E8E8"/>
-                </a:solidFill>
-                <a:latin typeface="Arial"/>
-              </a:defRPr>
-            </a:pPr>
-            <a:r>
-              <a:t>音樂系統</a:t>
-            </a:r>
-          </a:p>
-        </p:txBody>
-      </p:sp>
-      <p:sp>
-        <p:nvSpPr>
-          <p:cNvPr id="31" name="TextBox 30"/>
-          <p:cNvSpPr txBox="1"/>
-          <p:nvPr/>
-        </p:nvSpPr>
-        <p:spPr>
-          <a:xfrm>
-            <a:off x="9144000" y="5394960"/>
-            <a:ext cx="1371600" cy="365760"/>
-          </a:xfrm>
-          <a:prstGeom prst="rect">
-            <a:avLst/>
-          </a:prstGeom>
-          <a:noFill/>
-        </p:spPr>
-        <p:txBody>
-          <a:bodyPr wrap="square">
-            <a:spAutoFit/>
-          </a:bodyPr>
-          <a:lstStyle/>
-          <a:p>
-            <a:pPr algn="l">
-              <a:defRPr sz="1300" b="1">
-                <a:solidFill>
-                  <a:srgbClr val="00D4FF"/>
-                </a:solidFill>
-                <a:latin typeface="Arial"/>
-              </a:defRPr>
-            </a:pPr>
-            <a:r>
-              <a:t>1日</a:t>
-            </a:r>
-          </a:p>
-        </p:txBody>
-      </p:sp>
-      <p:sp>
-        <p:nvSpPr>
-          <p:cNvPr id="32" name="TextBox 31"/>
-          <p:cNvSpPr txBox="1"/>
-          <p:nvPr/>
-        </p:nvSpPr>
-        <p:spPr>
-          <a:xfrm>
-            <a:off x="6583680" y="5897880"/>
-            <a:ext cx="2286000" cy="365760"/>
-          </a:xfrm>
-          <a:prstGeom prst="rect">
-            <a:avLst/>
-          </a:prstGeom>
-          <a:noFill/>
-        </p:spPr>
-        <p:txBody>
-          <a:bodyPr wrap="square">
-            <a:spAutoFit/>
-          </a:bodyPr>
-          <a:lstStyle/>
-          <a:p>
-            <a:pPr algn="l">
-              <a:defRPr sz="1300" b="0">
-                <a:solidFill>
-                  <a:srgbClr val="E8E8E8"/>
-                </a:solidFill>
-                <a:latin typeface="Arial"/>
-              </a:defRPr>
-            </a:pPr>
-            <a:r>
-              <a:t>測試修正</a:t>
-            </a:r>
-          </a:p>
-        </p:txBody>
-      </p:sp>
-      <p:sp>
-        <p:nvSpPr>
-          <p:cNvPr id="33" name="TextBox 32"/>
-          <p:cNvSpPr txBox="1"/>
-          <p:nvPr/>
-        </p:nvSpPr>
-        <p:spPr>
-          <a:xfrm>
-            <a:off x="9144000" y="5897880"/>
-            <a:ext cx="1371600" cy="365760"/>
-          </a:xfrm>
-          <a:prstGeom prst="rect">
-            <a:avLst/>
-          </a:prstGeom>
-          <a:noFill/>
-        </p:spPr>
-        <p:txBody>
-          <a:bodyPr wrap="square">
-            <a:spAutoFit/>
-          </a:bodyPr>
-          <a:lstStyle/>
-          <a:p>
-            <a:pPr algn="l">
-              <a:defRPr sz="1300" b="1">
-                <a:solidFill>
-                  <a:srgbClr val="00D4FF"/>
-                </a:solidFill>
-                <a:latin typeface="Arial"/>
-              </a:defRPr>
-            </a:pPr>
-            <a:r>
-              <a:t>2日</a:t>
-            </a:r>
-          </a:p>
-        </p:txBody>
-      </p:sp>
-      <p:sp>
-        <p:nvSpPr>
-          <p:cNvPr id="34" name="TextBox 33"/>
-          <p:cNvSpPr txBox="1"/>
-          <p:nvPr/>
-        </p:nvSpPr>
-        <p:spPr>
-          <a:xfrm>
-            <a:off x="6583680" y="5943600"/>
-            <a:ext cx="4389120" cy="274320"/>
-          </a:xfrm>
-          <a:prstGeom prst="rect">
-            <a:avLst/>
-          </a:prstGeom>
-          <a:noFill/>
-        </p:spPr>
-        <p:txBody>
-          <a:bodyPr wrap="square">
-            <a:spAutoFit/>
-          </a:bodyPr>
-          <a:lstStyle/>
-          <a:p>
-            <a:pPr algn="ctr">
-              <a:defRPr sz="1600" b="1">
-                <a:solidFill>
-                  <a:srgbClr val="FFD700"/>
-                </a:solidFill>
-                <a:latin typeface="Arial"/>
-              </a:defRPr>
-            </a:pPr>
-            <a:r>
-              <a:t>總計 ~14-17 日</a:t>
-            </a:r>
-          </a:p>
-        </p:txBody>
-      </p:sp>
-    </p:spTree>
-  </p:cSld>
-  <p:clrMapOvr>
-    <a:masterClrMapping/>
-  </p:clrMapOvr>
-</p:sld>
-</file>
-
-<file path=ppt/slides/slide9.xml><?xml version="1.0" encoding="utf-8"?>
-<p:sld xmlns:a="http://schemas.openxmlformats.org/drawingml/2006/main" xmlns:p="http://schemas.openxmlformats.org/presentationml/2006/main" xmlns:r="http://schemas.openxmlformats.org/officeDocument/2006/relationships">
-  <p:cSld>
-    <p:bg>
-      <p:bgPr>
-        <a:solidFill>
-          <a:srgbClr val="1A1A2E"/>
-        </a:solidFill>
-        <a:effectLst/>
-      </p:bgPr>
-    </p:bg>
-    <p:spTree>
-      <p:nvGrpSpPr>
-        <p:cNvPr id="1" name=""/>
-        <p:cNvGrpSpPr/>
-        <p:nvPr/>
-      </p:nvGrpSpPr>
-      <p:grpSpPr/>
-      <p:sp>
-        <p:nvSpPr>
-          <p:cNvPr id="2" name="Rectangle 1"/>
-          <p:cNvSpPr/>
-          <p:nvPr/>
-        </p:nvSpPr>
-        <p:spPr>
-          <a:xfrm>
-            <a:off x="0" y="0"/>
-            <a:ext cx="12191695" cy="73152"/>
-          </a:xfrm>
-          <a:prstGeom prst="rect">
-            <a:avLst/>
-          </a:prstGeom>
-          <a:solidFill>
-            <a:srgbClr val="00D4FF"/>
-          </a:solidFill>
-        </p:spPr>
-        <p:style>
-          <a:lnRef idx="1">
-            <a:schemeClr val="accent1"/>
-          </a:lnRef>
-          <a:fillRef idx="3">
-            <a:schemeClr val="accent1"/>
-          </a:fillRef>
-          <a:effectRef idx="2">
-            <a:schemeClr val="accent1"/>
-          </a:effectRef>
-          <a:fontRef idx="minor">
-            <a:schemeClr val="lt1"/>
-          </a:fontRef>
-        </p:style>
-        <p:txBody>
-          <a:bodyPr rtlCol="0" anchor="ctr"/>
-          <a:lstStyle/>
-          <a:p>
-            <a:pPr algn="ctr"/>
-          </a:p>
-        </p:txBody>
-      </p:sp>
-      <p:sp>
-        <p:nvSpPr>
-          <p:cNvPr id="3" name="TextBox 2"/>
-          <p:cNvSpPr txBox="1"/>
-          <p:nvPr/>
-        </p:nvSpPr>
-        <p:spPr>
-          <a:xfrm>
-            <a:off x="914400" y="1371600"/>
-            <a:ext cx="10058400" cy="1371600"/>
-          </a:xfrm>
-          <a:prstGeom prst="rect">
-            <a:avLst/>
-          </a:prstGeom>
-          <a:noFill/>
-        </p:spPr>
-        <p:txBody>
-          <a:bodyPr wrap="square">
-            <a:spAutoFit/>
-          </a:bodyPr>
-          <a:lstStyle/>
-          <a:p>
-            <a:pPr algn="ctr">
-              <a:defRPr sz="4800" b="1">
-                <a:solidFill>
-                  <a:srgbClr val="FFFFFF"/>
-                </a:solidFill>
-                <a:latin typeface="Arial"/>
-              </a:defRPr>
-            </a:pPr>
-            <a:r>
-              <a:t> 準備開工  v2</a:t>
-            </a:r>
-          </a:p>
-        </p:txBody>
-      </p:sp>
-      <p:sp>
-        <p:nvSpPr>
-          <p:cNvPr id="4" name="TextBox 3"/>
-          <p:cNvSpPr txBox="1"/>
-          <p:nvPr/>
-        </p:nvSpPr>
-        <p:spPr>
-          <a:xfrm>
-            <a:off x="914400" y="2926080"/>
-            <a:ext cx="10058400" cy="731520"/>
-          </a:xfrm>
-          <a:prstGeom prst="rect">
-            <a:avLst/>
-          </a:prstGeom>
-          <a:noFill/>
-        </p:spPr>
-        <p:txBody>
-          <a:bodyPr wrap="square">
-            <a:spAutoFit/>
-          </a:bodyPr>
-          <a:lstStyle/>
-          <a:p>
-            <a:pPr algn="ctr">
-              <a:defRPr sz="2400" b="0">
-                <a:solidFill>
-                  <a:srgbClr val="00D4FF"/>
-                </a:solidFill>
-                <a:latin typeface="Arial"/>
-              </a:defRPr>
-            </a:pPr>
-            <a:r>
-              <a:t>打者愛也 — 口訣節奏 · 一打一抱 · 音樂同步</a:t>
-            </a:r>
-          </a:p>
-        </p:txBody>
-      </p:sp>
-      <p:sp>
-        <p:nvSpPr>
-          <p:cNvPr id="5" name="Rectangle 4"/>
-          <p:cNvSpPr/>
-          <p:nvPr/>
-        </p:nvSpPr>
-        <p:spPr>
-          <a:xfrm>
-            <a:off x="4572000" y="3931920"/>
-            <a:ext cx="2743200" cy="25400"/>
-          </a:xfrm>
-          <a:prstGeom prst="rect">
-            <a:avLst/>
-          </a:prstGeom>
-          <a:solidFill>
-            <a:srgbClr val="FFD700"/>
-          </a:solidFill>
-        </p:spPr>
-        <p:style>
-          <a:lnRef idx="1">
-            <a:schemeClr val="accent1"/>
-          </a:lnRef>
-          <a:fillRef idx="3">
-            <a:schemeClr val="accent1"/>
-          </a:fillRef>
-          <a:effectRef idx="2">
-            <a:schemeClr val="accent1"/>
-          </a:effectRef>
-          <a:fontRef idx="minor">
-            <a:schemeClr val="lt1"/>
-          </a:fontRef>
-        </p:style>
-        <p:txBody>
-          <a:bodyPr rtlCol="0" anchor="ctr"/>
-          <a:lstStyle/>
-          <a:p>
-            <a:pPr algn="ctr"/>
-          </a:p>
-        </p:txBody>
-      </p:sp>
-      <p:sp>
-        <p:nvSpPr>
           <p:cNvPr id="6" name="TextBox 5"/>
           <p:cNvSpPr txBox="1"/>
           <p:nvPr/>
@@ -10759,7 +8137,7 @@
               </a:defRPr>
             </a:pPr>
             <a:r>
-              <a:t>文件 v2 · 14-17 日 MVP · 確認後開寫</a:t>
+              <a:t>文件 v3 最終版 · 確認後拆 Sprint 1 · 開寫 MVP</a:t>
             </a:r>
           </a:p>
         </p:txBody>
